--- a/Talend-TMC-MCP-Architecture.pptx
+++ b/Talend-TMC-MCP-Architecture.pptx
@@ -1370,7 +1370,55 @@
       </p:sp>
       <p:sp>
         <p:nvSpPr>
-          <p:cNvPr id="6" name="Shape 4"/>
+          <p:cNvPr id="6" name="Text 4">
+            <a:hlinkClick r:id="rId1" tooltip="Open repo"/>
+          </p:cNvPr>
+          <p:cNvSpPr/>
+          <p:nvPr/>
+        </p:nvSpPr>
+        <p:spPr>
+          <a:xfrm>
+            <a:off x="914400" y="3703320"/>
+            <a:ext cx="10515600" cy="365760"/>
+          </a:xfrm>
+          <a:prstGeom prst="rect">
+            <a:avLst/>
+          </a:prstGeom>
+          <a:noFill/>
+          <a:ln/>
+        </p:spPr>
+        <p:txBody>
+          <a:bodyPr wrap="square" rtlCol="0" anchor="ctr"/>
+          <a:lstStyle/>
+          <a:p>
+            <a:pPr indent="0" marL="0">
+              <a:buNone/>
+            </a:pPr>
+            <a:r>
+              <a:rPr lang="en-US" sz="1400" b="1" u="sng" dirty="0">
+                <a:solidFill>
+                  <a:srgbClr val="009845"/>
+                </a:solidFill>
+                <a:latin typeface="Inter" pitchFamily="34" charset="0"/>
+                <a:ea typeface="Inter" pitchFamily="34" charset="-122"/>
+                <a:cs typeface="Inter" pitchFamily="34" charset="-120"/>
+                <a:hlinkClick r:id="rId1" invalidUrl="" action="" tgtFrame="" tooltip="Open repo" history="1" highlightClick="0" endSnd="0">
+                  <a:extLst>
+                    <a:ext uri="{A12FA001-AC4F-418D-AE19-62706E023703}">
+                      <ahyp:hlinkClr xmlns:ahyp="http://schemas.microsoft.com/office/drawing/2018/hyperlinkcolor" val="tx"/>
+                    </a:ext>
+                  </a:extLst>
+                </a:hlinkClick>
+              </a:rPr>
+              <a:t>github.com/robertschoenfeldqlik/QlikObservabilityToolkit</a:t>
+            </a:r>
+            <a:endParaRPr lang="en-US" sz="1400" dirty="0"/>
+          </a:p>
+        </p:txBody>
+      </p:sp>
+      <p:sp>
+        <p:nvSpPr>
+          <p:cNvPr id="7" name="Shape 5"/>
           <p:cNvSpPr/>
           <p:nvPr/>
         </p:nvSpPr>
@@ -1397,7 +1445,7 @@
       </p:sp>
       <p:sp>
         <p:nvSpPr>
-          <p:cNvPr id="7" name="Text 5"/>
+          <p:cNvPr id="8" name="Text 6"/>
           <p:cNvSpPr/>
           <p:nvPr/>
         </p:nvSpPr>
@@ -1436,7 +1484,7 @@
       </p:sp>
       <p:sp>
         <p:nvSpPr>
-          <p:cNvPr id="8" name="Text 6"/>
+          <p:cNvPr id="9" name="Text 7"/>
           <p:cNvSpPr/>
           <p:nvPr/>
         </p:nvSpPr>
@@ -1475,7 +1523,7 @@
       </p:sp>
       <p:sp>
         <p:nvSpPr>
-          <p:cNvPr id="9" name="Text 7"/>
+          <p:cNvPr id="10" name="Text 8"/>
           <p:cNvSpPr/>
           <p:nvPr/>
         </p:nvSpPr>
@@ -1514,7 +1562,7 @@
       </p:sp>
       <p:sp>
         <p:nvSpPr>
-          <p:cNvPr id="10" name="Shape 8"/>
+          <p:cNvPr id="11" name="Shape 9"/>
           <p:cNvSpPr/>
           <p:nvPr/>
         </p:nvSpPr>
@@ -1541,7 +1589,7 @@
       </p:sp>
       <p:sp>
         <p:nvSpPr>
-          <p:cNvPr id="11" name="Text 9"/>
+          <p:cNvPr id="12" name="Text 10"/>
           <p:cNvSpPr/>
           <p:nvPr/>
         </p:nvSpPr>
@@ -1580,7 +1628,7 @@
       </p:sp>
       <p:sp>
         <p:nvSpPr>
-          <p:cNvPr id="12" name="Text 10"/>
+          <p:cNvPr id="13" name="Text 11"/>
           <p:cNvSpPr/>
           <p:nvPr/>
         </p:nvSpPr>
@@ -1619,7 +1667,7 @@
       </p:sp>
       <p:sp>
         <p:nvSpPr>
-          <p:cNvPr id="13" name="Text 11"/>
+          <p:cNvPr id="14" name="Text 12"/>
           <p:cNvSpPr/>
           <p:nvPr/>
         </p:nvSpPr>
@@ -1658,7 +1706,7 @@
       </p:sp>
       <p:sp>
         <p:nvSpPr>
-          <p:cNvPr id="14" name="Shape 12"/>
+          <p:cNvPr id="15" name="Shape 13"/>
           <p:cNvSpPr/>
           <p:nvPr/>
         </p:nvSpPr>
@@ -1685,7 +1733,7 @@
       </p:sp>
       <p:sp>
         <p:nvSpPr>
-          <p:cNvPr id="15" name="Text 13"/>
+          <p:cNvPr id="16" name="Text 14"/>
           <p:cNvSpPr/>
           <p:nvPr/>
         </p:nvSpPr>
@@ -1724,7 +1772,7 @@
       </p:sp>
       <p:sp>
         <p:nvSpPr>
-          <p:cNvPr id="16" name="Text 14"/>
+          <p:cNvPr id="17" name="Text 15"/>
           <p:cNvSpPr/>
           <p:nvPr/>
         </p:nvSpPr>
@@ -1763,7 +1811,7 @@
       </p:sp>
       <p:sp>
         <p:nvSpPr>
-          <p:cNvPr id="17" name="Text 15"/>
+          <p:cNvPr id="18" name="Text 16"/>
           <p:cNvSpPr/>
           <p:nvPr/>
         </p:nvSpPr>
@@ -6608,953 +6656,19 @@
       </p:sp>
       <p:sp>
         <p:nvSpPr>
-          <p:cNvPr id="4" name="Text 2"/>
-          <p:cNvSpPr/>
-          <p:nvPr/>
-        </p:nvSpPr>
-        <p:spPr>
-          <a:xfrm>
-            <a:off x="457200" y="1828800"/>
-            <a:ext cx="2377440" cy="274320"/>
-          </a:xfrm>
-          <a:prstGeom prst="rect">
-            <a:avLst/>
-          </a:prstGeom>
-          <a:noFill/>
-          <a:ln/>
-        </p:spPr>
-        <p:txBody>
-          <a:bodyPr wrap="square" rtlCol="0" anchor="ctr"/>
-          <a:lstStyle/>
-          <a:p>
-            <a:pPr indent="0" marL="0">
-              <a:buNone/>
-            </a:pPr>
-            <a:r>
-              <a:rPr lang="en-US" sz="1100" b="1" dirty="0">
-                <a:solidFill>
-                  <a:srgbClr val="10CFC9"/>
-                </a:solidFill>
-                <a:latin typeface="Inter" pitchFamily="34" charset="0"/>
-                <a:ea typeface="Inter" pitchFamily="34" charset="-122"/>
-                <a:cs typeface="Inter" pitchFamily="34" charset="-120"/>
-              </a:rPr>
-              <a:t>Talend Cloud APIs</a:t>
-            </a:r>
-            <a:endParaRPr lang="en-US" sz="1100" dirty="0"/>
-          </a:p>
-        </p:txBody>
-      </p:sp>
-      <p:sp>
-        <p:nvSpPr>
-          <p:cNvPr id="5" name="Text 3"/>
-          <p:cNvSpPr/>
-          <p:nvPr/>
-        </p:nvSpPr>
-        <p:spPr>
-          <a:xfrm>
-            <a:off x="2834640" y="1828800"/>
-            <a:ext cx="3383280" cy="274320"/>
-          </a:xfrm>
-          <a:prstGeom prst="rect">
-            <a:avLst/>
-          </a:prstGeom>
-          <a:noFill/>
-          <a:ln/>
-        </p:spPr>
-        <p:txBody>
-          <a:bodyPr wrap="square" rtlCol="0" anchor="ctr"/>
-          <a:lstStyle/>
-          <a:p>
-            <a:pPr indent="0" marL="0">
-              <a:buNone/>
-            </a:pPr>
-            <a:r>
-              <a:rPr lang="en-US" sz="1000" dirty="0">
-                <a:solidFill>
-                  <a:srgbClr val="FFFFFF"/>
-                </a:solidFill>
-                <a:latin typeface="Inter" pitchFamily="34" charset="0"/>
-                <a:ea typeface="Inter" pitchFamily="34" charset="-122"/>
-                <a:cs typeface="Inter" pitchFamily="34" charset="-120"/>
-              </a:rPr>
-              <a:t>https://talend.qlik.dev/apis/</a:t>
-            </a:r>
-            <a:endParaRPr lang="en-US" sz="1000" dirty="0"/>
-          </a:p>
-        </p:txBody>
-      </p:sp>
-      <p:sp>
-        <p:nvSpPr>
-          <p:cNvPr id="6" name="Text 4"/>
-          <p:cNvSpPr/>
-          <p:nvPr/>
-        </p:nvSpPr>
-        <p:spPr>
-          <a:xfrm>
-            <a:off x="6217920" y="1828800"/>
-            <a:ext cx="2377440" cy="274320"/>
-          </a:xfrm>
-          <a:prstGeom prst="rect">
-            <a:avLst/>
-          </a:prstGeom>
-          <a:noFill/>
-          <a:ln/>
-        </p:spPr>
-        <p:txBody>
-          <a:bodyPr wrap="square" rtlCol="0" anchor="ctr"/>
-          <a:lstStyle/>
-          <a:p>
-            <a:pPr indent="0" marL="0">
-              <a:buNone/>
-            </a:pPr>
-            <a:r>
-              <a:rPr lang="en-US" sz="1100" b="1" dirty="0">
-                <a:solidFill>
-                  <a:srgbClr val="10CFC9"/>
-                </a:solidFill>
-                <a:latin typeface="Inter" pitchFamily="34" charset="0"/>
-                <a:ea typeface="Inter" pitchFamily="34" charset="-122"/>
-                <a:cs typeface="Inter" pitchFamily="34" charset="-120"/>
-              </a:rPr>
-              <a:t>Talend Remote Engine job logs</a:t>
-            </a:r>
-            <a:endParaRPr lang="en-US" sz="1100" dirty="0"/>
-          </a:p>
-        </p:txBody>
-      </p:sp>
-      <p:sp>
-        <p:nvSpPr>
-          <p:cNvPr id="7" name="Text 5"/>
-          <p:cNvSpPr/>
-          <p:nvPr/>
-        </p:nvSpPr>
-        <p:spPr>
-          <a:xfrm>
-            <a:off x="8595360" y="1828800"/>
-            <a:ext cx="3383280" cy="274320"/>
-          </a:xfrm>
-          <a:prstGeom prst="rect">
-            <a:avLst/>
-          </a:prstGeom>
-          <a:noFill/>
-          <a:ln/>
-        </p:spPr>
-        <p:txBody>
-          <a:bodyPr wrap="square" rtlCol="0" anchor="ctr"/>
-          <a:lstStyle/>
-          <a:p>
-            <a:pPr indent="0" marL="0">
-              <a:buNone/>
-            </a:pPr>
-            <a:r>
-              <a:rPr lang="en-US" sz="1000" dirty="0">
-                <a:solidFill>
-                  <a:srgbClr val="FFFFFF"/>
-                </a:solidFill>
-                <a:latin typeface="Inter" pitchFamily="34" charset="0"/>
-                <a:ea typeface="Inter" pitchFamily="34" charset="-122"/>
-                <a:cs typeface="Inter" pitchFamily="34" charset="-120"/>
-              </a:rPr>
-              <a:t>https://help.qlik.com/talend/en-US/remote-engine-user-guide-linux/Cloud/job-management-logs</a:t>
-            </a:r>
-            <a:endParaRPr lang="en-US" sz="1000" dirty="0"/>
-          </a:p>
-        </p:txBody>
-      </p:sp>
-      <p:sp>
-        <p:nvSpPr>
-          <p:cNvPr id="8" name="Text 6"/>
-          <p:cNvSpPr/>
-          <p:nvPr/>
-        </p:nvSpPr>
-        <p:spPr>
-          <a:xfrm>
-            <a:off x="457200" y="2331720"/>
-            <a:ext cx="2377440" cy="274320"/>
-          </a:xfrm>
-          <a:prstGeom prst="rect">
-            <a:avLst/>
-          </a:prstGeom>
-          <a:noFill/>
-          <a:ln/>
-        </p:spPr>
-        <p:txBody>
-          <a:bodyPr wrap="square" rtlCol="0" anchor="ctr"/>
-          <a:lstStyle/>
-          <a:p>
-            <a:pPr indent="0" marL="0">
-              <a:buNone/>
-            </a:pPr>
-            <a:r>
-              <a:rPr lang="en-US" sz="1100" b="1" dirty="0">
-                <a:solidFill>
-                  <a:srgbClr val="10CFC9"/>
-                </a:solidFill>
-                <a:latin typeface="Inter" pitchFamily="34" charset="0"/>
-                <a:ea typeface="Inter" pitchFamily="34" charset="-122"/>
-                <a:cs typeface="Inter" pitchFamily="34" charset="-120"/>
-              </a:rPr>
-              <a:t>Qlik Cloud APIs (qlik.dev)</a:t>
-            </a:r>
-            <a:endParaRPr lang="en-US" sz="1100" dirty="0"/>
-          </a:p>
-        </p:txBody>
-      </p:sp>
-      <p:sp>
-        <p:nvSpPr>
-          <p:cNvPr id="9" name="Text 7"/>
-          <p:cNvSpPr/>
-          <p:nvPr/>
-        </p:nvSpPr>
-        <p:spPr>
-          <a:xfrm>
-            <a:off x="2834640" y="2331720"/>
-            <a:ext cx="3383280" cy="274320"/>
-          </a:xfrm>
-          <a:prstGeom prst="rect">
-            <a:avLst/>
-          </a:prstGeom>
-          <a:noFill/>
-          <a:ln/>
-        </p:spPr>
-        <p:txBody>
-          <a:bodyPr wrap="square" rtlCol="0" anchor="ctr"/>
-          <a:lstStyle/>
-          <a:p>
-            <a:pPr indent="0" marL="0">
-              <a:buNone/>
-            </a:pPr>
-            <a:r>
-              <a:rPr lang="en-US" sz="1000" dirty="0">
-                <a:solidFill>
-                  <a:srgbClr val="FFFFFF"/>
-                </a:solidFill>
-                <a:latin typeface="Inter" pitchFamily="34" charset="0"/>
-                <a:ea typeface="Inter" pitchFamily="34" charset="-122"/>
-                <a:cs typeface="Inter" pitchFamily="34" charset="-120"/>
-              </a:rPr>
-              <a:t>https://qlik.dev/apis/</a:t>
-            </a:r>
-            <a:endParaRPr lang="en-US" sz="1000" dirty="0"/>
-          </a:p>
-        </p:txBody>
-      </p:sp>
-      <p:sp>
-        <p:nvSpPr>
-          <p:cNvPr id="10" name="Text 8"/>
-          <p:cNvSpPr/>
-          <p:nvPr/>
-        </p:nvSpPr>
-        <p:spPr>
-          <a:xfrm>
-            <a:off x="6217920" y="2331720"/>
-            <a:ext cx="2377440" cy="274320"/>
-          </a:xfrm>
-          <a:prstGeom prst="rect">
-            <a:avLst/>
-          </a:prstGeom>
-          <a:noFill/>
-          <a:ln/>
-        </p:spPr>
-        <p:txBody>
-          <a:bodyPr wrap="square" rtlCol="0" anchor="ctr"/>
-          <a:lstStyle/>
-          <a:p>
-            <a:pPr indent="0" marL="0">
-              <a:buNone/>
-            </a:pPr>
-            <a:r>
-              <a:rPr lang="en-US" sz="1100" b="1" dirty="0">
-                <a:solidFill>
-                  <a:srgbClr val="10CFC9"/>
-                </a:solidFill>
-                <a:latin typeface="Inter" pitchFamily="34" charset="0"/>
-                <a:ea typeface="Inter" pitchFamily="34" charset="-122"/>
-                <a:cs typeface="Inter" pitchFamily="34" charset="-120"/>
-              </a:rPr>
-              <a:t>Qlik Cloud Data Files API</a:t>
-            </a:r>
-            <a:endParaRPr lang="en-US" sz="1100" dirty="0"/>
-          </a:p>
-        </p:txBody>
-      </p:sp>
-      <p:sp>
-        <p:nvSpPr>
-          <p:cNvPr id="11" name="Text 9"/>
-          <p:cNvSpPr/>
-          <p:nvPr/>
-        </p:nvSpPr>
-        <p:spPr>
-          <a:xfrm>
-            <a:off x="8595360" y="2331720"/>
-            <a:ext cx="3383280" cy="274320"/>
-          </a:xfrm>
-          <a:prstGeom prst="rect">
-            <a:avLst/>
-          </a:prstGeom>
-          <a:noFill/>
-          <a:ln/>
-        </p:spPr>
-        <p:txBody>
-          <a:bodyPr wrap="square" rtlCol="0" anchor="ctr"/>
-          <a:lstStyle/>
-          <a:p>
-            <a:pPr indent="0" marL="0">
-              <a:buNone/>
-            </a:pPr>
-            <a:r>
-              <a:rPr lang="en-US" sz="1000" dirty="0">
-                <a:solidFill>
-                  <a:srgbClr val="FFFFFF"/>
-                </a:solidFill>
-                <a:latin typeface="Inter" pitchFamily="34" charset="0"/>
-                <a:ea typeface="Inter" pitchFamily="34" charset="-122"/>
-                <a:cs typeface="Inter" pitchFamily="34" charset="-120"/>
-              </a:rPr>
-              <a:t>https://qlik.dev/apis/rest/data-files/</a:t>
-            </a:r>
-            <a:endParaRPr lang="en-US" sz="1000" dirty="0"/>
-          </a:p>
-        </p:txBody>
-      </p:sp>
-      <p:sp>
-        <p:nvSpPr>
-          <p:cNvPr id="12" name="Text 10"/>
-          <p:cNvSpPr/>
-          <p:nvPr/>
-        </p:nvSpPr>
-        <p:spPr>
-          <a:xfrm>
-            <a:off x="457200" y="2834640"/>
-            <a:ext cx="2377440" cy="274320"/>
-          </a:xfrm>
-          <a:prstGeom prst="rect">
-            <a:avLst/>
-          </a:prstGeom>
-          <a:noFill/>
-          <a:ln/>
-        </p:spPr>
-        <p:txBody>
-          <a:bodyPr wrap="square" rtlCol="0" anchor="ctr"/>
-          <a:lstStyle/>
-          <a:p>
-            <a:pPr indent="0" marL="0">
-              <a:buNone/>
-            </a:pPr>
-            <a:r>
-              <a:rPr lang="en-US" sz="1100" b="1" dirty="0">
-                <a:solidFill>
-                  <a:srgbClr val="10CFC9"/>
-                </a:solidFill>
-                <a:latin typeface="Inter" pitchFamily="34" charset="0"/>
-                <a:ea typeface="Inter" pitchFamily="34" charset="-122"/>
-                <a:cs typeface="Inter" pitchFamily="34" charset="-120"/>
-              </a:rPr>
-              <a:t>Qlik Cloud API key management</a:t>
-            </a:r>
-            <a:endParaRPr lang="en-US" sz="1100" dirty="0"/>
-          </a:p>
-        </p:txBody>
-      </p:sp>
-      <p:sp>
-        <p:nvSpPr>
-          <p:cNvPr id="13" name="Text 11"/>
-          <p:cNvSpPr/>
-          <p:nvPr/>
-        </p:nvSpPr>
-        <p:spPr>
-          <a:xfrm>
-            <a:off x="2834640" y="2834640"/>
-            <a:ext cx="3383280" cy="274320"/>
-          </a:xfrm>
-          <a:prstGeom prst="rect">
-            <a:avLst/>
-          </a:prstGeom>
-          <a:noFill/>
-          <a:ln/>
-        </p:spPr>
-        <p:txBody>
-          <a:bodyPr wrap="square" rtlCol="0" anchor="ctr"/>
-          <a:lstStyle/>
-          <a:p>
-            <a:pPr indent="0" marL="0">
-              <a:buNone/>
-            </a:pPr>
-            <a:r>
-              <a:rPr lang="en-US" sz="1000" dirty="0">
-                <a:solidFill>
-                  <a:srgbClr val="FFFFFF"/>
-                </a:solidFill>
-                <a:latin typeface="Inter" pitchFamily="34" charset="0"/>
-                <a:ea typeface="Inter" pitchFamily="34" charset="-122"/>
-                <a:cs typeface="Inter" pitchFamily="34" charset="-120"/>
-              </a:rPr>
-              <a:t>https://qlik.dev/authenticate/api-key/manage-api-keys/</a:t>
-            </a:r>
-            <a:endParaRPr lang="en-US" sz="1000" dirty="0"/>
-          </a:p>
-        </p:txBody>
-      </p:sp>
-      <p:sp>
-        <p:nvSpPr>
-          <p:cNvPr id="14" name="Text 12"/>
-          <p:cNvSpPr/>
-          <p:nvPr/>
-        </p:nvSpPr>
-        <p:spPr>
-          <a:xfrm>
-            <a:off x="6217920" y="2834640"/>
-            <a:ext cx="2377440" cy="274320"/>
-          </a:xfrm>
-          <a:prstGeom prst="rect">
-            <a:avLst/>
-          </a:prstGeom>
-          <a:noFill/>
-          <a:ln/>
-        </p:spPr>
-        <p:txBody>
-          <a:bodyPr wrap="square" rtlCol="0" anchor="ctr"/>
-          <a:lstStyle/>
-          <a:p>
-            <a:pPr indent="0" marL="0">
-              <a:buNone/>
-            </a:pPr>
-            <a:r>
-              <a:rPr lang="en-US" sz="1100" b="1" dirty="0">
-                <a:solidFill>
-                  <a:srgbClr val="10CFC9"/>
-                </a:solidFill>
-                <a:latin typeface="Inter" pitchFamily="34" charset="0"/>
-                <a:ea typeface="Inter" pitchFamily="34" charset="-122"/>
-                <a:cs typeface="Inter" pitchFamily="34" charset="-120"/>
-              </a:rPr>
-              <a:t>Qlik UI palette source</a:t>
-            </a:r>
-            <a:endParaRPr lang="en-US" sz="1100" dirty="0"/>
-          </a:p>
-        </p:txBody>
-      </p:sp>
-      <p:sp>
-        <p:nvSpPr>
-          <p:cNvPr id="15" name="Text 13"/>
-          <p:cNvSpPr/>
-          <p:nvPr/>
-        </p:nvSpPr>
-        <p:spPr>
-          <a:xfrm>
-            <a:off x="8595360" y="2834640"/>
-            <a:ext cx="3383280" cy="274320"/>
-          </a:xfrm>
-          <a:prstGeom prst="rect">
-            <a:avLst/>
-          </a:prstGeom>
-          <a:noFill/>
-          <a:ln/>
-        </p:spPr>
-        <p:txBody>
-          <a:bodyPr wrap="square" rtlCol="0" anchor="ctr"/>
-          <a:lstStyle/>
-          <a:p>
-            <a:pPr indent="0" marL="0">
-              <a:buNone/>
-            </a:pPr>
-            <a:r>
-              <a:rPr lang="en-US" sz="1000" dirty="0">
-                <a:solidFill>
-                  <a:srgbClr val="FFFFFF"/>
-                </a:solidFill>
-                <a:latin typeface="Inter" pitchFamily="34" charset="0"/>
-                <a:ea typeface="Inter" pitchFamily="34" charset="-122"/>
-                <a:cs typeface="Inter" pitchFamily="34" charset="-120"/>
-              </a:rPr>
-              <a:t>https://qlik.dev/manage/data-connections/create-data-connections/</a:t>
-            </a:r>
-            <a:endParaRPr lang="en-US" sz="1000" dirty="0"/>
-          </a:p>
-        </p:txBody>
-      </p:sp>
-      <p:sp>
-        <p:nvSpPr>
-          <p:cNvPr id="16" name="Text 14"/>
-          <p:cNvSpPr/>
-          <p:nvPr/>
-        </p:nvSpPr>
-        <p:spPr>
-          <a:xfrm>
-            <a:off x="457200" y="3337560"/>
-            <a:ext cx="2377440" cy="274320"/>
-          </a:xfrm>
-          <a:prstGeom prst="rect">
-            <a:avLst/>
-          </a:prstGeom>
-          <a:noFill/>
-          <a:ln/>
-        </p:spPr>
-        <p:txBody>
-          <a:bodyPr wrap="square" rtlCol="0" anchor="ctr"/>
-          <a:lstStyle/>
-          <a:p>
-            <a:pPr indent="0" marL="0">
-              <a:buNone/>
-            </a:pPr>
-            <a:r>
-              <a:rPr lang="en-US" sz="1100" b="1" dirty="0">
-                <a:solidFill>
-                  <a:srgbClr val="10CFC9"/>
-                </a:solidFill>
-                <a:latin typeface="Inter" pitchFamily="34" charset="0"/>
-                <a:ea typeface="Inter" pitchFamily="34" charset="-122"/>
-                <a:cs typeface="Inter" pitchFamily="34" charset="-120"/>
-              </a:rPr>
-              <a:t>Model Context Protocol</a:t>
-            </a:r>
-            <a:endParaRPr lang="en-US" sz="1100" dirty="0"/>
-          </a:p>
-        </p:txBody>
-      </p:sp>
-      <p:sp>
-        <p:nvSpPr>
-          <p:cNvPr id="17" name="Text 15"/>
-          <p:cNvSpPr/>
-          <p:nvPr/>
-        </p:nvSpPr>
-        <p:spPr>
-          <a:xfrm>
-            <a:off x="2834640" y="3337560"/>
-            <a:ext cx="3383280" cy="274320"/>
-          </a:xfrm>
-          <a:prstGeom prst="rect">
-            <a:avLst/>
-          </a:prstGeom>
-          <a:noFill/>
-          <a:ln/>
-        </p:spPr>
-        <p:txBody>
-          <a:bodyPr wrap="square" rtlCol="0" anchor="ctr"/>
-          <a:lstStyle/>
-          <a:p>
-            <a:pPr indent="0" marL="0">
-              <a:buNone/>
-            </a:pPr>
-            <a:r>
-              <a:rPr lang="en-US" sz="1000" dirty="0">
-                <a:solidFill>
-                  <a:srgbClr val="FFFFFF"/>
-                </a:solidFill>
-                <a:latin typeface="Inter" pitchFamily="34" charset="0"/>
-                <a:ea typeface="Inter" pitchFamily="34" charset="-122"/>
-                <a:cs typeface="Inter" pitchFamily="34" charset="-120"/>
-              </a:rPr>
-              <a:t>https://modelcontextprotocol.io/specification</a:t>
-            </a:r>
-            <a:endParaRPr lang="en-US" sz="1000" dirty="0"/>
-          </a:p>
-        </p:txBody>
-      </p:sp>
-      <p:sp>
-        <p:nvSpPr>
-          <p:cNvPr id="18" name="Text 16"/>
-          <p:cNvSpPr/>
-          <p:nvPr/>
-        </p:nvSpPr>
-        <p:spPr>
-          <a:xfrm>
-            <a:off x="6217920" y="3337560"/>
-            <a:ext cx="2377440" cy="274320"/>
-          </a:xfrm>
-          <a:prstGeom prst="rect">
-            <a:avLst/>
-          </a:prstGeom>
-          <a:noFill/>
-          <a:ln/>
-        </p:spPr>
-        <p:txBody>
-          <a:bodyPr wrap="square" rtlCol="0" anchor="ctr"/>
-          <a:lstStyle/>
-          <a:p>
-            <a:pPr indent="0" marL="0">
-              <a:buNone/>
-            </a:pPr>
-            <a:r>
-              <a:rPr lang="en-US" sz="1100" b="1" dirty="0">
-                <a:solidFill>
-                  <a:srgbClr val="10CFC9"/>
-                </a:solidFill>
-                <a:latin typeface="Inter" pitchFamily="34" charset="0"/>
-                <a:ea typeface="Inter" pitchFamily="34" charset="-122"/>
-                <a:cs typeface="Inter" pitchFamily="34" charset="-120"/>
-              </a:rPr>
-              <a:t>Prometheus metric naming</a:t>
-            </a:r>
-            <a:endParaRPr lang="en-US" sz="1100" dirty="0"/>
-          </a:p>
-        </p:txBody>
-      </p:sp>
-      <p:sp>
-        <p:nvSpPr>
-          <p:cNvPr id="19" name="Text 17"/>
-          <p:cNvSpPr/>
-          <p:nvPr/>
-        </p:nvSpPr>
-        <p:spPr>
-          <a:xfrm>
-            <a:off x="8595360" y="3337560"/>
-            <a:ext cx="3383280" cy="274320"/>
-          </a:xfrm>
-          <a:prstGeom prst="rect">
-            <a:avLst/>
-          </a:prstGeom>
-          <a:noFill/>
-          <a:ln/>
-        </p:spPr>
-        <p:txBody>
-          <a:bodyPr wrap="square" rtlCol="0" anchor="ctr"/>
-          <a:lstStyle/>
-          <a:p>
-            <a:pPr indent="0" marL="0">
-              <a:buNone/>
-            </a:pPr>
-            <a:r>
-              <a:rPr lang="en-US" sz="1000" dirty="0">
-                <a:solidFill>
-                  <a:srgbClr val="FFFFFF"/>
-                </a:solidFill>
-                <a:latin typeface="Inter" pitchFamily="34" charset="0"/>
-                <a:ea typeface="Inter" pitchFamily="34" charset="-122"/>
-                <a:cs typeface="Inter" pitchFamily="34" charset="-120"/>
-              </a:rPr>
-              <a:t>https://prometheus.io/docs/practices/naming/</a:t>
-            </a:r>
-            <a:endParaRPr lang="en-US" sz="1000" dirty="0"/>
-          </a:p>
-        </p:txBody>
-      </p:sp>
-      <p:sp>
-        <p:nvSpPr>
-          <p:cNvPr id="20" name="Text 18"/>
-          <p:cNvSpPr/>
-          <p:nvPr/>
-        </p:nvSpPr>
-        <p:spPr>
-          <a:xfrm>
-            <a:off x="457200" y="3840480"/>
-            <a:ext cx="2377440" cy="274320"/>
-          </a:xfrm>
-          <a:prstGeom prst="rect">
-            <a:avLst/>
-          </a:prstGeom>
-          <a:noFill/>
-          <a:ln/>
-        </p:spPr>
-        <p:txBody>
-          <a:bodyPr wrap="square" rtlCol="0" anchor="ctr"/>
-          <a:lstStyle/>
-          <a:p>
-            <a:pPr indent="0" marL="0">
-              <a:buNone/>
-            </a:pPr>
-            <a:r>
-              <a:rPr lang="en-US" sz="1100" b="1" dirty="0">
-                <a:solidFill>
-                  <a:srgbClr val="10CFC9"/>
-                </a:solidFill>
-                <a:latin typeface="Inter" pitchFamily="34" charset="0"/>
-                <a:ea typeface="Inter" pitchFamily="34" charset="-122"/>
-                <a:cs typeface="Inter" pitchFamily="34" charset="-120"/>
-              </a:rPr>
-              <a:t>Grafana dashboard provisioning</a:t>
-            </a:r>
-            <a:endParaRPr lang="en-US" sz="1100" dirty="0"/>
-          </a:p>
-        </p:txBody>
-      </p:sp>
-      <p:sp>
-        <p:nvSpPr>
-          <p:cNvPr id="21" name="Text 19"/>
-          <p:cNvSpPr/>
-          <p:nvPr/>
-        </p:nvSpPr>
-        <p:spPr>
-          <a:xfrm>
-            <a:off x="2834640" y="3840480"/>
-            <a:ext cx="3383280" cy="274320"/>
-          </a:xfrm>
-          <a:prstGeom prst="rect">
-            <a:avLst/>
-          </a:prstGeom>
-          <a:noFill/>
-          <a:ln/>
-        </p:spPr>
-        <p:txBody>
-          <a:bodyPr wrap="square" rtlCol="0" anchor="ctr"/>
-          <a:lstStyle/>
-          <a:p>
-            <a:pPr indent="0" marL="0">
-              <a:buNone/>
-            </a:pPr>
-            <a:r>
-              <a:rPr lang="en-US" sz="1000" dirty="0">
-                <a:solidFill>
-                  <a:srgbClr val="FFFFFF"/>
-                </a:solidFill>
-                <a:latin typeface="Inter" pitchFamily="34" charset="0"/>
-                <a:ea typeface="Inter" pitchFamily="34" charset="-122"/>
-                <a:cs typeface="Inter" pitchFamily="34" charset="-120"/>
-              </a:rPr>
-              <a:t>https://grafana.com/docs/grafana/latest/administration/provisioning/</a:t>
-            </a:r>
-            <a:endParaRPr lang="en-US" sz="1000" dirty="0"/>
-          </a:p>
-        </p:txBody>
-      </p:sp>
-      <p:sp>
-        <p:nvSpPr>
-          <p:cNvPr id="22" name="Text 20"/>
-          <p:cNvSpPr/>
-          <p:nvPr/>
-        </p:nvSpPr>
-        <p:spPr>
-          <a:xfrm>
-            <a:off x="6217920" y="3840480"/>
-            <a:ext cx="2377440" cy="274320"/>
-          </a:xfrm>
-          <a:prstGeom prst="rect">
-            <a:avLst/>
-          </a:prstGeom>
-          <a:noFill/>
-          <a:ln/>
-        </p:spPr>
-        <p:txBody>
-          <a:bodyPr wrap="square" rtlCol="0" anchor="ctr"/>
-          <a:lstStyle/>
-          <a:p>
-            <a:pPr indent="0" marL="0">
-              <a:buNone/>
-            </a:pPr>
-            <a:r>
-              <a:rPr lang="en-US" sz="1100" b="1" dirty="0">
-                <a:solidFill>
-                  <a:srgbClr val="10CFC9"/>
-                </a:solidFill>
-                <a:latin typeface="Inter" pitchFamily="34" charset="0"/>
-                <a:ea typeface="Inter" pitchFamily="34" charset="-122"/>
-                <a:cs typeface="Inter" pitchFamily="34" charset="-120"/>
-              </a:rPr>
-              <a:t>Loki / Promtail</a:t>
-            </a:r>
-            <a:endParaRPr lang="en-US" sz="1100" dirty="0"/>
-          </a:p>
-        </p:txBody>
-      </p:sp>
-      <p:sp>
-        <p:nvSpPr>
-          <p:cNvPr id="23" name="Text 21"/>
-          <p:cNvSpPr/>
-          <p:nvPr/>
-        </p:nvSpPr>
-        <p:spPr>
-          <a:xfrm>
-            <a:off x="8595360" y="3840480"/>
-            <a:ext cx="3383280" cy="274320"/>
-          </a:xfrm>
-          <a:prstGeom prst="rect">
-            <a:avLst/>
-          </a:prstGeom>
-          <a:noFill/>
-          <a:ln/>
-        </p:spPr>
-        <p:txBody>
-          <a:bodyPr wrap="square" rtlCol="0" anchor="ctr"/>
-          <a:lstStyle/>
-          <a:p>
-            <a:pPr indent="0" marL="0">
-              <a:buNone/>
-            </a:pPr>
-            <a:r>
-              <a:rPr lang="en-US" sz="1000" dirty="0">
-                <a:solidFill>
-                  <a:srgbClr val="FFFFFF"/>
-                </a:solidFill>
-                <a:latin typeface="Inter" pitchFamily="34" charset="0"/>
-                <a:ea typeface="Inter" pitchFamily="34" charset="-122"/>
-                <a:cs typeface="Inter" pitchFamily="34" charset="-120"/>
-              </a:rPr>
-              <a:t>https://grafana.com/docs/loki/latest/</a:t>
-            </a:r>
-            <a:endParaRPr lang="en-US" sz="1000" dirty="0"/>
-          </a:p>
-        </p:txBody>
-      </p:sp>
-      <p:sp>
-        <p:nvSpPr>
-          <p:cNvPr id="24" name="Text 22"/>
-          <p:cNvSpPr/>
-          <p:nvPr/>
-        </p:nvSpPr>
-        <p:spPr>
-          <a:xfrm>
-            <a:off x="457200" y="4343400"/>
-            <a:ext cx="2377440" cy="274320"/>
-          </a:xfrm>
-          <a:prstGeom prst="rect">
-            <a:avLst/>
-          </a:prstGeom>
-          <a:noFill/>
-          <a:ln/>
-        </p:spPr>
-        <p:txBody>
-          <a:bodyPr wrap="square" rtlCol="0" anchor="ctr"/>
-          <a:lstStyle/>
-          <a:p>
-            <a:pPr indent="0" marL="0">
-              <a:buNone/>
-            </a:pPr>
-            <a:r>
-              <a:rPr lang="en-US" sz="1100" b="1" dirty="0">
-                <a:solidFill>
-                  <a:srgbClr val="10CFC9"/>
-                </a:solidFill>
-                <a:latin typeface="Inter" pitchFamily="34" charset="0"/>
-                <a:ea typeface="Inter" pitchFamily="34" charset="-122"/>
-                <a:cs typeface="Inter" pitchFamily="34" charset="-120"/>
-              </a:rPr>
-              <a:t>pyqvd (Python QVD I/O)</a:t>
-            </a:r>
-            <a:endParaRPr lang="en-US" sz="1100" dirty="0"/>
-          </a:p>
-        </p:txBody>
-      </p:sp>
-      <p:sp>
-        <p:nvSpPr>
-          <p:cNvPr id="25" name="Text 23"/>
-          <p:cNvSpPr/>
-          <p:nvPr/>
-        </p:nvSpPr>
-        <p:spPr>
-          <a:xfrm>
-            <a:off x="2834640" y="4343400"/>
-            <a:ext cx="3383280" cy="274320"/>
-          </a:xfrm>
-          <a:prstGeom prst="rect">
-            <a:avLst/>
-          </a:prstGeom>
-          <a:noFill/>
-          <a:ln/>
-        </p:spPr>
-        <p:txBody>
-          <a:bodyPr wrap="square" rtlCol="0" anchor="ctr"/>
-          <a:lstStyle/>
-          <a:p>
-            <a:pPr indent="0" marL="0">
-              <a:buNone/>
-            </a:pPr>
-            <a:r>
-              <a:rPr lang="en-US" sz="1000" dirty="0">
-                <a:solidFill>
-                  <a:srgbClr val="FFFFFF"/>
-                </a:solidFill>
-                <a:latin typeface="Inter" pitchFamily="34" charset="0"/>
-                <a:ea typeface="Inter" pitchFamily="34" charset="-122"/>
-                <a:cs typeface="Inter" pitchFamily="34" charset="-120"/>
-              </a:rPr>
-              <a:t>https://pypi.org/project/pyqvd/</a:t>
-            </a:r>
-            <a:endParaRPr lang="en-US" sz="1000" dirty="0"/>
-          </a:p>
-        </p:txBody>
-      </p:sp>
-      <p:sp>
-        <p:nvSpPr>
-          <p:cNvPr id="26" name="Text 24"/>
-          <p:cNvSpPr/>
-          <p:nvPr/>
-        </p:nvSpPr>
-        <p:spPr>
-          <a:xfrm>
-            <a:off x="6217920" y="4343400"/>
-            <a:ext cx="2377440" cy="274320"/>
-          </a:xfrm>
-          <a:prstGeom prst="rect">
-            <a:avLst/>
-          </a:prstGeom>
-          <a:noFill/>
-          <a:ln/>
-        </p:spPr>
-        <p:txBody>
-          <a:bodyPr wrap="square" rtlCol="0" anchor="ctr"/>
-          <a:lstStyle/>
-          <a:p>
-            <a:pPr indent="0" marL="0">
-              <a:buNone/>
-            </a:pPr>
-            <a:r>
-              <a:rPr lang="en-US" sz="1100" b="1" dirty="0">
-                <a:solidFill>
-                  <a:srgbClr val="10CFC9"/>
-                </a:solidFill>
-                <a:latin typeface="Inter" pitchFamily="34" charset="0"/>
-                <a:ea typeface="Inter" pitchFamily="34" charset="-122"/>
-                <a:cs typeface="Inter" pitchFamily="34" charset="-120"/>
-              </a:rPr>
-              <a:t>@napi-rs/keyring (OS keyring binding)</a:t>
-            </a:r>
-            <a:endParaRPr lang="en-US" sz="1100" dirty="0"/>
-          </a:p>
-        </p:txBody>
-      </p:sp>
-      <p:sp>
-        <p:nvSpPr>
-          <p:cNvPr id="27" name="Text 25"/>
-          <p:cNvSpPr/>
-          <p:nvPr/>
-        </p:nvSpPr>
-        <p:spPr>
-          <a:xfrm>
-            <a:off x="8595360" y="4343400"/>
-            <a:ext cx="3383280" cy="274320"/>
-          </a:xfrm>
-          <a:prstGeom prst="rect">
-            <a:avLst/>
-          </a:prstGeom>
-          <a:noFill/>
-          <a:ln/>
-        </p:spPr>
-        <p:txBody>
-          <a:bodyPr wrap="square" rtlCol="0" anchor="ctr"/>
-          <a:lstStyle/>
-          <a:p>
-            <a:pPr indent="0" marL="0">
-              <a:buNone/>
-            </a:pPr>
-            <a:r>
-              <a:rPr lang="en-US" sz="1000" dirty="0">
-                <a:solidFill>
-                  <a:srgbClr val="FFFFFF"/>
-                </a:solidFill>
-                <a:latin typeface="Inter" pitchFamily="34" charset="0"/>
-                <a:ea typeface="Inter" pitchFamily="34" charset="-122"/>
-                <a:cs typeface="Inter" pitchFamily="34" charset="-120"/>
-              </a:rPr>
-              <a:t>https://github.com/Brooooooklyn/keyring-node</a:t>
-            </a:r>
-            <a:endParaRPr lang="en-US" sz="1000" dirty="0"/>
-          </a:p>
-        </p:txBody>
-      </p:sp>
-      <p:sp>
-        <p:nvSpPr>
-          <p:cNvPr id="28" name="Shape 26"/>
-          <p:cNvSpPr/>
-          <p:nvPr/>
-        </p:nvSpPr>
-        <p:spPr>
-          <a:xfrm>
-            <a:off x="0" y="6492240"/>
-            <a:ext cx="12191695" cy="365760"/>
-          </a:xfrm>
-          <a:prstGeom prst="rect">
-            <a:avLst/>
+          <p:cNvPr id="4" name="Shape 2"/>
+          <p:cNvSpPr/>
+          <p:nvPr/>
+        </p:nvSpPr>
+        <p:spPr>
+          <a:xfrm>
+            <a:off x="457200" y="1508760"/>
+            <a:ext cx="11247120" cy="548640"/>
+          </a:xfrm>
+          <a:prstGeom prst="roundRect">
+            <a:avLst>
+              <a:gd name="adj" fmla="val 13333"/>
+            </a:avLst>
           </a:prstGeom>
           <a:solidFill>
             <a:srgbClr val="009845"/>
@@ -7564,7 +6678,1011 @@
       </p:sp>
       <p:sp>
         <p:nvSpPr>
+          <p:cNvPr id="5" name="Text 3">
+            <a:hlinkClick r:id="rId1" tooltip="Open repo"/>
+          </p:cNvPr>
+          <p:cNvSpPr/>
+          <p:nvPr/>
+        </p:nvSpPr>
+        <p:spPr>
+          <a:xfrm>
+            <a:off x="640080" y="1572768"/>
+            <a:ext cx="10881360" cy="411480"/>
+          </a:xfrm>
+          <a:prstGeom prst="rect">
+            <a:avLst/>
+          </a:prstGeom>
+          <a:noFill/>
+          <a:ln/>
+        </p:spPr>
+        <p:txBody>
+          <a:bodyPr wrap="square" rtlCol="0" anchor="ctr"/>
+          <a:lstStyle/>
+          <a:p>
+            <a:pPr indent="0" marL="0">
+              <a:buNone/>
+            </a:pPr>
+            <a:r>
+              <a:rPr lang="en-US" sz="1600" b="1" u="sng" dirty="0">
+                <a:solidFill>
+                  <a:srgbClr val="FFFFFF"/>
+                </a:solidFill>
+                <a:latin typeface="Inter" pitchFamily="34" charset="0"/>
+                <a:ea typeface="Inter" pitchFamily="34" charset="-122"/>
+                <a:cs typeface="Inter" pitchFamily="34" charset="-120"/>
+                <a:hlinkClick r:id="rId1" invalidUrl="" action="" tgtFrame="" tooltip="Open repo" history="1" highlightClick="0" endSnd="0">
+                  <a:extLst>
+                    <a:ext uri="{A12FA001-AC4F-418D-AE19-62706E023703}">
+                      <ahyp:hlinkClr xmlns:ahyp="http://schemas.microsoft.com/office/drawing/2018/hyperlinkcolor" val="tx"/>
+                    </a:ext>
+                  </a:extLst>
+                </a:hlinkClick>
+              </a:rPr>
+              <a:t>▸  github.com/robertschoenfeldqlik/QlikObservabilityToolkit</a:t>
+            </a:r>
+            <a:endParaRPr lang="en-US" sz="1600" dirty="0"/>
+          </a:p>
+        </p:txBody>
+      </p:sp>
+      <p:sp>
+        <p:nvSpPr>
+          <p:cNvPr id="6" name="Text 4"/>
+          <p:cNvSpPr/>
+          <p:nvPr/>
+        </p:nvSpPr>
+        <p:spPr>
+          <a:xfrm>
+            <a:off x="457200" y="2331720"/>
+            <a:ext cx="2377440" cy="274320"/>
+          </a:xfrm>
+          <a:prstGeom prst="rect">
+            <a:avLst/>
+          </a:prstGeom>
+          <a:noFill/>
+          <a:ln/>
+        </p:spPr>
+        <p:txBody>
+          <a:bodyPr wrap="square" rtlCol="0" anchor="ctr"/>
+          <a:lstStyle/>
+          <a:p>
+            <a:pPr indent="0" marL="0">
+              <a:buNone/>
+            </a:pPr>
+            <a:r>
+              <a:rPr lang="en-US" sz="1100" b="1" dirty="0">
+                <a:solidFill>
+                  <a:srgbClr val="10CFC9"/>
+                </a:solidFill>
+                <a:latin typeface="Inter" pitchFamily="34" charset="0"/>
+                <a:ea typeface="Inter" pitchFamily="34" charset="-122"/>
+                <a:cs typeface="Inter" pitchFamily="34" charset="-120"/>
+              </a:rPr>
+              <a:t>Talend Cloud APIs</a:t>
+            </a:r>
+            <a:endParaRPr lang="en-US" sz="1100" dirty="0"/>
+          </a:p>
+        </p:txBody>
+      </p:sp>
+      <p:sp>
+        <p:nvSpPr>
+          <p:cNvPr id="7" name="Text 5"/>
+          <p:cNvSpPr/>
+          <p:nvPr/>
+        </p:nvSpPr>
+        <p:spPr>
+          <a:xfrm>
+            <a:off x="2834640" y="2331720"/>
+            <a:ext cx="3383280" cy="274320"/>
+          </a:xfrm>
+          <a:prstGeom prst="rect">
+            <a:avLst/>
+          </a:prstGeom>
+          <a:noFill/>
+          <a:ln/>
+        </p:spPr>
+        <p:txBody>
+          <a:bodyPr wrap="square" rtlCol="0" anchor="ctr"/>
+          <a:lstStyle/>
+          <a:p>
+            <a:pPr indent="0" marL="0">
+              <a:buNone/>
+            </a:pPr>
+            <a:r>
+              <a:rPr lang="en-US" sz="1000" dirty="0">
+                <a:solidFill>
+                  <a:srgbClr val="FFFFFF"/>
+                </a:solidFill>
+                <a:latin typeface="Inter" pitchFamily="34" charset="0"/>
+                <a:ea typeface="Inter" pitchFamily="34" charset="-122"/>
+                <a:cs typeface="Inter" pitchFamily="34" charset="-120"/>
+              </a:rPr>
+              <a:t>https://talend.qlik.dev/apis/</a:t>
+            </a:r>
+            <a:endParaRPr lang="en-US" sz="1000" dirty="0"/>
+          </a:p>
+        </p:txBody>
+      </p:sp>
+      <p:sp>
+        <p:nvSpPr>
+          <p:cNvPr id="8" name="Text 6"/>
+          <p:cNvSpPr/>
+          <p:nvPr/>
+        </p:nvSpPr>
+        <p:spPr>
+          <a:xfrm>
+            <a:off x="6217920" y="2331720"/>
+            <a:ext cx="2377440" cy="274320"/>
+          </a:xfrm>
+          <a:prstGeom prst="rect">
+            <a:avLst/>
+          </a:prstGeom>
+          <a:noFill/>
+          <a:ln/>
+        </p:spPr>
+        <p:txBody>
+          <a:bodyPr wrap="square" rtlCol="0" anchor="ctr"/>
+          <a:lstStyle/>
+          <a:p>
+            <a:pPr indent="0" marL="0">
+              <a:buNone/>
+            </a:pPr>
+            <a:r>
+              <a:rPr lang="en-US" sz="1100" b="1" dirty="0">
+                <a:solidFill>
+                  <a:srgbClr val="10CFC9"/>
+                </a:solidFill>
+                <a:latin typeface="Inter" pitchFamily="34" charset="0"/>
+                <a:ea typeface="Inter" pitchFamily="34" charset="-122"/>
+                <a:cs typeface="Inter" pitchFamily="34" charset="-120"/>
+              </a:rPr>
+              <a:t>Talend Remote Engine job logs</a:t>
+            </a:r>
+            <a:endParaRPr lang="en-US" sz="1100" dirty="0"/>
+          </a:p>
+        </p:txBody>
+      </p:sp>
+      <p:sp>
+        <p:nvSpPr>
+          <p:cNvPr id="9" name="Text 7"/>
+          <p:cNvSpPr/>
+          <p:nvPr/>
+        </p:nvSpPr>
+        <p:spPr>
+          <a:xfrm>
+            <a:off x="8595360" y="2331720"/>
+            <a:ext cx="3383280" cy="274320"/>
+          </a:xfrm>
+          <a:prstGeom prst="rect">
+            <a:avLst/>
+          </a:prstGeom>
+          <a:noFill/>
+          <a:ln/>
+        </p:spPr>
+        <p:txBody>
+          <a:bodyPr wrap="square" rtlCol="0" anchor="ctr"/>
+          <a:lstStyle/>
+          <a:p>
+            <a:pPr indent="0" marL="0">
+              <a:buNone/>
+            </a:pPr>
+            <a:r>
+              <a:rPr lang="en-US" sz="1000" dirty="0">
+                <a:solidFill>
+                  <a:srgbClr val="FFFFFF"/>
+                </a:solidFill>
+                <a:latin typeface="Inter" pitchFamily="34" charset="0"/>
+                <a:ea typeface="Inter" pitchFamily="34" charset="-122"/>
+                <a:cs typeface="Inter" pitchFamily="34" charset="-120"/>
+              </a:rPr>
+              <a:t>https://help.qlik.com/talend/en-US/remote-engine-user-guide-linux/Cloud/job-management-logs</a:t>
+            </a:r>
+            <a:endParaRPr lang="en-US" sz="1000" dirty="0"/>
+          </a:p>
+        </p:txBody>
+      </p:sp>
+      <p:sp>
+        <p:nvSpPr>
+          <p:cNvPr id="10" name="Text 8"/>
+          <p:cNvSpPr/>
+          <p:nvPr/>
+        </p:nvSpPr>
+        <p:spPr>
+          <a:xfrm>
+            <a:off x="457200" y="2834640"/>
+            <a:ext cx="2377440" cy="274320"/>
+          </a:xfrm>
+          <a:prstGeom prst="rect">
+            <a:avLst/>
+          </a:prstGeom>
+          <a:noFill/>
+          <a:ln/>
+        </p:spPr>
+        <p:txBody>
+          <a:bodyPr wrap="square" rtlCol="0" anchor="ctr"/>
+          <a:lstStyle/>
+          <a:p>
+            <a:pPr indent="0" marL="0">
+              <a:buNone/>
+            </a:pPr>
+            <a:r>
+              <a:rPr lang="en-US" sz="1100" b="1" dirty="0">
+                <a:solidFill>
+                  <a:srgbClr val="10CFC9"/>
+                </a:solidFill>
+                <a:latin typeface="Inter" pitchFamily="34" charset="0"/>
+                <a:ea typeface="Inter" pitchFamily="34" charset="-122"/>
+                <a:cs typeface="Inter" pitchFamily="34" charset="-120"/>
+              </a:rPr>
+              <a:t>Qlik Cloud APIs (qlik.dev)</a:t>
+            </a:r>
+            <a:endParaRPr lang="en-US" sz="1100" dirty="0"/>
+          </a:p>
+        </p:txBody>
+      </p:sp>
+      <p:sp>
+        <p:nvSpPr>
+          <p:cNvPr id="11" name="Text 9"/>
+          <p:cNvSpPr/>
+          <p:nvPr/>
+        </p:nvSpPr>
+        <p:spPr>
+          <a:xfrm>
+            <a:off x="2834640" y="2834640"/>
+            <a:ext cx="3383280" cy="274320"/>
+          </a:xfrm>
+          <a:prstGeom prst="rect">
+            <a:avLst/>
+          </a:prstGeom>
+          <a:noFill/>
+          <a:ln/>
+        </p:spPr>
+        <p:txBody>
+          <a:bodyPr wrap="square" rtlCol="0" anchor="ctr"/>
+          <a:lstStyle/>
+          <a:p>
+            <a:pPr indent="0" marL="0">
+              <a:buNone/>
+            </a:pPr>
+            <a:r>
+              <a:rPr lang="en-US" sz="1000" dirty="0">
+                <a:solidFill>
+                  <a:srgbClr val="FFFFFF"/>
+                </a:solidFill>
+                <a:latin typeface="Inter" pitchFamily="34" charset="0"/>
+                <a:ea typeface="Inter" pitchFamily="34" charset="-122"/>
+                <a:cs typeface="Inter" pitchFamily="34" charset="-120"/>
+              </a:rPr>
+              <a:t>https://qlik.dev/apis/</a:t>
+            </a:r>
+            <a:endParaRPr lang="en-US" sz="1000" dirty="0"/>
+          </a:p>
+        </p:txBody>
+      </p:sp>
+      <p:sp>
+        <p:nvSpPr>
+          <p:cNvPr id="12" name="Text 10"/>
+          <p:cNvSpPr/>
+          <p:nvPr/>
+        </p:nvSpPr>
+        <p:spPr>
+          <a:xfrm>
+            <a:off x="6217920" y="2834640"/>
+            <a:ext cx="2377440" cy="274320"/>
+          </a:xfrm>
+          <a:prstGeom prst="rect">
+            <a:avLst/>
+          </a:prstGeom>
+          <a:noFill/>
+          <a:ln/>
+        </p:spPr>
+        <p:txBody>
+          <a:bodyPr wrap="square" rtlCol="0" anchor="ctr"/>
+          <a:lstStyle/>
+          <a:p>
+            <a:pPr indent="0" marL="0">
+              <a:buNone/>
+            </a:pPr>
+            <a:r>
+              <a:rPr lang="en-US" sz="1100" b="1" dirty="0">
+                <a:solidFill>
+                  <a:srgbClr val="10CFC9"/>
+                </a:solidFill>
+                <a:latin typeface="Inter" pitchFamily="34" charset="0"/>
+                <a:ea typeface="Inter" pitchFamily="34" charset="-122"/>
+                <a:cs typeface="Inter" pitchFamily="34" charset="-120"/>
+              </a:rPr>
+              <a:t>Qlik Cloud Data Files API</a:t>
+            </a:r>
+            <a:endParaRPr lang="en-US" sz="1100" dirty="0"/>
+          </a:p>
+        </p:txBody>
+      </p:sp>
+      <p:sp>
+        <p:nvSpPr>
+          <p:cNvPr id="13" name="Text 11"/>
+          <p:cNvSpPr/>
+          <p:nvPr/>
+        </p:nvSpPr>
+        <p:spPr>
+          <a:xfrm>
+            <a:off x="8595360" y="2834640"/>
+            <a:ext cx="3383280" cy="274320"/>
+          </a:xfrm>
+          <a:prstGeom prst="rect">
+            <a:avLst/>
+          </a:prstGeom>
+          <a:noFill/>
+          <a:ln/>
+        </p:spPr>
+        <p:txBody>
+          <a:bodyPr wrap="square" rtlCol="0" anchor="ctr"/>
+          <a:lstStyle/>
+          <a:p>
+            <a:pPr indent="0" marL="0">
+              <a:buNone/>
+            </a:pPr>
+            <a:r>
+              <a:rPr lang="en-US" sz="1000" dirty="0">
+                <a:solidFill>
+                  <a:srgbClr val="FFFFFF"/>
+                </a:solidFill>
+                <a:latin typeface="Inter" pitchFamily="34" charset="0"/>
+                <a:ea typeface="Inter" pitchFamily="34" charset="-122"/>
+                <a:cs typeface="Inter" pitchFamily="34" charset="-120"/>
+              </a:rPr>
+              <a:t>https://qlik.dev/apis/rest/data-files/</a:t>
+            </a:r>
+            <a:endParaRPr lang="en-US" sz="1000" dirty="0"/>
+          </a:p>
+        </p:txBody>
+      </p:sp>
+      <p:sp>
+        <p:nvSpPr>
+          <p:cNvPr id="14" name="Text 12"/>
+          <p:cNvSpPr/>
+          <p:nvPr/>
+        </p:nvSpPr>
+        <p:spPr>
+          <a:xfrm>
+            <a:off x="457200" y="3337560"/>
+            <a:ext cx="2377440" cy="274320"/>
+          </a:xfrm>
+          <a:prstGeom prst="rect">
+            <a:avLst/>
+          </a:prstGeom>
+          <a:noFill/>
+          <a:ln/>
+        </p:spPr>
+        <p:txBody>
+          <a:bodyPr wrap="square" rtlCol="0" anchor="ctr"/>
+          <a:lstStyle/>
+          <a:p>
+            <a:pPr indent="0" marL="0">
+              <a:buNone/>
+            </a:pPr>
+            <a:r>
+              <a:rPr lang="en-US" sz="1100" b="1" dirty="0">
+                <a:solidFill>
+                  <a:srgbClr val="10CFC9"/>
+                </a:solidFill>
+                <a:latin typeface="Inter" pitchFamily="34" charset="0"/>
+                <a:ea typeface="Inter" pitchFamily="34" charset="-122"/>
+                <a:cs typeface="Inter" pitchFamily="34" charset="-120"/>
+              </a:rPr>
+              <a:t>Qlik Cloud API key management</a:t>
+            </a:r>
+            <a:endParaRPr lang="en-US" sz="1100" dirty="0"/>
+          </a:p>
+        </p:txBody>
+      </p:sp>
+      <p:sp>
+        <p:nvSpPr>
+          <p:cNvPr id="15" name="Text 13"/>
+          <p:cNvSpPr/>
+          <p:nvPr/>
+        </p:nvSpPr>
+        <p:spPr>
+          <a:xfrm>
+            <a:off x="2834640" y="3337560"/>
+            <a:ext cx="3383280" cy="274320"/>
+          </a:xfrm>
+          <a:prstGeom prst="rect">
+            <a:avLst/>
+          </a:prstGeom>
+          <a:noFill/>
+          <a:ln/>
+        </p:spPr>
+        <p:txBody>
+          <a:bodyPr wrap="square" rtlCol="0" anchor="ctr"/>
+          <a:lstStyle/>
+          <a:p>
+            <a:pPr indent="0" marL="0">
+              <a:buNone/>
+            </a:pPr>
+            <a:r>
+              <a:rPr lang="en-US" sz="1000" dirty="0">
+                <a:solidFill>
+                  <a:srgbClr val="FFFFFF"/>
+                </a:solidFill>
+                <a:latin typeface="Inter" pitchFamily="34" charset="0"/>
+                <a:ea typeface="Inter" pitchFamily="34" charset="-122"/>
+                <a:cs typeface="Inter" pitchFamily="34" charset="-120"/>
+              </a:rPr>
+              <a:t>https://qlik.dev/authenticate/api-key/manage-api-keys/</a:t>
+            </a:r>
+            <a:endParaRPr lang="en-US" sz="1000" dirty="0"/>
+          </a:p>
+        </p:txBody>
+      </p:sp>
+      <p:sp>
+        <p:nvSpPr>
+          <p:cNvPr id="16" name="Text 14"/>
+          <p:cNvSpPr/>
+          <p:nvPr/>
+        </p:nvSpPr>
+        <p:spPr>
+          <a:xfrm>
+            <a:off x="6217920" y="3337560"/>
+            <a:ext cx="2377440" cy="274320"/>
+          </a:xfrm>
+          <a:prstGeom prst="rect">
+            <a:avLst/>
+          </a:prstGeom>
+          <a:noFill/>
+          <a:ln/>
+        </p:spPr>
+        <p:txBody>
+          <a:bodyPr wrap="square" rtlCol="0" anchor="ctr"/>
+          <a:lstStyle/>
+          <a:p>
+            <a:pPr indent="0" marL="0">
+              <a:buNone/>
+            </a:pPr>
+            <a:r>
+              <a:rPr lang="en-US" sz="1100" b="1" dirty="0">
+                <a:solidFill>
+                  <a:srgbClr val="10CFC9"/>
+                </a:solidFill>
+                <a:latin typeface="Inter" pitchFamily="34" charset="0"/>
+                <a:ea typeface="Inter" pitchFamily="34" charset="-122"/>
+                <a:cs typeface="Inter" pitchFamily="34" charset="-120"/>
+              </a:rPr>
+              <a:t>Qlik UI palette source</a:t>
+            </a:r>
+            <a:endParaRPr lang="en-US" sz="1100" dirty="0"/>
+          </a:p>
+        </p:txBody>
+      </p:sp>
+      <p:sp>
+        <p:nvSpPr>
+          <p:cNvPr id="17" name="Text 15"/>
+          <p:cNvSpPr/>
+          <p:nvPr/>
+        </p:nvSpPr>
+        <p:spPr>
+          <a:xfrm>
+            <a:off x="8595360" y="3337560"/>
+            <a:ext cx="3383280" cy="274320"/>
+          </a:xfrm>
+          <a:prstGeom prst="rect">
+            <a:avLst/>
+          </a:prstGeom>
+          <a:noFill/>
+          <a:ln/>
+        </p:spPr>
+        <p:txBody>
+          <a:bodyPr wrap="square" rtlCol="0" anchor="ctr"/>
+          <a:lstStyle/>
+          <a:p>
+            <a:pPr indent="0" marL="0">
+              <a:buNone/>
+            </a:pPr>
+            <a:r>
+              <a:rPr lang="en-US" sz="1000" dirty="0">
+                <a:solidFill>
+                  <a:srgbClr val="FFFFFF"/>
+                </a:solidFill>
+                <a:latin typeface="Inter" pitchFamily="34" charset="0"/>
+                <a:ea typeface="Inter" pitchFamily="34" charset="-122"/>
+                <a:cs typeface="Inter" pitchFamily="34" charset="-120"/>
+              </a:rPr>
+              <a:t>https://qlik.dev/manage/data-connections/create-data-connections/</a:t>
+            </a:r>
+            <a:endParaRPr lang="en-US" sz="1000" dirty="0"/>
+          </a:p>
+        </p:txBody>
+      </p:sp>
+      <p:sp>
+        <p:nvSpPr>
+          <p:cNvPr id="18" name="Text 16"/>
+          <p:cNvSpPr/>
+          <p:nvPr/>
+        </p:nvSpPr>
+        <p:spPr>
+          <a:xfrm>
+            <a:off x="457200" y="3840480"/>
+            <a:ext cx="2377440" cy="274320"/>
+          </a:xfrm>
+          <a:prstGeom prst="rect">
+            <a:avLst/>
+          </a:prstGeom>
+          <a:noFill/>
+          <a:ln/>
+        </p:spPr>
+        <p:txBody>
+          <a:bodyPr wrap="square" rtlCol="0" anchor="ctr"/>
+          <a:lstStyle/>
+          <a:p>
+            <a:pPr indent="0" marL="0">
+              <a:buNone/>
+            </a:pPr>
+            <a:r>
+              <a:rPr lang="en-US" sz="1100" b="1" dirty="0">
+                <a:solidFill>
+                  <a:srgbClr val="10CFC9"/>
+                </a:solidFill>
+                <a:latin typeface="Inter" pitchFamily="34" charset="0"/>
+                <a:ea typeface="Inter" pitchFamily="34" charset="-122"/>
+                <a:cs typeface="Inter" pitchFamily="34" charset="-120"/>
+              </a:rPr>
+              <a:t>Model Context Protocol</a:t>
+            </a:r>
+            <a:endParaRPr lang="en-US" sz="1100" dirty="0"/>
+          </a:p>
+        </p:txBody>
+      </p:sp>
+      <p:sp>
+        <p:nvSpPr>
+          <p:cNvPr id="19" name="Text 17"/>
+          <p:cNvSpPr/>
+          <p:nvPr/>
+        </p:nvSpPr>
+        <p:spPr>
+          <a:xfrm>
+            <a:off x="2834640" y="3840480"/>
+            <a:ext cx="3383280" cy="274320"/>
+          </a:xfrm>
+          <a:prstGeom prst="rect">
+            <a:avLst/>
+          </a:prstGeom>
+          <a:noFill/>
+          <a:ln/>
+        </p:spPr>
+        <p:txBody>
+          <a:bodyPr wrap="square" rtlCol="0" anchor="ctr"/>
+          <a:lstStyle/>
+          <a:p>
+            <a:pPr indent="0" marL="0">
+              <a:buNone/>
+            </a:pPr>
+            <a:r>
+              <a:rPr lang="en-US" sz="1000" dirty="0">
+                <a:solidFill>
+                  <a:srgbClr val="FFFFFF"/>
+                </a:solidFill>
+                <a:latin typeface="Inter" pitchFamily="34" charset="0"/>
+                <a:ea typeface="Inter" pitchFamily="34" charset="-122"/>
+                <a:cs typeface="Inter" pitchFamily="34" charset="-120"/>
+              </a:rPr>
+              <a:t>https://modelcontextprotocol.io/specification</a:t>
+            </a:r>
+            <a:endParaRPr lang="en-US" sz="1000" dirty="0"/>
+          </a:p>
+        </p:txBody>
+      </p:sp>
+      <p:sp>
+        <p:nvSpPr>
+          <p:cNvPr id="20" name="Text 18"/>
+          <p:cNvSpPr/>
+          <p:nvPr/>
+        </p:nvSpPr>
+        <p:spPr>
+          <a:xfrm>
+            <a:off x="6217920" y="3840480"/>
+            <a:ext cx="2377440" cy="274320"/>
+          </a:xfrm>
+          <a:prstGeom prst="rect">
+            <a:avLst/>
+          </a:prstGeom>
+          <a:noFill/>
+          <a:ln/>
+        </p:spPr>
+        <p:txBody>
+          <a:bodyPr wrap="square" rtlCol="0" anchor="ctr"/>
+          <a:lstStyle/>
+          <a:p>
+            <a:pPr indent="0" marL="0">
+              <a:buNone/>
+            </a:pPr>
+            <a:r>
+              <a:rPr lang="en-US" sz="1100" b="1" dirty="0">
+                <a:solidFill>
+                  <a:srgbClr val="10CFC9"/>
+                </a:solidFill>
+                <a:latin typeface="Inter" pitchFamily="34" charset="0"/>
+                <a:ea typeface="Inter" pitchFamily="34" charset="-122"/>
+                <a:cs typeface="Inter" pitchFamily="34" charset="-120"/>
+              </a:rPr>
+              <a:t>Prometheus metric naming</a:t>
+            </a:r>
+            <a:endParaRPr lang="en-US" sz="1100" dirty="0"/>
+          </a:p>
+        </p:txBody>
+      </p:sp>
+      <p:sp>
+        <p:nvSpPr>
+          <p:cNvPr id="21" name="Text 19"/>
+          <p:cNvSpPr/>
+          <p:nvPr/>
+        </p:nvSpPr>
+        <p:spPr>
+          <a:xfrm>
+            <a:off x="8595360" y="3840480"/>
+            <a:ext cx="3383280" cy="274320"/>
+          </a:xfrm>
+          <a:prstGeom prst="rect">
+            <a:avLst/>
+          </a:prstGeom>
+          <a:noFill/>
+          <a:ln/>
+        </p:spPr>
+        <p:txBody>
+          <a:bodyPr wrap="square" rtlCol="0" anchor="ctr"/>
+          <a:lstStyle/>
+          <a:p>
+            <a:pPr indent="0" marL="0">
+              <a:buNone/>
+            </a:pPr>
+            <a:r>
+              <a:rPr lang="en-US" sz="1000" dirty="0">
+                <a:solidFill>
+                  <a:srgbClr val="FFFFFF"/>
+                </a:solidFill>
+                <a:latin typeface="Inter" pitchFamily="34" charset="0"/>
+                <a:ea typeface="Inter" pitchFamily="34" charset="-122"/>
+                <a:cs typeface="Inter" pitchFamily="34" charset="-120"/>
+              </a:rPr>
+              <a:t>https://prometheus.io/docs/practices/naming/</a:t>
+            </a:r>
+            <a:endParaRPr lang="en-US" sz="1000" dirty="0"/>
+          </a:p>
+        </p:txBody>
+      </p:sp>
+      <p:sp>
+        <p:nvSpPr>
+          <p:cNvPr id="22" name="Text 20"/>
+          <p:cNvSpPr/>
+          <p:nvPr/>
+        </p:nvSpPr>
+        <p:spPr>
+          <a:xfrm>
+            <a:off x="457200" y="4343400"/>
+            <a:ext cx="2377440" cy="274320"/>
+          </a:xfrm>
+          <a:prstGeom prst="rect">
+            <a:avLst/>
+          </a:prstGeom>
+          <a:noFill/>
+          <a:ln/>
+        </p:spPr>
+        <p:txBody>
+          <a:bodyPr wrap="square" rtlCol="0" anchor="ctr"/>
+          <a:lstStyle/>
+          <a:p>
+            <a:pPr indent="0" marL="0">
+              <a:buNone/>
+            </a:pPr>
+            <a:r>
+              <a:rPr lang="en-US" sz="1100" b="1" dirty="0">
+                <a:solidFill>
+                  <a:srgbClr val="10CFC9"/>
+                </a:solidFill>
+                <a:latin typeface="Inter" pitchFamily="34" charset="0"/>
+                <a:ea typeface="Inter" pitchFamily="34" charset="-122"/>
+                <a:cs typeface="Inter" pitchFamily="34" charset="-120"/>
+              </a:rPr>
+              <a:t>Grafana dashboard provisioning</a:t>
+            </a:r>
+            <a:endParaRPr lang="en-US" sz="1100" dirty="0"/>
+          </a:p>
+        </p:txBody>
+      </p:sp>
+      <p:sp>
+        <p:nvSpPr>
+          <p:cNvPr id="23" name="Text 21"/>
+          <p:cNvSpPr/>
+          <p:nvPr/>
+        </p:nvSpPr>
+        <p:spPr>
+          <a:xfrm>
+            <a:off x="2834640" y="4343400"/>
+            <a:ext cx="3383280" cy="274320"/>
+          </a:xfrm>
+          <a:prstGeom prst="rect">
+            <a:avLst/>
+          </a:prstGeom>
+          <a:noFill/>
+          <a:ln/>
+        </p:spPr>
+        <p:txBody>
+          <a:bodyPr wrap="square" rtlCol="0" anchor="ctr"/>
+          <a:lstStyle/>
+          <a:p>
+            <a:pPr indent="0" marL="0">
+              <a:buNone/>
+            </a:pPr>
+            <a:r>
+              <a:rPr lang="en-US" sz="1000" dirty="0">
+                <a:solidFill>
+                  <a:srgbClr val="FFFFFF"/>
+                </a:solidFill>
+                <a:latin typeface="Inter" pitchFamily="34" charset="0"/>
+                <a:ea typeface="Inter" pitchFamily="34" charset="-122"/>
+                <a:cs typeface="Inter" pitchFamily="34" charset="-120"/>
+              </a:rPr>
+              <a:t>https://grafana.com/docs/grafana/latest/administration/provisioning/</a:t>
+            </a:r>
+            <a:endParaRPr lang="en-US" sz="1000" dirty="0"/>
+          </a:p>
+        </p:txBody>
+      </p:sp>
+      <p:sp>
+        <p:nvSpPr>
+          <p:cNvPr id="24" name="Text 22"/>
+          <p:cNvSpPr/>
+          <p:nvPr/>
+        </p:nvSpPr>
+        <p:spPr>
+          <a:xfrm>
+            <a:off x="6217920" y="4343400"/>
+            <a:ext cx="2377440" cy="274320"/>
+          </a:xfrm>
+          <a:prstGeom prst="rect">
+            <a:avLst/>
+          </a:prstGeom>
+          <a:noFill/>
+          <a:ln/>
+        </p:spPr>
+        <p:txBody>
+          <a:bodyPr wrap="square" rtlCol="0" anchor="ctr"/>
+          <a:lstStyle/>
+          <a:p>
+            <a:pPr indent="0" marL="0">
+              <a:buNone/>
+            </a:pPr>
+            <a:r>
+              <a:rPr lang="en-US" sz="1100" b="1" dirty="0">
+                <a:solidFill>
+                  <a:srgbClr val="10CFC9"/>
+                </a:solidFill>
+                <a:latin typeface="Inter" pitchFamily="34" charset="0"/>
+                <a:ea typeface="Inter" pitchFamily="34" charset="-122"/>
+                <a:cs typeface="Inter" pitchFamily="34" charset="-120"/>
+              </a:rPr>
+              <a:t>Loki / Promtail</a:t>
+            </a:r>
+            <a:endParaRPr lang="en-US" sz="1100" dirty="0"/>
+          </a:p>
+        </p:txBody>
+      </p:sp>
+      <p:sp>
+        <p:nvSpPr>
+          <p:cNvPr id="25" name="Text 23"/>
+          <p:cNvSpPr/>
+          <p:nvPr/>
+        </p:nvSpPr>
+        <p:spPr>
+          <a:xfrm>
+            <a:off x="8595360" y="4343400"/>
+            <a:ext cx="3383280" cy="274320"/>
+          </a:xfrm>
+          <a:prstGeom prst="rect">
+            <a:avLst/>
+          </a:prstGeom>
+          <a:noFill/>
+          <a:ln/>
+        </p:spPr>
+        <p:txBody>
+          <a:bodyPr wrap="square" rtlCol="0" anchor="ctr"/>
+          <a:lstStyle/>
+          <a:p>
+            <a:pPr indent="0" marL="0">
+              <a:buNone/>
+            </a:pPr>
+            <a:r>
+              <a:rPr lang="en-US" sz="1000" dirty="0">
+                <a:solidFill>
+                  <a:srgbClr val="FFFFFF"/>
+                </a:solidFill>
+                <a:latin typeface="Inter" pitchFamily="34" charset="0"/>
+                <a:ea typeface="Inter" pitchFamily="34" charset="-122"/>
+                <a:cs typeface="Inter" pitchFamily="34" charset="-120"/>
+              </a:rPr>
+              <a:t>https://grafana.com/docs/loki/latest/</a:t>
+            </a:r>
+            <a:endParaRPr lang="en-US" sz="1000" dirty="0"/>
+          </a:p>
+        </p:txBody>
+      </p:sp>
+      <p:sp>
+        <p:nvSpPr>
+          <p:cNvPr id="26" name="Text 24"/>
+          <p:cNvSpPr/>
+          <p:nvPr/>
+        </p:nvSpPr>
+        <p:spPr>
+          <a:xfrm>
+            <a:off x="457200" y="4846320"/>
+            <a:ext cx="2377440" cy="274320"/>
+          </a:xfrm>
+          <a:prstGeom prst="rect">
+            <a:avLst/>
+          </a:prstGeom>
+          <a:noFill/>
+          <a:ln/>
+        </p:spPr>
+        <p:txBody>
+          <a:bodyPr wrap="square" rtlCol="0" anchor="ctr"/>
+          <a:lstStyle/>
+          <a:p>
+            <a:pPr indent="0" marL="0">
+              <a:buNone/>
+            </a:pPr>
+            <a:r>
+              <a:rPr lang="en-US" sz="1100" b="1" dirty="0">
+                <a:solidFill>
+                  <a:srgbClr val="10CFC9"/>
+                </a:solidFill>
+                <a:latin typeface="Inter" pitchFamily="34" charset="0"/>
+                <a:ea typeface="Inter" pitchFamily="34" charset="-122"/>
+                <a:cs typeface="Inter" pitchFamily="34" charset="-120"/>
+              </a:rPr>
+              <a:t>pyqvd (Python QVD I/O)</a:t>
+            </a:r>
+            <a:endParaRPr lang="en-US" sz="1100" dirty="0"/>
+          </a:p>
+        </p:txBody>
+      </p:sp>
+      <p:sp>
+        <p:nvSpPr>
+          <p:cNvPr id="27" name="Text 25"/>
+          <p:cNvSpPr/>
+          <p:nvPr/>
+        </p:nvSpPr>
+        <p:spPr>
+          <a:xfrm>
+            <a:off x="2834640" y="4846320"/>
+            <a:ext cx="3383280" cy="274320"/>
+          </a:xfrm>
+          <a:prstGeom prst="rect">
+            <a:avLst/>
+          </a:prstGeom>
+          <a:noFill/>
+          <a:ln/>
+        </p:spPr>
+        <p:txBody>
+          <a:bodyPr wrap="square" rtlCol="0" anchor="ctr"/>
+          <a:lstStyle/>
+          <a:p>
+            <a:pPr indent="0" marL="0">
+              <a:buNone/>
+            </a:pPr>
+            <a:r>
+              <a:rPr lang="en-US" sz="1000" dirty="0">
+                <a:solidFill>
+                  <a:srgbClr val="FFFFFF"/>
+                </a:solidFill>
+                <a:latin typeface="Inter" pitchFamily="34" charset="0"/>
+                <a:ea typeface="Inter" pitchFamily="34" charset="-122"/>
+                <a:cs typeface="Inter" pitchFamily="34" charset="-120"/>
+              </a:rPr>
+              <a:t>https://pypi.org/project/pyqvd/</a:t>
+            </a:r>
+            <a:endParaRPr lang="en-US" sz="1000" dirty="0"/>
+          </a:p>
+        </p:txBody>
+      </p:sp>
+      <p:sp>
+        <p:nvSpPr>
+          <p:cNvPr id="28" name="Text 26"/>
+          <p:cNvSpPr/>
+          <p:nvPr/>
+        </p:nvSpPr>
+        <p:spPr>
+          <a:xfrm>
+            <a:off x="6217920" y="4846320"/>
+            <a:ext cx="2377440" cy="274320"/>
+          </a:xfrm>
+          <a:prstGeom prst="rect">
+            <a:avLst/>
+          </a:prstGeom>
+          <a:noFill/>
+          <a:ln/>
+        </p:spPr>
+        <p:txBody>
+          <a:bodyPr wrap="square" rtlCol="0" anchor="ctr"/>
+          <a:lstStyle/>
+          <a:p>
+            <a:pPr indent="0" marL="0">
+              <a:buNone/>
+            </a:pPr>
+            <a:r>
+              <a:rPr lang="en-US" sz="1100" b="1" dirty="0">
+                <a:solidFill>
+                  <a:srgbClr val="10CFC9"/>
+                </a:solidFill>
+                <a:latin typeface="Inter" pitchFamily="34" charset="0"/>
+                <a:ea typeface="Inter" pitchFamily="34" charset="-122"/>
+                <a:cs typeface="Inter" pitchFamily="34" charset="-120"/>
+              </a:rPr>
+              <a:t>@napi-rs/keyring (OS keyring binding)</a:t>
+            </a:r>
+            <a:endParaRPr lang="en-US" sz="1100" dirty="0"/>
+          </a:p>
+        </p:txBody>
+      </p:sp>
+      <p:sp>
+        <p:nvSpPr>
           <p:cNvPr id="29" name="Text 27"/>
+          <p:cNvSpPr/>
+          <p:nvPr/>
+        </p:nvSpPr>
+        <p:spPr>
+          <a:xfrm>
+            <a:off x="8595360" y="4846320"/>
+            <a:ext cx="3383280" cy="274320"/>
+          </a:xfrm>
+          <a:prstGeom prst="rect">
+            <a:avLst/>
+          </a:prstGeom>
+          <a:noFill/>
+          <a:ln/>
+        </p:spPr>
+        <p:txBody>
+          <a:bodyPr wrap="square" rtlCol="0" anchor="ctr"/>
+          <a:lstStyle/>
+          <a:p>
+            <a:pPr indent="0" marL="0">
+              <a:buNone/>
+            </a:pPr>
+            <a:r>
+              <a:rPr lang="en-US" sz="1000" dirty="0">
+                <a:solidFill>
+                  <a:srgbClr val="FFFFFF"/>
+                </a:solidFill>
+                <a:latin typeface="Inter" pitchFamily="34" charset="0"/>
+                <a:ea typeface="Inter" pitchFamily="34" charset="-122"/>
+                <a:cs typeface="Inter" pitchFamily="34" charset="-120"/>
+              </a:rPr>
+              <a:t>https://github.com/Brooooooklyn/keyring-node</a:t>
+            </a:r>
+            <a:endParaRPr lang="en-US" sz="1000" dirty="0"/>
+          </a:p>
+        </p:txBody>
+      </p:sp>
+      <p:sp>
+        <p:nvSpPr>
+          <p:cNvPr id="30" name="Shape 28"/>
+          <p:cNvSpPr/>
+          <p:nvPr/>
+        </p:nvSpPr>
+        <p:spPr>
+          <a:xfrm>
+            <a:off x="0" y="6492240"/>
+            <a:ext cx="12191695" cy="365760"/>
+          </a:xfrm>
+          <a:prstGeom prst="rect">
+            <a:avLst/>
+          </a:prstGeom>
+          <a:solidFill>
+            <a:srgbClr val="009845"/>
+          </a:solidFill>
+          <a:ln/>
+        </p:spPr>
+      </p:sp>
+      <p:sp>
+        <p:nvSpPr>
+          <p:cNvPr id="31" name="Text 29"/>
           <p:cNvSpPr/>
           <p:nvPr/>
         </p:nvSpPr>

--- a/Talend-TMC-MCP-Architecture.pptx
+++ b/Talend-TMC-MCP-Architecture.pptx
@@ -1862,7 +1862,7 @@
     <p:bg>
       <p:bgPr>
         <a:solidFill>
-          <a:srgbClr val="F6F7F8"/>
+          <a:srgbClr val="FFFFFF"/>
         </a:solidFill>
       </p:bgPr>
     </p:bg>
@@ -1880,32 +1880,62 @@
           <a:chExt cx="0" cy="0"/>
         </a:xfrm>
       </p:grpSpPr>
-      <p:sp>
-        <p:nvSpPr>
-          <p:cNvPr id="2" name="Text 0"/>
-          <p:cNvSpPr/>
-          <p:nvPr/>
-        </p:nvSpPr>
-        <p:spPr>
-          <a:xfrm>
-            <a:off x="457200" y="228600"/>
-            <a:ext cx="11247120" cy="548640"/>
-          </a:xfrm>
-          <a:prstGeom prst="rect">
-            <a:avLst/>
-          </a:prstGeom>
-          <a:noFill/>
-          <a:ln/>
-        </p:spPr>
-        <p:txBody>
-          <a:bodyPr wrap="square" rtlCol="0" anchor="ctr"/>
-          <a:lstStyle/>
-          <a:p>
-            <a:pPr indent="0" marL="0">
-              <a:buNone/>
-            </a:pPr>
-            <a:r>
-              <a:rPr lang="en-US" sz="2600" b="1" dirty="0">
+      <p:pic>
+        <p:nvPicPr>
+          <p:cNvPr id="2" name="Image 0" descr="deploy/assets/qlik-logo.svg">    </p:cNvPr>
+          <p:cNvPicPr>
+            <a:picLocks noChangeAspect="1"/>
+          </p:cNvPicPr>
+          <p:nvPr/>
+        </p:nvPicPr>
+        <p:blipFill>
+          <a:blip r:embed="rId1">
+            <a:extLst>
+              <a:ext uri="{96DAC541-7B7A-43D3-8B79-37D633B846F1}">
+                <asvg:svgBlip xmlns:asvg="http://schemas.microsoft.com/office/drawing/2016/SVG/main" r:embed="rId2"/>
+              </a:ext>
+            </a:extLst>
+          </a:blip>
+          <a:stretch>
+            <a:fillRect/>
+          </a:stretch>
+        </p:blipFill>
+        <p:spPr>
+          <a:xfrm>
+            <a:off x="10561320" y="292608"/>
+            <a:ext cx="1188720" cy="658368"/>
+          </a:xfrm>
+          <a:prstGeom prst="rect">
+            <a:avLst/>
+          </a:prstGeom>
+        </p:spPr>
+      </p:pic>
+      <p:sp>
+        <p:nvSpPr>
+          <p:cNvPr id="3" name="Text 0"/>
+          <p:cNvSpPr/>
+          <p:nvPr/>
+        </p:nvSpPr>
+        <p:spPr>
+          <a:xfrm>
+            <a:off x="457200" y="274320"/>
+            <a:ext cx="9875520" cy="502920"/>
+          </a:xfrm>
+          <a:prstGeom prst="rect">
+            <a:avLst/>
+          </a:prstGeom>
+          <a:noFill/>
+          <a:ln/>
+        </p:spPr>
+        <p:txBody>
+          <a:bodyPr wrap="square" rtlCol="0" anchor="ctr"/>
+          <a:lstStyle/>
+          <a:p>
+            <a:pPr indent="0" marL="0">
+              <a:buNone/>
+            </a:pPr>
+            <a:r>
+              <a:rPr lang="en-US" sz="2500" b="1" dirty="0">
                 <a:solidFill>
                   <a:srgbClr val="006580"/>
                 </a:solidFill>
@@ -1913,38 +1943,38 @@
                 <a:ea typeface="Inter" pitchFamily="34" charset="-122"/>
                 <a:cs typeface="Inter" pitchFamily="34" charset="-120"/>
               </a:rPr>
-              <a:t>End-to-end data flow</a:t>
-            </a:r>
-            <a:endParaRPr lang="en-US" sz="2600" dirty="0"/>
-          </a:p>
-        </p:txBody>
-      </p:sp>
-      <p:sp>
-        <p:nvSpPr>
-          <p:cNvPr id="3" name="Text 1"/>
+              <a:t>Qlik Observability Toolkit — architecture</a:t>
+            </a:r>
+            <a:endParaRPr lang="en-US" sz="2500" dirty="0"/>
+          </a:p>
+        </p:txBody>
+      </p:sp>
+      <p:sp>
+        <p:nvSpPr>
+          <p:cNvPr id="4" name="Text 1"/>
           <p:cNvSpPr/>
           <p:nvPr/>
         </p:nvSpPr>
         <p:spPr>
           <a:xfrm>
             <a:off x="457200" y="777240"/>
-            <a:ext cx="11247120" cy="320040"/>
-          </a:xfrm>
-          <a:prstGeom prst="rect">
-            <a:avLst/>
-          </a:prstGeom>
-          <a:noFill/>
-          <a:ln/>
-        </p:spPr>
-        <p:txBody>
-          <a:bodyPr wrap="square" rtlCol="0" anchor="ctr"/>
-          <a:lstStyle/>
-          <a:p>
-            <a:pPr indent="0" marL="0">
-              <a:buNone/>
-            </a:pPr>
-            <a:r>
-              <a:rPr lang="en-US" sz="1300" dirty="0">
+            <a:ext cx="9875520" cy="320040"/>
+          </a:xfrm>
+          <a:prstGeom prst="rect">
+            <a:avLst/>
+          </a:prstGeom>
+          <a:noFill/>
+          <a:ln/>
+        </p:spPr>
+        <p:txBody>
+          <a:bodyPr wrap="square" rtlCol="0" anchor="ctr"/>
+          <a:lstStyle/>
+          <a:p>
+            <a:pPr indent="0" marL="0">
+              <a:buNone/>
+            </a:pPr>
+            <a:r>
+              <a:rPr lang="en-US" sz="1250" dirty="0">
                 <a:solidFill>
                   <a:srgbClr val="A9B3B6"/>
                 </a:solidFill>
@@ -1952,25 +1982,546 @@
                 <a:ea typeface="Inter" pitchFamily="34" charset="-122"/>
                 <a:cs typeface="Inter" pitchFamily="34" charset="-120"/>
               </a:rPr>
-              <a:t>Where every metric, log line, and QVD row comes from and ends up.</a:t>
-            </a:r>
-            <a:endParaRPr lang="en-US" sz="1300" dirty="0"/>
-          </a:p>
-        </p:txBody>
-      </p:sp>
-      <p:sp>
-        <p:nvSpPr>
-          <p:cNvPr id="4" name="Shape 2"/>
-          <p:cNvSpPr/>
-          <p:nvPr/>
-        </p:nvSpPr>
-        <p:spPr>
-          <a:xfrm>
-            <a:off x="457200" y="1371600"/>
-            <a:ext cx="3840480" cy="310896"/>
-          </a:xfrm>
-          <a:prstGeom prst="rect">
-            <a:avLst/>
+              <a:t>Three planes: data sources → collection &amp; control → storage, visualization &amp; analytics.</a:t>
+            </a:r>
+            <a:endParaRPr lang="en-US" sz="1250" dirty="0"/>
+          </a:p>
+        </p:txBody>
+      </p:sp>
+      <p:sp>
+        <p:nvSpPr>
+          <p:cNvPr id="5" name="Shape 2"/>
+          <p:cNvSpPr/>
+          <p:nvPr/>
+        </p:nvSpPr>
+        <p:spPr>
+          <a:xfrm>
+            <a:off x="457200" y="1325880"/>
+            <a:ext cx="3383280" cy="4617720"/>
+          </a:xfrm>
+          <a:prstGeom prst="roundRect">
+            <a:avLst>
+              <a:gd name="adj" fmla="val 2162"/>
+            </a:avLst>
+          </a:prstGeom>
+          <a:solidFill>
+            <a:srgbClr val="F2F8F4"/>
+          </a:solidFill>
+          <a:ln w="12700">
+            <a:solidFill>
+              <a:srgbClr val="E1E4E8"/>
+            </a:solidFill>
+            <a:prstDash val="solid"/>
+          </a:ln>
+        </p:spPr>
+      </p:sp>
+      <p:sp>
+        <p:nvSpPr>
+          <p:cNvPr id="6" name="Text 3"/>
+          <p:cNvSpPr/>
+          <p:nvPr/>
+        </p:nvSpPr>
+        <p:spPr>
+          <a:xfrm>
+            <a:off x="594360" y="1435608"/>
+            <a:ext cx="3108960" cy="274320"/>
+          </a:xfrm>
+          <a:prstGeom prst="rect">
+            <a:avLst/>
+          </a:prstGeom>
+          <a:noFill/>
+          <a:ln/>
+        </p:spPr>
+        <p:txBody>
+          <a:bodyPr wrap="square" rtlCol="0" anchor="ctr"/>
+          <a:lstStyle/>
+          <a:p>
+            <a:pPr indent="0" marL="0">
+              <a:buNone/>
+            </a:pPr>
+            <a:r>
+              <a:rPr lang="en-US" sz="1100" b="1" spc="100" kern="0" dirty="0">
+                <a:solidFill>
+                  <a:srgbClr val="006580"/>
+                </a:solidFill>
+                <a:latin typeface="Inter" pitchFamily="34" charset="0"/>
+                <a:ea typeface="Inter" pitchFamily="34" charset="-122"/>
+                <a:cs typeface="Inter" pitchFamily="34" charset="-120"/>
+              </a:rPr>
+              <a:t>DATA SOURCES</a:t>
+            </a:r>
+            <a:endParaRPr lang="en-US" sz="1100" dirty="0"/>
+          </a:p>
+        </p:txBody>
+      </p:sp>
+      <p:sp>
+        <p:nvSpPr>
+          <p:cNvPr id="7" name="Shape 4"/>
+          <p:cNvSpPr/>
+          <p:nvPr/>
+        </p:nvSpPr>
+        <p:spPr>
+          <a:xfrm>
+            <a:off x="4114800" y="1325880"/>
+            <a:ext cx="4160520" cy="4617720"/>
+          </a:xfrm>
+          <a:prstGeom prst="roundRect">
+            <a:avLst>
+              <a:gd name="adj" fmla="val 1758"/>
+            </a:avLst>
+          </a:prstGeom>
+          <a:solidFill>
+            <a:srgbClr val="F1F6F8"/>
+          </a:solidFill>
+          <a:ln w="12700">
+            <a:solidFill>
+              <a:srgbClr val="E1E4E8"/>
+            </a:solidFill>
+            <a:prstDash val="solid"/>
+          </a:ln>
+        </p:spPr>
+      </p:sp>
+      <p:sp>
+        <p:nvSpPr>
+          <p:cNvPr id="8" name="Text 5"/>
+          <p:cNvSpPr/>
+          <p:nvPr/>
+        </p:nvSpPr>
+        <p:spPr>
+          <a:xfrm>
+            <a:off x="4251960" y="1435608"/>
+            <a:ext cx="3886200" cy="274320"/>
+          </a:xfrm>
+          <a:prstGeom prst="rect">
+            <a:avLst/>
+          </a:prstGeom>
+          <a:noFill/>
+          <a:ln/>
+        </p:spPr>
+        <p:txBody>
+          <a:bodyPr wrap="square" rtlCol="0" anchor="ctr"/>
+          <a:lstStyle/>
+          <a:p>
+            <a:pPr indent="0" marL="0">
+              <a:buNone/>
+            </a:pPr>
+            <a:r>
+              <a:rPr lang="en-US" sz="1100" b="1" spc="100" kern="0" dirty="0">
+                <a:solidFill>
+                  <a:srgbClr val="006580"/>
+                </a:solidFill>
+                <a:latin typeface="Inter" pitchFamily="34" charset="0"/>
+                <a:ea typeface="Inter" pitchFamily="34" charset="-122"/>
+                <a:cs typeface="Inter" pitchFamily="34" charset="-120"/>
+              </a:rPr>
+              <a:t>COLLECTION + CONTROL PLANE</a:t>
+            </a:r>
+            <a:endParaRPr lang="en-US" sz="1100" dirty="0"/>
+          </a:p>
+        </p:txBody>
+      </p:sp>
+      <p:sp>
+        <p:nvSpPr>
+          <p:cNvPr id="9" name="Shape 6"/>
+          <p:cNvSpPr/>
+          <p:nvPr/>
+        </p:nvSpPr>
+        <p:spPr>
+          <a:xfrm>
+            <a:off x="8549640" y="1325880"/>
+            <a:ext cx="3154680" cy="4617720"/>
+          </a:xfrm>
+          <a:prstGeom prst="roundRect">
+            <a:avLst>
+              <a:gd name="adj" fmla="val 2319"/>
+            </a:avLst>
+          </a:prstGeom>
+          <a:solidFill>
+            <a:srgbClr val="F4F1F8"/>
+          </a:solidFill>
+          <a:ln w="12700">
+            <a:solidFill>
+              <a:srgbClr val="E1E4E8"/>
+            </a:solidFill>
+            <a:prstDash val="solid"/>
+          </a:ln>
+        </p:spPr>
+      </p:sp>
+      <p:sp>
+        <p:nvSpPr>
+          <p:cNvPr id="10" name="Text 7"/>
+          <p:cNvSpPr/>
+          <p:nvPr/>
+        </p:nvSpPr>
+        <p:spPr>
+          <a:xfrm>
+            <a:off x="8686800" y="1435608"/>
+            <a:ext cx="2880360" cy="274320"/>
+          </a:xfrm>
+          <a:prstGeom prst="rect">
+            <a:avLst/>
+          </a:prstGeom>
+          <a:noFill/>
+          <a:ln/>
+        </p:spPr>
+        <p:txBody>
+          <a:bodyPr wrap="square" rtlCol="0" anchor="ctr"/>
+          <a:lstStyle/>
+          <a:p>
+            <a:pPr indent="0" marL="0">
+              <a:buNone/>
+            </a:pPr>
+            <a:r>
+              <a:rPr lang="en-US" sz="1100" b="1" spc="100" kern="0" dirty="0">
+                <a:solidFill>
+                  <a:srgbClr val="006580"/>
+                </a:solidFill>
+                <a:latin typeface="Inter" pitchFamily="34" charset="0"/>
+                <a:ea typeface="Inter" pitchFamily="34" charset="-122"/>
+                <a:cs typeface="Inter" pitchFamily="34" charset="-120"/>
+              </a:rPr>
+              <a:t>STORE · VISUALIZE · ANALYZE</a:t>
+            </a:r>
+            <a:endParaRPr lang="en-US" sz="1100" dirty="0"/>
+          </a:p>
+        </p:txBody>
+      </p:sp>
+      <p:sp>
+        <p:nvSpPr>
+          <p:cNvPr id="11" name="Shape 8"/>
+          <p:cNvSpPr/>
+          <p:nvPr/>
+        </p:nvSpPr>
+        <p:spPr>
+          <a:xfrm>
+            <a:off x="594360" y="1783080"/>
+            <a:ext cx="3108960" cy="868680"/>
+          </a:xfrm>
+          <a:prstGeom prst="roundRect">
+            <a:avLst>
+              <a:gd name="adj" fmla="val 7368"/>
+            </a:avLst>
+          </a:prstGeom>
+          <a:solidFill>
+            <a:srgbClr val="FFFFFF"/>
+          </a:solidFill>
+          <a:ln w="15875">
+            <a:solidFill>
+              <a:srgbClr val="93579C"/>
+            </a:solidFill>
+            <a:prstDash val="solid"/>
+          </a:ln>
+        </p:spPr>
+      </p:sp>
+      <p:sp>
+        <p:nvSpPr>
+          <p:cNvPr id="12" name="Shape 9"/>
+          <p:cNvSpPr/>
+          <p:nvPr/>
+        </p:nvSpPr>
+        <p:spPr>
+          <a:xfrm>
+            <a:off x="594360" y="1783080"/>
+            <a:ext cx="109728" cy="868680"/>
+          </a:xfrm>
+          <a:prstGeom prst="roundRect">
+            <a:avLst>
+              <a:gd name="adj" fmla="val 58333"/>
+            </a:avLst>
+          </a:prstGeom>
+          <a:solidFill>
+            <a:srgbClr val="93579C"/>
+          </a:solidFill>
+          <a:ln/>
+        </p:spPr>
+      </p:sp>
+      <p:sp>
+        <p:nvSpPr>
+          <p:cNvPr id="13" name="Shape 10"/>
+          <p:cNvSpPr/>
+          <p:nvPr/>
+        </p:nvSpPr>
+        <p:spPr>
+          <a:xfrm>
+            <a:off x="832104" y="1988820"/>
+            <a:ext cx="548640" cy="411480"/>
+          </a:xfrm>
+          <a:prstGeom prst="cloud">
+            <a:avLst/>
+          </a:prstGeom>
+          <a:solidFill>
+            <a:srgbClr val="93579C"/>
+          </a:solidFill>
+          <a:ln/>
+        </p:spPr>
+      </p:sp>
+      <p:sp>
+        <p:nvSpPr>
+          <p:cNvPr id="14" name="Text 11"/>
+          <p:cNvSpPr/>
+          <p:nvPr/>
+        </p:nvSpPr>
+        <p:spPr>
+          <a:xfrm>
+            <a:off x="1435608" y="1874520"/>
+            <a:ext cx="2194560" cy="310896"/>
+          </a:xfrm>
+          <a:prstGeom prst="rect">
+            <a:avLst/>
+          </a:prstGeom>
+          <a:noFill/>
+          <a:ln/>
+        </p:spPr>
+        <p:txBody>
+          <a:bodyPr wrap="square" rtlCol="0" anchor="ctr"/>
+          <a:lstStyle/>
+          <a:p>
+            <a:pPr indent="0" marL="0">
+              <a:buNone/>
+            </a:pPr>
+            <a:r>
+              <a:rPr lang="en-US" sz="1200" b="1" dirty="0">
+                <a:solidFill>
+                  <a:srgbClr val="2D3543"/>
+                </a:solidFill>
+                <a:latin typeface="Inter" pitchFamily="34" charset="0"/>
+                <a:ea typeface="Inter" pitchFamily="34" charset="-122"/>
+                <a:cs typeface="Inter" pitchFamily="34" charset="-120"/>
+              </a:rPr>
+              <a:t>Talend Cloud — N tenants</a:t>
+            </a:r>
+            <a:endParaRPr lang="en-US" sz="1200" dirty="0"/>
+          </a:p>
+        </p:txBody>
+      </p:sp>
+      <p:sp>
+        <p:nvSpPr>
+          <p:cNvPr id="15" name="Text 12"/>
+          <p:cNvSpPr/>
+          <p:nvPr/>
+        </p:nvSpPr>
+        <p:spPr>
+          <a:xfrm>
+            <a:off x="1435608" y="2167128"/>
+            <a:ext cx="2194560" cy="411480"/>
+          </a:xfrm>
+          <a:prstGeom prst="rect">
+            <a:avLst/>
+          </a:prstGeom>
+          <a:noFill/>
+          <a:ln/>
+        </p:spPr>
+        <p:txBody>
+          <a:bodyPr wrap="square" rtlCol="0" anchor="t"/>
+          <a:lstStyle/>
+          <a:p>
+            <a:pPr indent="0" marL="0">
+              <a:buNone/>
+            </a:pPr>
+            <a:r>
+              <a:rPr lang="en-US" sz="900" dirty="0">
+                <a:solidFill>
+                  <a:srgbClr val="A9B3B6"/>
+                </a:solidFill>
+                <a:latin typeface="Inter" pitchFamily="34" charset="0"/>
+                <a:ea typeface="Inter" pitchFamily="34" charset="-122"/>
+                <a:cs typeface="Inter" pitchFamily="34" charset="-120"/>
+              </a:rPr>
+              <a:t>Orchestration · Observability · Exec-history · Audit</a:t>
+            </a:r>
+            <a:endParaRPr lang="en-US" sz="900" dirty="0"/>
+          </a:p>
+        </p:txBody>
+      </p:sp>
+      <p:sp>
+        <p:nvSpPr>
+          <p:cNvPr id="16" name="Shape 13"/>
+          <p:cNvSpPr/>
+          <p:nvPr/>
+        </p:nvSpPr>
+        <p:spPr>
+          <a:xfrm>
+            <a:off x="594360" y="2907792"/>
+            <a:ext cx="3108960" cy="868680"/>
+          </a:xfrm>
+          <a:prstGeom prst="roundRect">
+            <a:avLst>
+              <a:gd name="adj" fmla="val 7368"/>
+            </a:avLst>
+          </a:prstGeom>
+          <a:solidFill>
+            <a:srgbClr val="FFFFFF"/>
+          </a:solidFill>
+          <a:ln w="15875">
+            <a:solidFill>
+              <a:srgbClr val="009845"/>
+            </a:solidFill>
+            <a:prstDash val="solid"/>
+          </a:ln>
+        </p:spPr>
+      </p:sp>
+      <p:sp>
+        <p:nvSpPr>
+          <p:cNvPr id="17" name="Shape 14"/>
+          <p:cNvSpPr/>
+          <p:nvPr/>
+        </p:nvSpPr>
+        <p:spPr>
+          <a:xfrm>
+            <a:off x="594360" y="2907792"/>
+            <a:ext cx="109728" cy="868680"/>
+          </a:xfrm>
+          <a:prstGeom prst="roundRect">
+            <a:avLst>
+              <a:gd name="adj" fmla="val 58333"/>
+            </a:avLst>
+          </a:prstGeom>
+          <a:solidFill>
+            <a:srgbClr val="009845"/>
+          </a:solidFill>
+          <a:ln/>
+        </p:spPr>
+      </p:sp>
+      <p:sp>
+        <p:nvSpPr>
+          <p:cNvPr id="18" name="Shape 15"/>
+          <p:cNvSpPr/>
+          <p:nvPr/>
+        </p:nvSpPr>
+        <p:spPr>
+          <a:xfrm>
+            <a:off x="832104" y="3113532"/>
+            <a:ext cx="548640" cy="411480"/>
+          </a:xfrm>
+          <a:prstGeom prst="cloud">
+            <a:avLst/>
+          </a:prstGeom>
+          <a:solidFill>
+            <a:srgbClr val="009845"/>
+          </a:solidFill>
+          <a:ln/>
+        </p:spPr>
+      </p:sp>
+      <p:sp>
+        <p:nvSpPr>
+          <p:cNvPr id="19" name="Text 16"/>
+          <p:cNvSpPr/>
+          <p:nvPr/>
+        </p:nvSpPr>
+        <p:spPr>
+          <a:xfrm>
+            <a:off x="1435608" y="2999232"/>
+            <a:ext cx="2194560" cy="310896"/>
+          </a:xfrm>
+          <a:prstGeom prst="rect">
+            <a:avLst/>
+          </a:prstGeom>
+          <a:noFill/>
+          <a:ln/>
+        </p:spPr>
+        <p:txBody>
+          <a:bodyPr wrap="square" rtlCol="0" anchor="ctr"/>
+          <a:lstStyle/>
+          <a:p>
+            <a:pPr indent="0" marL="0">
+              <a:buNone/>
+            </a:pPr>
+            <a:r>
+              <a:rPr lang="en-US" sz="1200" b="1" dirty="0">
+                <a:solidFill>
+                  <a:srgbClr val="2D3543"/>
+                </a:solidFill>
+                <a:latin typeface="Inter" pitchFamily="34" charset="0"/>
+                <a:ea typeface="Inter" pitchFamily="34" charset="-122"/>
+                <a:cs typeface="Inter" pitchFamily="34" charset="-120"/>
+              </a:rPr>
+              <a:t>Qlik Cloud — N tenants</a:t>
+            </a:r>
+            <a:endParaRPr lang="en-US" sz="1200" dirty="0"/>
+          </a:p>
+        </p:txBody>
+      </p:sp>
+      <p:sp>
+        <p:nvSpPr>
+          <p:cNvPr id="20" name="Text 17"/>
+          <p:cNvSpPr/>
+          <p:nvPr/>
+        </p:nvSpPr>
+        <p:spPr>
+          <a:xfrm>
+            <a:off x="1435608" y="3291840"/>
+            <a:ext cx="2194560" cy="411480"/>
+          </a:xfrm>
+          <a:prstGeom prst="rect">
+            <a:avLst/>
+          </a:prstGeom>
+          <a:noFill/>
+          <a:ln/>
+        </p:spPr>
+        <p:txBody>
+          <a:bodyPr wrap="square" rtlCol="0" anchor="t"/>
+          <a:lstStyle/>
+          <a:p>
+            <a:pPr indent="0" marL="0">
+              <a:buNone/>
+            </a:pPr>
+            <a:r>
+              <a:rPr lang="en-US" sz="900" dirty="0">
+                <a:solidFill>
+                  <a:srgbClr val="A9B3B6"/>
+                </a:solidFill>
+                <a:latin typeface="Inter" pitchFamily="34" charset="0"/>
+                <a:ea typeface="Inter" pitchFamily="34" charset="-122"/>
+                <a:cs typeface="Inter" pitchFamily="34" charset="-120"/>
+              </a:rPr>
+              <a:t>Apps · Reloads · Audit · Quotas</a:t>
+            </a:r>
+            <a:endParaRPr lang="en-US" sz="900" dirty="0"/>
+          </a:p>
+        </p:txBody>
+      </p:sp>
+      <p:sp>
+        <p:nvSpPr>
+          <p:cNvPr id="21" name="Shape 18"/>
+          <p:cNvSpPr/>
+          <p:nvPr/>
+        </p:nvSpPr>
+        <p:spPr>
+          <a:xfrm>
+            <a:off x="594360" y="4032504"/>
+            <a:ext cx="3108960" cy="868680"/>
+          </a:xfrm>
+          <a:prstGeom prst="roundRect">
+            <a:avLst>
+              <a:gd name="adj" fmla="val 7368"/>
+            </a:avLst>
+          </a:prstGeom>
+          <a:solidFill>
+            <a:srgbClr val="FFFFFF"/>
+          </a:solidFill>
+          <a:ln w="15875">
+            <a:solidFill>
+              <a:srgbClr val="006580"/>
+            </a:solidFill>
+            <a:prstDash val="solid"/>
+          </a:ln>
+        </p:spPr>
+      </p:sp>
+      <p:sp>
+        <p:nvSpPr>
+          <p:cNvPr id="22" name="Shape 19"/>
+          <p:cNvSpPr/>
+          <p:nvPr/>
+        </p:nvSpPr>
+        <p:spPr>
+          <a:xfrm>
+            <a:off x="594360" y="4032504"/>
+            <a:ext cx="109728" cy="868680"/>
+          </a:xfrm>
+          <a:prstGeom prst="roundRect">
+            <a:avLst>
+              <a:gd name="adj" fmla="val 58333"/>
+            </a:avLst>
           </a:prstGeom>
           <a:solidFill>
             <a:srgbClr val="006580"/>
@@ -1980,157 +2531,462 @@
       </p:sp>
       <p:sp>
         <p:nvSpPr>
-          <p:cNvPr id="5" name="Text 3"/>
-          <p:cNvSpPr/>
-          <p:nvPr/>
-        </p:nvSpPr>
-        <p:spPr>
-          <a:xfrm>
-            <a:off x="548640" y="1389888"/>
-            <a:ext cx="3657600" cy="274320"/>
-          </a:xfrm>
-          <a:prstGeom prst="rect">
-            <a:avLst/>
-          </a:prstGeom>
-          <a:noFill/>
-          <a:ln/>
-        </p:spPr>
-        <p:txBody>
-          <a:bodyPr wrap="square" rtlCol="0" anchor="ctr"/>
-          <a:lstStyle/>
-          <a:p>
-            <a:pPr algn="l" indent="0" marL="0">
-              <a:buNone/>
-            </a:pPr>
-            <a:r>
-              <a:rPr lang="en-US" sz="1100" b="1" dirty="0">
-                <a:solidFill>
-                  <a:srgbClr val="FFFFFF"/>
-                </a:solidFill>
-                <a:latin typeface="Inter" pitchFamily="34" charset="0"/>
-                <a:ea typeface="Inter" pitchFamily="34" charset="-122"/>
-                <a:cs typeface="Inter" pitchFamily="34" charset="-120"/>
-              </a:rPr>
-              <a:t>SOURCES</a:t>
-            </a:r>
-            <a:endParaRPr lang="en-US" sz="1100" dirty="0"/>
-          </a:p>
-        </p:txBody>
-      </p:sp>
-      <p:sp>
-        <p:nvSpPr>
-          <p:cNvPr id="6" name="Shape 4"/>
-          <p:cNvSpPr/>
-          <p:nvPr/>
-        </p:nvSpPr>
-        <p:spPr>
-          <a:xfrm>
-            <a:off x="457200" y="1828800"/>
-            <a:ext cx="3840480" cy="777240"/>
+          <p:cNvPr id="23" name="Shape 20"/>
+          <p:cNvSpPr/>
+          <p:nvPr/>
+        </p:nvSpPr>
+        <p:spPr>
+          <a:xfrm>
+            <a:off x="905256" y="4238244"/>
+            <a:ext cx="310896" cy="402336"/>
+          </a:xfrm>
+          <a:prstGeom prst="rect">
+            <a:avLst/>
+          </a:prstGeom>
+          <a:solidFill>
+            <a:srgbClr val="FFFFFF"/>
+          </a:solidFill>
+          <a:ln w="19050">
+            <a:solidFill>
+              <a:srgbClr val="006580"/>
+            </a:solidFill>
+            <a:prstDash val="solid"/>
+          </a:ln>
+        </p:spPr>
+      </p:sp>
+      <p:sp>
+        <p:nvSpPr>
+          <p:cNvPr id="24" name="Shape 21"/>
+          <p:cNvSpPr/>
+          <p:nvPr/>
+        </p:nvSpPr>
+        <p:spPr>
+          <a:xfrm>
+            <a:off x="832104" y="4293108"/>
+            <a:ext cx="310896" cy="402336"/>
+          </a:xfrm>
+          <a:prstGeom prst="rect">
+            <a:avLst/>
+          </a:prstGeom>
+          <a:solidFill>
+            <a:srgbClr val="006580"/>
+          </a:solidFill>
+          <a:ln/>
+        </p:spPr>
+      </p:sp>
+      <p:sp>
+        <p:nvSpPr>
+          <p:cNvPr id="25" name="Text 22"/>
+          <p:cNvSpPr/>
+          <p:nvPr/>
+        </p:nvSpPr>
+        <p:spPr>
+          <a:xfrm>
+            <a:off x="1435608" y="4123944"/>
+            <a:ext cx="2194560" cy="310896"/>
+          </a:xfrm>
+          <a:prstGeom prst="rect">
+            <a:avLst/>
+          </a:prstGeom>
+          <a:noFill/>
+          <a:ln/>
+        </p:spPr>
+        <p:txBody>
+          <a:bodyPr wrap="square" rtlCol="0" anchor="ctr"/>
+          <a:lstStyle/>
+          <a:p>
+            <a:pPr indent="0" marL="0">
+              <a:buNone/>
+            </a:pPr>
+            <a:r>
+              <a:rPr lang="en-US" sz="1200" b="1" dirty="0">
+                <a:solidFill>
+                  <a:srgbClr val="2D3543"/>
+                </a:solidFill>
+                <a:latin typeface="Inter" pitchFamily="34" charset="0"/>
+                <a:ea typeface="Inter" pitchFamily="34" charset="-122"/>
+                <a:cs typeface="Inter" pitchFamily="34" charset="-120"/>
+              </a:rPr>
+              <a:t>Remote Engine hosts</a:t>
+            </a:r>
+            <a:endParaRPr lang="en-US" sz="1200" dirty="0"/>
+          </a:p>
+        </p:txBody>
+      </p:sp>
+      <p:sp>
+        <p:nvSpPr>
+          <p:cNvPr id="26" name="Text 23"/>
+          <p:cNvSpPr/>
+          <p:nvPr/>
+        </p:nvSpPr>
+        <p:spPr>
+          <a:xfrm>
+            <a:off x="1435608" y="4416552"/>
+            <a:ext cx="2194560" cy="411480"/>
+          </a:xfrm>
+          <a:prstGeom prst="rect">
+            <a:avLst/>
+          </a:prstGeom>
+          <a:noFill/>
+          <a:ln/>
+        </p:spPr>
+        <p:txBody>
+          <a:bodyPr wrap="square" rtlCol="0" anchor="t"/>
+          <a:lstStyle/>
+          <a:p>
+            <a:pPr indent="0" marL="0">
+              <a:buNone/>
+            </a:pPr>
+            <a:r>
+              <a:rPr lang="en-US" sz="900" dirty="0">
+                <a:solidFill>
+                  <a:srgbClr val="A9B3B6"/>
+                </a:solidFill>
+                <a:latin typeface="Inter" pitchFamily="34" charset="0"/>
+                <a:ea typeface="Inter" pitchFamily="34" charset="-122"/>
+                <a:cs typeface="Inter" pitchFamily="34" charset="-120"/>
+              </a:rPr>
+              <a:t>JSON job-management logs on Linux</a:t>
+            </a:r>
+            <a:endParaRPr lang="en-US" sz="900" dirty="0"/>
+          </a:p>
+        </p:txBody>
+      </p:sp>
+      <p:sp>
+        <p:nvSpPr>
+          <p:cNvPr id="27" name="Shape 24"/>
+          <p:cNvSpPr/>
+          <p:nvPr/>
+        </p:nvSpPr>
+        <p:spPr>
+          <a:xfrm>
+            <a:off x="4251960" y="1783080"/>
+            <a:ext cx="3886200" cy="868680"/>
           </a:xfrm>
           <a:prstGeom prst="roundRect">
             <a:avLst>
-              <a:gd name="adj" fmla="val 7059"/>
+              <a:gd name="adj" fmla="val 7368"/>
             </a:avLst>
           </a:prstGeom>
           <a:solidFill>
-            <a:srgbClr val="93579C"/>
+            <a:srgbClr val="FFFFFF"/>
           </a:solidFill>
-          <a:ln/>
-        </p:spPr>
-      </p:sp>
-      <p:sp>
-        <p:nvSpPr>
-          <p:cNvPr id="7" name="Text 5"/>
-          <p:cNvSpPr/>
-          <p:nvPr/>
-        </p:nvSpPr>
-        <p:spPr>
-          <a:xfrm>
-            <a:off x="566928" y="1920240"/>
-            <a:ext cx="3621024" cy="292608"/>
-          </a:xfrm>
-          <a:prstGeom prst="rect">
-            <a:avLst/>
-          </a:prstGeom>
-          <a:noFill/>
-          <a:ln/>
-        </p:spPr>
-        <p:txBody>
-          <a:bodyPr wrap="square" rtlCol="0" anchor="ctr"/>
-          <a:lstStyle/>
-          <a:p>
-            <a:pPr algn="l" indent="0" marL="0">
-              <a:buNone/>
-            </a:pPr>
-            <a:r>
-              <a:rPr lang="en-US" sz="1300" b="1" dirty="0">
-                <a:solidFill>
-                  <a:srgbClr val="FFFFFF"/>
-                </a:solidFill>
-                <a:latin typeface="Inter" pitchFamily="34" charset="0"/>
-                <a:ea typeface="Inter" pitchFamily="34" charset="-122"/>
-                <a:cs typeface="Inter" pitchFamily="34" charset="-120"/>
-              </a:rPr>
-              <a:t>Talend Cloud — N tenants</a:t>
-            </a:r>
-            <a:endParaRPr lang="en-US" sz="1300" dirty="0"/>
-          </a:p>
-        </p:txBody>
-      </p:sp>
-      <p:sp>
-        <p:nvSpPr>
-          <p:cNvPr id="8" name="Text 6"/>
-          <p:cNvSpPr/>
-          <p:nvPr/>
-        </p:nvSpPr>
-        <p:spPr>
-          <a:xfrm>
-            <a:off x="566928" y="2240280"/>
-            <a:ext cx="3621024" cy="320040"/>
-          </a:xfrm>
-          <a:prstGeom prst="rect">
-            <a:avLst/>
-          </a:prstGeom>
-          <a:noFill/>
-          <a:ln/>
-        </p:spPr>
-        <p:txBody>
-          <a:bodyPr wrap="square" rtlCol="0" anchor="t"/>
-          <a:lstStyle/>
-          <a:p>
-            <a:pPr algn="l" indent="0" marL="0">
-              <a:buNone/>
-            </a:pPr>
-            <a:r>
-              <a:rPr lang="en-US" sz="1000" dirty="0">
-                <a:solidFill>
-                  <a:srgbClr val="FFFFFF"/>
-                </a:solidFill>
-                <a:latin typeface="Inter" pitchFamily="34" charset="0"/>
-                <a:ea typeface="Inter" pitchFamily="34" charset="-122"/>
-                <a:cs typeface="Inter" pitchFamily="34" charset="-120"/>
-              </a:rPr>
-              <a:t>Orchestration · Observability · Execution-history · Audit (per-tenant PAT)</a:t>
-            </a:r>
-            <a:endParaRPr lang="en-US" sz="1000" dirty="0"/>
-          </a:p>
-        </p:txBody>
-      </p:sp>
-      <p:sp>
-        <p:nvSpPr>
-          <p:cNvPr id="9" name="Shape 7"/>
-          <p:cNvSpPr/>
-          <p:nvPr/>
-        </p:nvSpPr>
-        <p:spPr>
-          <a:xfrm>
-            <a:off x="457200" y="2743200"/>
-            <a:ext cx="3840480" cy="777240"/>
+          <a:ln w="15875">
+            <a:solidFill>
+              <a:srgbClr val="19416C"/>
+            </a:solidFill>
+            <a:prstDash val="solid"/>
+          </a:ln>
+        </p:spPr>
+      </p:sp>
+      <p:sp>
+        <p:nvSpPr>
+          <p:cNvPr id="28" name="Shape 25"/>
+          <p:cNvSpPr/>
+          <p:nvPr/>
+        </p:nvSpPr>
+        <p:spPr>
+          <a:xfrm>
+            <a:off x="4251960" y="1783080"/>
+            <a:ext cx="109728" cy="868680"/>
           </a:xfrm>
           <a:prstGeom prst="roundRect">
             <a:avLst>
-              <a:gd name="adj" fmla="val 7059"/>
+              <a:gd name="adj" fmla="val 58333"/>
+            </a:avLst>
+          </a:prstGeom>
+          <a:solidFill>
+            <a:srgbClr val="19416C"/>
+          </a:solidFill>
+          <a:ln/>
+        </p:spPr>
+      </p:sp>
+      <p:sp>
+        <p:nvSpPr>
+          <p:cNvPr id="29" name="Shape 26"/>
+          <p:cNvSpPr/>
+          <p:nvPr/>
+        </p:nvSpPr>
+        <p:spPr>
+          <a:xfrm>
+            <a:off x="4489704" y="1988820"/>
+            <a:ext cx="457200" cy="457200"/>
+          </a:xfrm>
+          <a:prstGeom prst="gear6">
+            <a:avLst/>
+          </a:prstGeom>
+          <a:solidFill>
+            <a:srgbClr val="19416C"/>
+          </a:solidFill>
+          <a:ln/>
+        </p:spPr>
+      </p:sp>
+      <p:sp>
+        <p:nvSpPr>
+          <p:cNvPr id="30" name="Text 27"/>
+          <p:cNvSpPr/>
+          <p:nvPr/>
+        </p:nvSpPr>
+        <p:spPr>
+          <a:xfrm>
+            <a:off x="5093208" y="1874520"/>
+            <a:ext cx="2971800" cy="310896"/>
+          </a:xfrm>
+          <a:prstGeom prst="rect">
+            <a:avLst/>
+          </a:prstGeom>
+          <a:noFill/>
+          <a:ln/>
+        </p:spPr>
+        <p:txBody>
+          <a:bodyPr wrap="square" rtlCol="0" anchor="ctr"/>
+          <a:lstStyle/>
+          <a:p>
+            <a:pPr indent="0" marL="0">
+              <a:buNone/>
+            </a:pPr>
+            <a:r>
+              <a:rPr lang="en-US" sz="1200" b="1" dirty="0">
+                <a:solidFill>
+                  <a:srgbClr val="2D3543"/>
+                </a:solidFill>
+                <a:latin typeface="Inter" pitchFamily="34" charset="0"/>
+                <a:ea typeface="Inter" pitchFamily="34" charset="-122"/>
+                <a:cs typeface="Inter" pitchFamily="34" charset="-120"/>
+              </a:rPr>
+              <a:t>MCP server (TS)</a:t>
+            </a:r>
+            <a:endParaRPr lang="en-US" sz="1200" dirty="0"/>
+          </a:p>
+        </p:txBody>
+      </p:sp>
+      <p:sp>
+        <p:nvSpPr>
+          <p:cNvPr id="31" name="Text 28"/>
+          <p:cNvSpPr/>
+          <p:nvPr/>
+        </p:nvSpPr>
+        <p:spPr>
+          <a:xfrm>
+            <a:off x="5093208" y="2167128"/>
+            <a:ext cx="2971800" cy="411480"/>
+          </a:xfrm>
+          <a:prstGeom prst="rect">
+            <a:avLst/>
+          </a:prstGeom>
+          <a:noFill/>
+          <a:ln/>
+        </p:spPr>
+        <p:txBody>
+          <a:bodyPr wrap="square" rtlCol="0" anchor="t"/>
+          <a:lstStyle/>
+          <a:p>
+            <a:pPr indent="0" marL="0">
+              <a:buNone/>
+            </a:pPr>
+            <a:r>
+              <a:rPr lang="en-US" sz="900" dirty="0">
+                <a:solidFill>
+                  <a:srgbClr val="A9B3B6"/>
+                </a:solidFill>
+                <a:latin typeface="Inter" pitchFamily="34" charset="0"/>
+                <a:ea typeface="Inter" pitchFamily="34" charset="-122"/>
+                <a:cs typeface="Inter" pitchFamily="34" charset="-120"/>
+              </a:rPr>
+              <a:t>stdio · per-tenant routing · observability preset</a:t>
+            </a:r>
+            <a:endParaRPr lang="en-US" sz="900" dirty="0"/>
+          </a:p>
+        </p:txBody>
+      </p:sp>
+      <p:sp>
+        <p:nvSpPr>
+          <p:cNvPr id="32" name="Shape 29"/>
+          <p:cNvSpPr/>
+          <p:nvPr/>
+        </p:nvSpPr>
+        <p:spPr>
+          <a:xfrm>
+            <a:off x="4251960" y="2907792"/>
+            <a:ext cx="3886200" cy="868680"/>
+          </a:xfrm>
+          <a:prstGeom prst="roundRect">
+            <a:avLst>
+              <a:gd name="adj" fmla="val 7368"/>
+            </a:avLst>
+          </a:prstGeom>
+          <a:solidFill>
+            <a:srgbClr val="FFFFFF"/>
+          </a:solidFill>
+          <a:ln w="15875">
+            <a:solidFill>
+              <a:srgbClr val="19416C"/>
+            </a:solidFill>
+            <a:prstDash val="solid"/>
+          </a:ln>
+        </p:spPr>
+      </p:sp>
+      <p:sp>
+        <p:nvSpPr>
+          <p:cNvPr id="33" name="Shape 30"/>
+          <p:cNvSpPr/>
+          <p:nvPr/>
+        </p:nvSpPr>
+        <p:spPr>
+          <a:xfrm>
+            <a:off x="4251960" y="2907792"/>
+            <a:ext cx="109728" cy="868680"/>
+          </a:xfrm>
+          <a:prstGeom prst="roundRect">
+            <a:avLst>
+              <a:gd name="adj" fmla="val 58333"/>
+            </a:avLst>
+          </a:prstGeom>
+          <a:solidFill>
+            <a:srgbClr val="19416C"/>
+          </a:solidFill>
+          <a:ln/>
+        </p:spPr>
+      </p:sp>
+      <p:sp>
+        <p:nvSpPr>
+          <p:cNvPr id="34" name="Shape 31"/>
+          <p:cNvSpPr/>
+          <p:nvPr/>
+        </p:nvSpPr>
+        <p:spPr>
+          <a:xfrm>
+            <a:off x="4489704" y="3113532"/>
+            <a:ext cx="457200" cy="457200"/>
+          </a:xfrm>
+          <a:prstGeom prst="gear6">
+            <a:avLst/>
+          </a:prstGeom>
+          <a:solidFill>
+            <a:srgbClr val="19416C"/>
+          </a:solidFill>
+          <a:ln/>
+        </p:spPr>
+      </p:sp>
+      <p:sp>
+        <p:nvSpPr>
+          <p:cNvPr id="35" name="Text 32"/>
+          <p:cNvSpPr/>
+          <p:nvPr/>
+        </p:nvSpPr>
+        <p:spPr>
+          <a:xfrm>
+            <a:off x="5093208" y="2999232"/>
+            <a:ext cx="2971800" cy="310896"/>
+          </a:xfrm>
+          <a:prstGeom prst="rect">
+            <a:avLst/>
+          </a:prstGeom>
+          <a:noFill/>
+          <a:ln/>
+        </p:spPr>
+        <p:txBody>
+          <a:bodyPr wrap="square" rtlCol="0" anchor="ctr"/>
+          <a:lstStyle/>
+          <a:p>
+            <a:pPr indent="0" marL="0">
+              <a:buNone/>
+            </a:pPr>
+            <a:r>
+              <a:rPr lang="en-US" sz="1200" b="1" dirty="0">
+                <a:solidFill>
+                  <a:srgbClr val="2D3543"/>
+                </a:solidFill>
+                <a:latin typeface="Inter" pitchFamily="34" charset="0"/>
+                <a:ea typeface="Inter" pitchFamily="34" charset="-122"/>
+                <a:cs typeface="Inter" pitchFamily="34" charset="-120"/>
+              </a:rPr>
+              <a:t>Python exporters ×4</a:t>
+            </a:r>
+            <a:endParaRPr lang="en-US" sz="1200" dirty="0"/>
+          </a:p>
+        </p:txBody>
+      </p:sp>
+      <p:sp>
+        <p:nvSpPr>
+          <p:cNvPr id="36" name="Text 33"/>
+          <p:cNvSpPr/>
+          <p:nvPr/>
+        </p:nvSpPr>
+        <p:spPr>
+          <a:xfrm>
+            <a:off x="5093208" y="3291840"/>
+            <a:ext cx="2971800" cy="411480"/>
+          </a:xfrm>
+          <a:prstGeom prst="rect">
+            <a:avLst/>
+          </a:prstGeom>
+          <a:noFill/>
+          <a:ln/>
+        </p:spPr>
+        <p:txBody>
+          <a:bodyPr wrap="square" rtlCol="0" anchor="t"/>
+          <a:lstStyle/>
+          <a:p>
+            <a:pPr indent="0" marL="0">
+              <a:buNone/>
+            </a:pPr>
+            <a:r>
+              <a:rPr lang="en-US" sz="900" dirty="0">
+                <a:solidFill>
+                  <a:srgbClr val="A9B3B6"/>
+                </a:solidFill>
+                <a:latin typeface="Inter" pitchFamily="34" charset="0"/>
+                <a:ea typeface="Inter" pitchFamily="34" charset="-122"/>
+                <a:cs typeface="Inter" pitchFamily="34" charset="-120"/>
+              </a:rPr>
+              <a:t>business · engine-logs · qlik-obs · qvd</a:t>
+            </a:r>
+            <a:endParaRPr lang="en-US" sz="900" dirty="0"/>
+          </a:p>
+        </p:txBody>
+      </p:sp>
+      <p:sp>
+        <p:nvSpPr>
+          <p:cNvPr id="37" name="Shape 34"/>
+          <p:cNvSpPr/>
+          <p:nvPr/>
+        </p:nvSpPr>
+        <p:spPr>
+          <a:xfrm>
+            <a:off x="4251960" y="4032504"/>
+            <a:ext cx="3886200" cy="868680"/>
+          </a:xfrm>
+          <a:prstGeom prst="roundRect">
+            <a:avLst>
+              <a:gd name="adj" fmla="val 7368"/>
+            </a:avLst>
+          </a:prstGeom>
+          <a:solidFill>
+            <a:srgbClr val="FFFFFF"/>
+          </a:solidFill>
+          <a:ln w="15875">
+            <a:solidFill>
+              <a:srgbClr val="009845"/>
+            </a:solidFill>
+            <a:prstDash val="solid"/>
+          </a:ln>
+        </p:spPr>
+      </p:sp>
+      <p:sp>
+        <p:nvSpPr>
+          <p:cNvPr id="38" name="Shape 35"/>
+          <p:cNvSpPr/>
+          <p:nvPr/>
+        </p:nvSpPr>
+        <p:spPr>
+          <a:xfrm>
+            <a:off x="4251960" y="4032504"/>
+            <a:ext cx="109728" cy="868680"/>
+          </a:xfrm>
+          <a:prstGeom prst="roundRect">
+            <a:avLst>
+              <a:gd name="adj" fmla="val 58333"/>
             </a:avLst>
           </a:prstGeom>
           <a:solidFill>
@@ -2141,53 +2997,73 @@
       </p:sp>
       <p:sp>
         <p:nvSpPr>
-          <p:cNvPr id="10" name="Text 8"/>
-          <p:cNvSpPr/>
-          <p:nvPr/>
-        </p:nvSpPr>
-        <p:spPr>
-          <a:xfrm>
-            <a:off x="566928" y="2834640"/>
-            <a:ext cx="3621024" cy="292608"/>
-          </a:xfrm>
-          <a:prstGeom prst="rect">
-            <a:avLst/>
-          </a:prstGeom>
-          <a:noFill/>
-          <a:ln/>
-        </p:spPr>
-        <p:txBody>
-          <a:bodyPr wrap="square" rtlCol="0" anchor="ctr"/>
-          <a:lstStyle/>
-          <a:p>
-            <a:pPr algn="l" indent="0" marL="0">
-              <a:buNone/>
-            </a:pPr>
-            <a:r>
-              <a:rPr lang="en-US" sz="1300" b="1" dirty="0">
-                <a:solidFill>
-                  <a:srgbClr val="FFFFFF"/>
-                </a:solidFill>
-                <a:latin typeface="Inter" pitchFamily="34" charset="0"/>
-                <a:ea typeface="Inter" pitchFamily="34" charset="-122"/>
-                <a:cs typeface="Inter" pitchFamily="34" charset="-120"/>
-              </a:rPr>
-              <a:t>Qlik Cloud — N tenants</a:t>
-            </a:r>
-            <a:endParaRPr lang="en-US" sz="1300" dirty="0"/>
-          </a:p>
-        </p:txBody>
-      </p:sp>
-      <p:sp>
-        <p:nvSpPr>
-          <p:cNvPr id="11" name="Text 9"/>
-          <p:cNvSpPr/>
-          <p:nvPr/>
-        </p:nvSpPr>
-        <p:spPr>
-          <a:xfrm>
-            <a:off x="566928" y="3154680"/>
-            <a:ext cx="3621024" cy="320040"/>
+          <p:cNvPr id="39" name="Shape 36"/>
+          <p:cNvSpPr/>
+          <p:nvPr/>
+        </p:nvSpPr>
+        <p:spPr>
+          <a:xfrm>
+            <a:off x="4489704" y="4238244"/>
+            <a:ext cx="457200" cy="457200"/>
+          </a:xfrm>
+          <a:prstGeom prst="gear6">
+            <a:avLst/>
+          </a:prstGeom>
+          <a:solidFill>
+            <a:srgbClr val="009845"/>
+          </a:solidFill>
+          <a:ln/>
+        </p:spPr>
+      </p:sp>
+      <p:sp>
+        <p:nvSpPr>
+          <p:cNvPr id="40" name="Text 37"/>
+          <p:cNvSpPr/>
+          <p:nvPr/>
+        </p:nvSpPr>
+        <p:spPr>
+          <a:xfrm>
+            <a:off x="5093208" y="4123944"/>
+            <a:ext cx="2971800" cy="310896"/>
+          </a:xfrm>
+          <a:prstGeom prst="rect">
+            <a:avLst/>
+          </a:prstGeom>
+          <a:noFill/>
+          <a:ln/>
+        </p:spPr>
+        <p:txBody>
+          <a:bodyPr wrap="square" rtlCol="0" anchor="ctr"/>
+          <a:lstStyle/>
+          <a:p>
+            <a:pPr indent="0" marL="0">
+              <a:buNone/>
+            </a:pPr>
+            <a:r>
+              <a:rPr lang="en-US" sz="1200" b="1" dirty="0">
+                <a:solidFill>
+                  <a:srgbClr val="2D3543"/>
+                </a:solidFill>
+                <a:latin typeface="Inter" pitchFamily="34" charset="0"/>
+                <a:ea typeface="Inter" pitchFamily="34" charset="-122"/>
+                <a:cs typeface="Inter" pitchFamily="34" charset="-120"/>
+              </a:rPr>
+              <a:t>qlik-engine-extractor</a:t>
+            </a:r>
+            <a:endParaRPr lang="en-US" sz="1200" dirty="0"/>
+          </a:p>
+        </p:txBody>
+      </p:sp>
+      <p:sp>
+        <p:nvSpPr>
+          <p:cNvPr id="41" name="Text 38"/>
+          <p:cNvSpPr/>
+          <p:nvPr/>
+        </p:nvSpPr>
+        <p:spPr>
+          <a:xfrm>
+            <a:off x="5093208" y="4416552"/>
+            <a:ext cx="2971800" cy="411480"/>
           </a:xfrm>
           <a:prstGeom prst="rect">
             <a:avLst/>
@@ -2199,656 +3075,65 @@
           <a:bodyPr wrap="square" rtlCol="0" anchor="t"/>
           <a:lstStyle/>
           <a:p>
-            <a:pPr algn="l" indent="0" marL="0">
-              <a:buNone/>
-            </a:pPr>
-            <a:r>
-              <a:rPr lang="en-US" sz="1000" dirty="0">
-                <a:solidFill>
-                  <a:srgbClr val="FFFFFF"/>
-                </a:solidFill>
-                <a:latin typeface="Inter" pitchFamily="34" charset="0"/>
-                <a:ea typeface="Inter" pitchFamily="34" charset="-122"/>
-                <a:cs typeface="Inter" pitchFamily="34" charset="-120"/>
-              </a:rPr>
-              <a:t>Apps · Reloads · Audit · Quotas (per-tenant API key)</a:t>
-            </a:r>
-            <a:endParaRPr lang="en-US" sz="1000" dirty="0"/>
-          </a:p>
-        </p:txBody>
-      </p:sp>
-      <p:sp>
-        <p:nvSpPr>
-          <p:cNvPr id="12" name="Shape 10"/>
-          <p:cNvSpPr/>
-          <p:nvPr/>
-        </p:nvSpPr>
-        <p:spPr>
-          <a:xfrm>
-            <a:off x="457200" y="3657600"/>
-            <a:ext cx="3840480" cy="777240"/>
+            <a:pPr indent="0" marL="0">
+              <a:buNone/>
+            </a:pPr>
+            <a:r>
+              <a:rPr lang="en-US" sz="900" dirty="0">
+                <a:solidFill>
+                  <a:srgbClr val="A9B3B6"/>
+                </a:solidFill>
+                <a:latin typeface="Inter" pitchFamily="34" charset="0"/>
+                <a:ea typeface="Inter" pitchFamily="34" charset="-122"/>
+                <a:cs typeface="Inter" pitchFamily="34" charset="-120"/>
+              </a:rPr>
+              <a:t>headless agent · self-diagnosing · heartbeats</a:t>
+            </a:r>
+            <a:endParaRPr lang="en-US" sz="900" dirty="0"/>
+          </a:p>
+        </p:txBody>
+      </p:sp>
+      <p:sp>
+        <p:nvSpPr>
+          <p:cNvPr id="42" name="Shape 39"/>
+          <p:cNvSpPr/>
+          <p:nvPr/>
+        </p:nvSpPr>
+        <p:spPr>
+          <a:xfrm>
+            <a:off x="8686800" y="1783080"/>
+            <a:ext cx="2880360" cy="868680"/>
           </a:xfrm>
           <a:prstGeom prst="roundRect">
             <a:avLst>
-              <a:gd name="adj" fmla="val 7059"/>
+              <a:gd name="adj" fmla="val 7368"/>
             </a:avLst>
           </a:prstGeom>
           <a:solidFill>
-            <a:srgbClr val="006580"/>
+            <a:srgbClr val="FFFFFF"/>
           </a:solidFill>
-          <a:ln/>
-        </p:spPr>
-      </p:sp>
-      <p:sp>
-        <p:nvSpPr>
-          <p:cNvPr id="13" name="Text 11"/>
-          <p:cNvSpPr/>
-          <p:nvPr/>
-        </p:nvSpPr>
-        <p:spPr>
-          <a:xfrm>
-            <a:off x="566928" y="3749040"/>
-            <a:ext cx="3621024" cy="292608"/>
-          </a:xfrm>
-          <a:prstGeom prst="rect">
-            <a:avLst/>
-          </a:prstGeom>
-          <a:noFill/>
-          <a:ln/>
-        </p:spPr>
-        <p:txBody>
-          <a:bodyPr wrap="square" rtlCol="0" anchor="ctr"/>
-          <a:lstStyle/>
-          <a:p>
-            <a:pPr algn="l" indent="0" marL="0">
-              <a:buNone/>
-            </a:pPr>
-            <a:r>
-              <a:rPr lang="en-US" sz="1300" b="1" dirty="0">
-                <a:solidFill>
-                  <a:srgbClr val="FFFFFF"/>
-                </a:solidFill>
-                <a:latin typeface="Inter" pitchFamily="34" charset="0"/>
-                <a:ea typeface="Inter" pitchFamily="34" charset="-122"/>
-                <a:cs typeface="Inter" pitchFamily="34" charset="-120"/>
-              </a:rPr>
-              <a:t>Talend Remote Engine</a:t>
-            </a:r>
-            <a:endParaRPr lang="en-US" sz="1300" dirty="0"/>
-          </a:p>
-        </p:txBody>
-      </p:sp>
-      <p:sp>
-        <p:nvSpPr>
-          <p:cNvPr id="14" name="Text 12"/>
-          <p:cNvSpPr/>
-          <p:nvPr/>
-        </p:nvSpPr>
-        <p:spPr>
-          <a:xfrm>
-            <a:off x="566928" y="4069080"/>
-            <a:ext cx="3621024" cy="320040"/>
-          </a:xfrm>
-          <a:prstGeom prst="rect">
-            <a:avLst/>
-          </a:prstGeom>
-          <a:noFill/>
-          <a:ln/>
-        </p:spPr>
-        <p:txBody>
-          <a:bodyPr wrap="square" rtlCol="0" anchor="t"/>
-          <a:lstStyle/>
-          <a:p>
-            <a:pPr algn="l" indent="0" marL="0">
-              <a:buNone/>
-            </a:pPr>
-            <a:r>
-              <a:rPr lang="en-US" sz="1000" dirty="0">
-                <a:solidFill>
-                  <a:srgbClr val="FFFFFF"/>
-                </a:solidFill>
-                <a:latin typeface="Inter" pitchFamily="34" charset="0"/>
-                <a:ea typeface="Inter" pitchFamily="34" charset="-122"/>
-                <a:cs typeface="Inter" pitchFamily="34" charset="-120"/>
-              </a:rPr>
-              <a:t>JSON job-management logs tailed from /data/log on Linux</a:t>
-            </a:r>
-            <a:endParaRPr lang="en-US" sz="1000" dirty="0"/>
-          </a:p>
-        </p:txBody>
-      </p:sp>
-      <p:sp>
-        <p:nvSpPr>
-          <p:cNvPr id="15" name="Shape 13"/>
-          <p:cNvSpPr/>
-          <p:nvPr/>
-        </p:nvSpPr>
-        <p:spPr>
-          <a:xfrm>
-            <a:off x="4572000" y="1371600"/>
-            <a:ext cx="3657600" cy="310896"/>
-          </a:xfrm>
-          <a:prstGeom prst="rect">
-            <a:avLst/>
-          </a:prstGeom>
-          <a:solidFill>
-            <a:srgbClr val="006580"/>
-          </a:solidFill>
-          <a:ln/>
-        </p:spPr>
-      </p:sp>
-      <p:sp>
-        <p:nvSpPr>
-          <p:cNvPr id="16" name="Text 14"/>
-          <p:cNvSpPr/>
-          <p:nvPr/>
-        </p:nvSpPr>
-        <p:spPr>
-          <a:xfrm>
-            <a:off x="4663440" y="1389888"/>
-            <a:ext cx="3474720" cy="274320"/>
-          </a:xfrm>
-          <a:prstGeom prst="rect">
-            <a:avLst/>
-          </a:prstGeom>
-          <a:noFill/>
-          <a:ln/>
-        </p:spPr>
-        <p:txBody>
-          <a:bodyPr wrap="square" rtlCol="0" anchor="ctr"/>
-          <a:lstStyle/>
-          <a:p>
-            <a:pPr algn="l" indent="0" marL="0">
-              <a:buNone/>
-            </a:pPr>
-            <a:r>
-              <a:rPr lang="en-US" sz="1100" b="1" dirty="0">
-                <a:solidFill>
-                  <a:srgbClr val="FFFFFF"/>
-                </a:solidFill>
-                <a:latin typeface="Inter" pitchFamily="34" charset="0"/>
-                <a:ea typeface="Inter" pitchFamily="34" charset="-122"/>
-                <a:cs typeface="Inter" pitchFamily="34" charset="-120"/>
-              </a:rPr>
-              <a:t>COLLECTORS</a:t>
-            </a:r>
-            <a:endParaRPr lang="en-US" sz="1100" dirty="0"/>
-          </a:p>
-        </p:txBody>
-      </p:sp>
-      <p:sp>
-        <p:nvSpPr>
-          <p:cNvPr id="17" name="Shape 15"/>
-          <p:cNvSpPr/>
-          <p:nvPr/>
-        </p:nvSpPr>
-        <p:spPr>
-          <a:xfrm>
-            <a:off x="4572000" y="1828800"/>
-            <a:ext cx="3657600" cy="777240"/>
+          <a:ln w="15875">
+            <a:solidFill>
+              <a:srgbClr val="2D3543"/>
+            </a:solidFill>
+            <a:prstDash val="solid"/>
+          </a:ln>
+        </p:spPr>
+      </p:sp>
+      <p:sp>
+        <p:nvSpPr>
+          <p:cNvPr id="43" name="Shape 40"/>
+          <p:cNvSpPr/>
+          <p:nvPr/>
+        </p:nvSpPr>
+        <p:spPr>
+          <a:xfrm>
+            <a:off x="8686800" y="1783080"/>
+            <a:ext cx="109728" cy="868680"/>
           </a:xfrm>
           <a:prstGeom prst="roundRect">
             <a:avLst>
-              <a:gd name="adj" fmla="val 7059"/>
-            </a:avLst>
-          </a:prstGeom>
-          <a:solidFill>
-            <a:srgbClr val="19416C"/>
-          </a:solidFill>
-          <a:ln/>
-        </p:spPr>
-      </p:sp>
-      <p:sp>
-        <p:nvSpPr>
-          <p:cNvPr id="18" name="Text 16"/>
-          <p:cNvSpPr/>
-          <p:nvPr/>
-        </p:nvSpPr>
-        <p:spPr>
-          <a:xfrm>
-            <a:off x="4681728" y="1920240"/>
-            <a:ext cx="3438144" cy="292608"/>
-          </a:xfrm>
-          <a:prstGeom prst="rect">
-            <a:avLst/>
-          </a:prstGeom>
-          <a:noFill/>
-          <a:ln/>
-        </p:spPr>
-        <p:txBody>
-          <a:bodyPr wrap="square" rtlCol="0" anchor="ctr"/>
-          <a:lstStyle/>
-          <a:p>
-            <a:pPr algn="l" indent="0" marL="0">
-              <a:buNone/>
-            </a:pPr>
-            <a:r>
-              <a:rPr lang="en-US" sz="1300" b="1" dirty="0">
-                <a:solidFill>
-                  <a:srgbClr val="FFFFFF"/>
-                </a:solidFill>
-                <a:latin typeface="Inter" pitchFamily="34" charset="0"/>
-                <a:ea typeface="Inter" pitchFamily="34" charset="-122"/>
-                <a:cs typeface="Inter" pitchFamily="34" charset="-120"/>
-              </a:rPr>
-              <a:t>Talend TMC MCP server</a:t>
-            </a:r>
-            <a:endParaRPr lang="en-US" sz="1300" dirty="0"/>
-          </a:p>
-        </p:txBody>
-      </p:sp>
-      <p:sp>
-        <p:nvSpPr>
-          <p:cNvPr id="19" name="Text 17"/>
-          <p:cNvSpPr/>
-          <p:nvPr/>
-        </p:nvSpPr>
-        <p:spPr>
-          <a:xfrm>
-            <a:off x="4681728" y="2240280"/>
-            <a:ext cx="3438144" cy="320040"/>
-          </a:xfrm>
-          <a:prstGeom prst="rect">
-            <a:avLst/>
-          </a:prstGeom>
-          <a:noFill/>
-          <a:ln/>
-        </p:spPr>
-        <p:txBody>
-          <a:bodyPr wrap="square" rtlCol="0" anchor="t"/>
-          <a:lstStyle/>
-          <a:p>
-            <a:pPr algn="l" indent="0" marL="0">
-              <a:buNone/>
-            </a:pPr>
-            <a:r>
-              <a:rPr lang="en-US" sz="1000" dirty="0">
-                <a:solidFill>
-                  <a:srgbClr val="FFFFFF"/>
-                </a:solidFill>
-                <a:latin typeface="Inter" pitchFamily="34" charset="0"/>
-                <a:ea typeface="Inter" pitchFamily="34" charset="-122"/>
-                <a:cs typeface="Inter" pitchFamily="34" charset="-120"/>
-              </a:rPr>
-              <a:t>TS · stdio · observability preset (~10 tools) · /metrics</a:t>
-            </a:r>
-            <a:endParaRPr lang="en-US" sz="1000" dirty="0"/>
-          </a:p>
-        </p:txBody>
-      </p:sp>
-      <p:sp>
-        <p:nvSpPr>
-          <p:cNvPr id="20" name="Shape 18"/>
-          <p:cNvSpPr/>
-          <p:nvPr/>
-        </p:nvSpPr>
-        <p:spPr>
-          <a:xfrm>
-            <a:off x="4572000" y="2743200"/>
-            <a:ext cx="3657600" cy="777240"/>
-          </a:xfrm>
-          <a:prstGeom prst="roundRect">
-            <a:avLst>
-              <a:gd name="adj" fmla="val 7059"/>
-            </a:avLst>
-          </a:prstGeom>
-          <a:solidFill>
-            <a:srgbClr val="19416C"/>
-          </a:solidFill>
-          <a:ln/>
-        </p:spPr>
-      </p:sp>
-      <p:sp>
-        <p:nvSpPr>
-          <p:cNvPr id="21" name="Text 19"/>
-          <p:cNvSpPr/>
-          <p:nvPr/>
-        </p:nvSpPr>
-        <p:spPr>
-          <a:xfrm>
-            <a:off x="4681728" y="2834640"/>
-            <a:ext cx="3438144" cy="292608"/>
-          </a:xfrm>
-          <a:prstGeom prst="rect">
-            <a:avLst/>
-          </a:prstGeom>
-          <a:noFill/>
-          <a:ln/>
-        </p:spPr>
-        <p:txBody>
-          <a:bodyPr wrap="square" rtlCol="0" anchor="ctr"/>
-          <a:lstStyle/>
-          <a:p>
-            <a:pPr algn="l" indent="0" marL="0">
-              <a:buNone/>
-            </a:pPr>
-            <a:r>
-              <a:rPr lang="en-US" sz="1300" b="1" dirty="0">
-                <a:solidFill>
-                  <a:srgbClr val="FFFFFF"/>
-                </a:solidFill>
-                <a:latin typeface="Inter" pitchFamily="34" charset="0"/>
-                <a:ea typeface="Inter" pitchFamily="34" charset="-122"/>
-                <a:cs typeface="Inter" pitchFamily="34" charset="-120"/>
-              </a:rPr>
-              <a:t>Business exporter (Py)</a:t>
-            </a:r>
-            <a:endParaRPr lang="en-US" sz="1300" dirty="0"/>
-          </a:p>
-        </p:txBody>
-      </p:sp>
-      <p:sp>
-        <p:nvSpPr>
-          <p:cNvPr id="22" name="Text 20"/>
-          <p:cNvSpPr/>
-          <p:nvPr/>
-        </p:nvSpPr>
-        <p:spPr>
-          <a:xfrm>
-            <a:off x="4681728" y="3154680"/>
-            <a:ext cx="3438144" cy="320040"/>
-          </a:xfrm>
-          <a:prstGeom prst="rect">
-            <a:avLst/>
-          </a:prstGeom>
-          <a:noFill/>
-          <a:ln/>
-        </p:spPr>
-        <p:txBody>
-          <a:bodyPr wrap="square" rtlCol="0" anchor="t"/>
-          <a:lstStyle/>
-          <a:p>
-            <a:pPr algn="l" indent="0" marL="0">
-              <a:buNone/>
-            </a:pPr>
-            <a:r>
-              <a:rPr lang="en-US" sz="1000" dirty="0">
-                <a:solidFill>
-                  <a:srgbClr val="FFFFFF"/>
-                </a:solidFill>
-                <a:latin typeface="Inter" pitchFamily="34" charset="0"/>
-                <a:ea typeface="Inter" pitchFamily="34" charset="-122"/>
-                <a:cs typeface="Inter" pitchFamily="34" charset="-120"/>
-              </a:rPr>
-              <a:t>Polls all Talend tenants · /metrics:9465</a:t>
-            </a:r>
-            <a:endParaRPr lang="en-US" sz="1000" dirty="0"/>
-          </a:p>
-        </p:txBody>
-      </p:sp>
-      <p:sp>
-        <p:nvSpPr>
-          <p:cNvPr id="23" name="Shape 21"/>
-          <p:cNvSpPr/>
-          <p:nvPr/>
-        </p:nvSpPr>
-        <p:spPr>
-          <a:xfrm>
-            <a:off x="4572000" y="3657600"/>
-            <a:ext cx="3657600" cy="777240"/>
-          </a:xfrm>
-          <a:prstGeom prst="roundRect">
-            <a:avLst>
-              <a:gd name="adj" fmla="val 7059"/>
-            </a:avLst>
-          </a:prstGeom>
-          <a:solidFill>
-            <a:srgbClr val="19416C"/>
-          </a:solidFill>
-          <a:ln/>
-        </p:spPr>
-      </p:sp>
-      <p:sp>
-        <p:nvSpPr>
-          <p:cNvPr id="24" name="Text 22"/>
-          <p:cNvSpPr/>
-          <p:nvPr/>
-        </p:nvSpPr>
-        <p:spPr>
-          <a:xfrm>
-            <a:off x="4681728" y="3749040"/>
-            <a:ext cx="3438144" cy="292608"/>
-          </a:xfrm>
-          <a:prstGeom prst="rect">
-            <a:avLst/>
-          </a:prstGeom>
-          <a:noFill/>
-          <a:ln/>
-        </p:spPr>
-        <p:txBody>
-          <a:bodyPr wrap="square" rtlCol="0" anchor="ctr"/>
-          <a:lstStyle/>
-          <a:p>
-            <a:pPr algn="l" indent="0" marL="0">
-              <a:buNone/>
-            </a:pPr>
-            <a:r>
-              <a:rPr lang="en-US" sz="1300" b="1" dirty="0">
-                <a:solidFill>
-                  <a:srgbClr val="FFFFFF"/>
-                </a:solidFill>
-                <a:latin typeface="Inter" pitchFamily="34" charset="0"/>
-                <a:ea typeface="Inter" pitchFamily="34" charset="-122"/>
-                <a:cs typeface="Inter" pitchFamily="34" charset="-120"/>
-              </a:rPr>
-              <a:t>Engine log scraper (Py)</a:t>
-            </a:r>
-            <a:endParaRPr lang="en-US" sz="1300" dirty="0"/>
-          </a:p>
-        </p:txBody>
-      </p:sp>
-      <p:sp>
-        <p:nvSpPr>
-          <p:cNvPr id="25" name="Text 23"/>
-          <p:cNvSpPr/>
-          <p:nvPr/>
-        </p:nvSpPr>
-        <p:spPr>
-          <a:xfrm>
-            <a:off x="4681728" y="4069080"/>
-            <a:ext cx="3438144" cy="320040"/>
-          </a:xfrm>
-          <a:prstGeom prst="rect">
-            <a:avLst/>
-          </a:prstGeom>
-          <a:noFill/>
-          <a:ln/>
-        </p:spPr>
-        <p:txBody>
-          <a:bodyPr wrap="square" rtlCol="0" anchor="t"/>
-          <a:lstStyle/>
-          <a:p>
-            <a:pPr algn="l" indent="0" marL="0">
-              <a:buNone/>
-            </a:pPr>
-            <a:r>
-              <a:rPr lang="en-US" sz="1000" dirty="0">
-                <a:solidFill>
-                  <a:srgbClr val="FFFFFF"/>
-                </a:solidFill>
-                <a:latin typeface="Inter" pitchFamily="34" charset="0"/>
-                <a:ea typeface="Inter" pitchFamily="34" charset="-122"/>
-                <a:cs typeface="Inter" pitchFamily="34" charset="-120"/>
-              </a:rPr>
-              <a:t>Tails Remote Engine JSON logs · /metrics:9466</a:t>
-            </a:r>
-            <a:endParaRPr lang="en-US" sz="1000" dirty="0"/>
-          </a:p>
-        </p:txBody>
-      </p:sp>
-      <p:sp>
-        <p:nvSpPr>
-          <p:cNvPr id="26" name="Shape 24"/>
-          <p:cNvSpPr/>
-          <p:nvPr/>
-        </p:nvSpPr>
-        <p:spPr>
-          <a:xfrm>
-            <a:off x="4572000" y="4572000"/>
-            <a:ext cx="3657600" cy="777240"/>
-          </a:xfrm>
-          <a:prstGeom prst="roundRect">
-            <a:avLst>
-              <a:gd name="adj" fmla="val 7059"/>
-            </a:avLst>
-          </a:prstGeom>
-          <a:solidFill>
-            <a:srgbClr val="19416C"/>
-          </a:solidFill>
-          <a:ln/>
-        </p:spPr>
-      </p:sp>
-      <p:sp>
-        <p:nvSpPr>
-          <p:cNvPr id="27" name="Text 25"/>
-          <p:cNvSpPr/>
-          <p:nvPr/>
-        </p:nvSpPr>
-        <p:spPr>
-          <a:xfrm>
-            <a:off x="4681728" y="4663440"/>
-            <a:ext cx="3438144" cy="292608"/>
-          </a:xfrm>
-          <a:prstGeom prst="rect">
-            <a:avLst/>
-          </a:prstGeom>
-          <a:noFill/>
-          <a:ln/>
-        </p:spPr>
-        <p:txBody>
-          <a:bodyPr wrap="square" rtlCol="0" anchor="ctr"/>
-          <a:lstStyle/>
-          <a:p>
-            <a:pPr algn="l" indent="0" marL="0">
-              <a:buNone/>
-            </a:pPr>
-            <a:r>
-              <a:rPr lang="en-US" sz="1300" b="1" dirty="0">
-                <a:solidFill>
-                  <a:srgbClr val="FFFFFF"/>
-                </a:solidFill>
-                <a:latin typeface="Inter" pitchFamily="34" charset="0"/>
-                <a:ea typeface="Inter" pitchFamily="34" charset="-122"/>
-                <a:cs typeface="Inter" pitchFamily="34" charset="-120"/>
-              </a:rPr>
-              <a:t>Qlik observability exporter (Py)</a:t>
-            </a:r>
-            <a:endParaRPr lang="en-US" sz="1300" dirty="0"/>
-          </a:p>
-        </p:txBody>
-      </p:sp>
-      <p:sp>
-        <p:nvSpPr>
-          <p:cNvPr id="28" name="Text 26"/>
-          <p:cNvSpPr/>
-          <p:nvPr/>
-        </p:nvSpPr>
-        <p:spPr>
-          <a:xfrm>
-            <a:off x="4681728" y="4983480"/>
-            <a:ext cx="3438144" cy="320040"/>
-          </a:xfrm>
-          <a:prstGeom prst="rect">
-            <a:avLst/>
-          </a:prstGeom>
-          <a:noFill/>
-          <a:ln/>
-        </p:spPr>
-        <p:txBody>
-          <a:bodyPr wrap="square" rtlCol="0" anchor="t"/>
-          <a:lstStyle/>
-          <a:p>
-            <a:pPr algn="l" indent="0" marL="0">
-              <a:buNone/>
-            </a:pPr>
-            <a:r>
-              <a:rPr lang="en-US" sz="1000" dirty="0">
-                <a:solidFill>
-                  <a:srgbClr val="FFFFFF"/>
-                </a:solidFill>
-                <a:latin typeface="Inter" pitchFamily="34" charset="0"/>
-                <a:ea typeface="Inter" pitchFamily="34" charset="-122"/>
-                <a:cs typeface="Inter" pitchFamily="34" charset="-120"/>
-              </a:rPr>
-              <a:t>Polls all Qlik tenants · /metrics:9468</a:t>
-            </a:r>
-            <a:endParaRPr lang="en-US" sz="1000" dirty="0"/>
-          </a:p>
-        </p:txBody>
-      </p:sp>
-      <p:sp>
-        <p:nvSpPr>
-          <p:cNvPr id="29" name="Shape 27"/>
-          <p:cNvSpPr/>
-          <p:nvPr/>
-        </p:nvSpPr>
-        <p:spPr>
-          <a:xfrm>
-            <a:off x="8686800" y="1371600"/>
-            <a:ext cx="3108960" cy="310896"/>
-          </a:xfrm>
-          <a:prstGeom prst="rect">
-            <a:avLst/>
-          </a:prstGeom>
-          <a:solidFill>
-            <a:srgbClr val="006580"/>
-          </a:solidFill>
-          <a:ln/>
-        </p:spPr>
-      </p:sp>
-      <p:sp>
-        <p:nvSpPr>
-          <p:cNvPr id="30" name="Text 28"/>
-          <p:cNvSpPr/>
-          <p:nvPr/>
-        </p:nvSpPr>
-        <p:spPr>
-          <a:xfrm>
-            <a:off x="8778240" y="1389888"/>
-            <a:ext cx="2926080" cy="274320"/>
-          </a:xfrm>
-          <a:prstGeom prst="rect">
-            <a:avLst/>
-          </a:prstGeom>
-          <a:noFill/>
-          <a:ln/>
-        </p:spPr>
-        <p:txBody>
-          <a:bodyPr wrap="square" rtlCol="0" anchor="ctr"/>
-          <a:lstStyle/>
-          <a:p>
-            <a:pPr algn="l" indent="0" marL="0">
-              <a:buNone/>
-            </a:pPr>
-            <a:r>
-              <a:rPr lang="en-US" sz="1100" b="1" dirty="0">
-                <a:solidFill>
-                  <a:srgbClr val="FFFFFF"/>
-                </a:solidFill>
-                <a:latin typeface="Inter" pitchFamily="34" charset="0"/>
-                <a:ea typeface="Inter" pitchFamily="34" charset="-122"/>
-                <a:cs typeface="Inter" pitchFamily="34" charset="-120"/>
-              </a:rPr>
-              <a:t>STORAGE + VIZ</a:t>
-            </a:r>
-            <a:endParaRPr lang="en-US" sz="1100" dirty="0"/>
-          </a:p>
-        </p:txBody>
-      </p:sp>
-      <p:sp>
-        <p:nvSpPr>
-          <p:cNvPr id="31" name="Shape 29"/>
-          <p:cNvSpPr/>
-          <p:nvPr/>
-        </p:nvSpPr>
-        <p:spPr>
-          <a:xfrm>
-            <a:off x="8686800" y="1828800"/>
-            <a:ext cx="3108960" cy="777240"/>
-          </a:xfrm>
-          <a:prstGeom prst="roundRect">
-            <a:avLst>
-              <a:gd name="adj" fmla="val 7059"/>
+              <a:gd name="adj" fmla="val 58333"/>
             </a:avLst>
           </a:prstGeom>
           <a:solidFill>
@@ -2859,97 +3144,17 @@
       </p:sp>
       <p:sp>
         <p:nvSpPr>
-          <p:cNvPr id="32" name="Text 30"/>
-          <p:cNvSpPr/>
-          <p:nvPr/>
-        </p:nvSpPr>
-        <p:spPr>
-          <a:xfrm>
-            <a:off x="8796528" y="1920240"/>
-            <a:ext cx="2889504" cy="292608"/>
-          </a:xfrm>
-          <a:prstGeom prst="rect">
-            <a:avLst/>
-          </a:prstGeom>
-          <a:noFill/>
-          <a:ln/>
-        </p:spPr>
-        <p:txBody>
-          <a:bodyPr wrap="square" rtlCol="0" anchor="ctr"/>
-          <a:lstStyle/>
-          <a:p>
-            <a:pPr algn="l" indent="0" marL="0">
-              <a:buNone/>
-            </a:pPr>
-            <a:r>
-              <a:rPr lang="en-US" sz="1300" b="1" dirty="0">
-                <a:solidFill>
-                  <a:srgbClr val="FFFFFF"/>
-                </a:solidFill>
-                <a:latin typeface="Inter" pitchFamily="34" charset="0"/>
-                <a:ea typeface="Inter" pitchFamily="34" charset="-122"/>
-                <a:cs typeface="Inter" pitchFamily="34" charset="-120"/>
-              </a:rPr>
-              <a:t>Prometheus</a:t>
-            </a:r>
-            <a:endParaRPr lang="en-US" sz="1300" dirty="0"/>
-          </a:p>
-        </p:txBody>
-      </p:sp>
-      <p:sp>
-        <p:nvSpPr>
-          <p:cNvPr id="33" name="Text 31"/>
-          <p:cNvSpPr/>
-          <p:nvPr/>
-        </p:nvSpPr>
-        <p:spPr>
-          <a:xfrm>
-            <a:off x="8796528" y="2240280"/>
-            <a:ext cx="2889504" cy="320040"/>
-          </a:xfrm>
-          <a:prstGeom prst="rect">
-            <a:avLst/>
-          </a:prstGeom>
-          <a:noFill/>
-          <a:ln/>
-        </p:spPr>
-        <p:txBody>
-          <a:bodyPr wrap="square" rtlCol="0" anchor="t"/>
-          <a:lstStyle/>
-          <a:p>
-            <a:pPr algn="l" indent="0" marL="0">
-              <a:buNone/>
-            </a:pPr>
-            <a:r>
-              <a:rPr lang="en-US" sz="1000" dirty="0">
-                <a:solidFill>
-                  <a:srgbClr val="FFFFFF"/>
-                </a:solidFill>
-                <a:latin typeface="Inter" pitchFamily="34" charset="0"/>
-                <a:ea typeface="Inter" pitchFamily="34" charset="-122"/>
-                <a:cs typeface="Inter" pitchFamily="34" charset="-120"/>
-              </a:rPr>
-              <a:t>Scrapes all /metrics every 10s · 14d retention</a:t>
-            </a:r>
-            <a:endParaRPr lang="en-US" sz="1000" dirty="0"/>
-          </a:p>
-        </p:txBody>
-      </p:sp>
-      <p:sp>
-        <p:nvSpPr>
-          <p:cNvPr id="34" name="Shape 32"/>
-          <p:cNvSpPr/>
-          <p:nvPr/>
-        </p:nvSpPr>
-        <p:spPr>
-          <a:xfrm>
-            <a:off x="8686800" y="2743200"/>
-            <a:ext cx="3108960" cy="777240"/>
-          </a:xfrm>
-          <a:prstGeom prst="roundRect">
-            <a:avLst>
-              <a:gd name="adj" fmla="val 7059"/>
-            </a:avLst>
+          <p:cNvPr id="44" name="Shape 41"/>
+          <p:cNvSpPr/>
+          <p:nvPr/>
+        </p:nvSpPr>
+        <p:spPr>
+          <a:xfrm>
+            <a:off x="8924544" y="1988820"/>
+            <a:ext cx="384048" cy="457200"/>
+          </a:xfrm>
+          <a:prstGeom prst="cylinder">
+            <a:avLst/>
           </a:prstGeom>
           <a:solidFill>
             <a:srgbClr val="2D3543"/>
@@ -2959,53 +3164,53 @@
       </p:sp>
       <p:sp>
         <p:nvSpPr>
-          <p:cNvPr id="35" name="Text 33"/>
-          <p:cNvSpPr/>
-          <p:nvPr/>
-        </p:nvSpPr>
-        <p:spPr>
-          <a:xfrm>
-            <a:off x="8796528" y="2834640"/>
-            <a:ext cx="2889504" cy="292608"/>
-          </a:xfrm>
-          <a:prstGeom prst="rect">
-            <a:avLst/>
-          </a:prstGeom>
-          <a:noFill/>
-          <a:ln/>
-        </p:spPr>
-        <p:txBody>
-          <a:bodyPr wrap="square" rtlCol="0" anchor="ctr"/>
-          <a:lstStyle/>
-          <a:p>
-            <a:pPr algn="l" indent="0" marL="0">
-              <a:buNone/>
-            </a:pPr>
-            <a:r>
-              <a:rPr lang="en-US" sz="1300" b="1" dirty="0">
-                <a:solidFill>
-                  <a:srgbClr val="FFFFFF"/>
-                </a:solidFill>
-                <a:latin typeface="Inter" pitchFamily="34" charset="0"/>
-                <a:ea typeface="Inter" pitchFamily="34" charset="-122"/>
-                <a:cs typeface="Inter" pitchFamily="34" charset="-120"/>
-              </a:rPr>
-              <a:t>Loki + Promtail</a:t>
-            </a:r>
-            <a:endParaRPr lang="en-US" sz="1300" dirty="0"/>
-          </a:p>
-        </p:txBody>
-      </p:sp>
-      <p:sp>
-        <p:nvSpPr>
-          <p:cNvPr id="36" name="Text 34"/>
-          <p:cNvSpPr/>
-          <p:nvPr/>
-        </p:nvSpPr>
-        <p:spPr>
-          <a:xfrm>
-            <a:off x="8796528" y="3154680"/>
-            <a:ext cx="2889504" cy="320040"/>
+          <p:cNvPr id="45" name="Text 42"/>
+          <p:cNvSpPr/>
+          <p:nvPr/>
+        </p:nvSpPr>
+        <p:spPr>
+          <a:xfrm>
+            <a:off x="9528048" y="1874520"/>
+            <a:ext cx="1965960" cy="310896"/>
+          </a:xfrm>
+          <a:prstGeom prst="rect">
+            <a:avLst/>
+          </a:prstGeom>
+          <a:noFill/>
+          <a:ln/>
+        </p:spPr>
+        <p:txBody>
+          <a:bodyPr wrap="square" rtlCol="0" anchor="ctr"/>
+          <a:lstStyle/>
+          <a:p>
+            <a:pPr indent="0" marL="0">
+              <a:buNone/>
+            </a:pPr>
+            <a:r>
+              <a:rPr lang="en-US" sz="1200" b="1" dirty="0">
+                <a:solidFill>
+                  <a:srgbClr val="2D3543"/>
+                </a:solidFill>
+                <a:latin typeface="Inter" pitchFamily="34" charset="0"/>
+                <a:ea typeface="Inter" pitchFamily="34" charset="-122"/>
+                <a:cs typeface="Inter" pitchFamily="34" charset="-120"/>
+              </a:rPr>
+              <a:t>Prometheus</a:t>
+            </a:r>
+            <a:endParaRPr lang="en-US" sz="1200" dirty="0"/>
+          </a:p>
+        </p:txBody>
+      </p:sp>
+      <p:sp>
+        <p:nvSpPr>
+          <p:cNvPr id="46" name="Text 43"/>
+          <p:cNvSpPr/>
+          <p:nvPr/>
+        </p:nvSpPr>
+        <p:spPr>
+          <a:xfrm>
+            <a:off x="9528048" y="2167128"/>
+            <a:ext cx="1965960" cy="411480"/>
           </a:xfrm>
           <a:prstGeom prst="rect">
             <a:avLst/>
@@ -3017,38 +3222,65 @@
           <a:bodyPr wrap="square" rtlCol="0" anchor="t"/>
           <a:lstStyle/>
           <a:p>
-            <a:pPr algn="l" indent="0" marL="0">
-              <a:buNone/>
-            </a:pPr>
-            <a:r>
-              <a:rPr lang="en-US" sz="1000" dirty="0">
-                <a:solidFill>
-                  <a:srgbClr val="FFFFFF"/>
-                </a:solidFill>
-                <a:latin typeface="Inter" pitchFamily="34" charset="0"/>
-                <a:ea typeface="Inter" pitchFamily="34" charset="-122"/>
-                <a:cs typeface="Inter" pitchFamily="34" charset="-120"/>
-              </a:rPr>
-              <a:t>JSON logs from every container · 7d retention</a:t>
-            </a:r>
-            <a:endParaRPr lang="en-US" sz="1000" dirty="0"/>
-          </a:p>
-        </p:txBody>
-      </p:sp>
-      <p:sp>
-        <p:nvSpPr>
-          <p:cNvPr id="37" name="Shape 35"/>
-          <p:cNvSpPr/>
-          <p:nvPr/>
-        </p:nvSpPr>
-        <p:spPr>
-          <a:xfrm>
-            <a:off x="8686800" y="3657600"/>
-            <a:ext cx="3108960" cy="777240"/>
+            <a:pPr indent="0" marL="0">
+              <a:buNone/>
+            </a:pPr>
+            <a:r>
+              <a:rPr lang="en-US" sz="900" dirty="0">
+                <a:solidFill>
+                  <a:srgbClr val="A9B3B6"/>
+                </a:solidFill>
+                <a:latin typeface="Inter" pitchFamily="34" charset="0"/>
+                <a:ea typeface="Inter" pitchFamily="34" charset="-122"/>
+                <a:cs typeface="Inter" pitchFamily="34" charset="-120"/>
+              </a:rPr>
+              <a:t>scrape all /metrics · 14d</a:t>
+            </a:r>
+            <a:endParaRPr lang="en-US" sz="900" dirty="0"/>
+          </a:p>
+        </p:txBody>
+      </p:sp>
+      <p:sp>
+        <p:nvSpPr>
+          <p:cNvPr id="47" name="Shape 44"/>
+          <p:cNvSpPr/>
+          <p:nvPr/>
+        </p:nvSpPr>
+        <p:spPr>
+          <a:xfrm>
+            <a:off x="8686800" y="2907792"/>
+            <a:ext cx="2880360" cy="868680"/>
           </a:xfrm>
           <a:prstGeom prst="roundRect">
             <a:avLst>
-              <a:gd name="adj" fmla="val 7059"/>
+              <a:gd name="adj" fmla="val 7368"/>
+            </a:avLst>
+          </a:prstGeom>
+          <a:solidFill>
+            <a:srgbClr val="FFFFFF"/>
+          </a:solidFill>
+          <a:ln w="15875">
+            <a:solidFill>
+              <a:srgbClr val="10CFC9"/>
+            </a:solidFill>
+            <a:prstDash val="solid"/>
+          </a:ln>
+        </p:spPr>
+      </p:sp>
+      <p:sp>
+        <p:nvSpPr>
+          <p:cNvPr id="48" name="Shape 45"/>
+          <p:cNvSpPr/>
+          <p:nvPr/>
+        </p:nvSpPr>
+        <p:spPr>
+          <a:xfrm>
+            <a:off x="8686800" y="2907792"/>
+            <a:ext cx="109728" cy="868680"/>
+          </a:xfrm>
+          <a:prstGeom prst="roundRect">
+            <a:avLst>
+              <a:gd name="adj" fmla="val 58333"/>
             </a:avLst>
           </a:prstGeom>
           <a:solidFill>
@@ -3059,30 +3291,90 @@
       </p:sp>
       <p:sp>
         <p:nvSpPr>
-          <p:cNvPr id="38" name="Text 36"/>
-          <p:cNvSpPr/>
-          <p:nvPr/>
-        </p:nvSpPr>
-        <p:spPr>
-          <a:xfrm>
-            <a:off x="8796528" y="3749040"/>
-            <a:ext cx="2889504" cy="292608"/>
-          </a:xfrm>
-          <a:prstGeom prst="rect">
-            <a:avLst/>
-          </a:prstGeom>
-          <a:noFill/>
-          <a:ln/>
-        </p:spPr>
-        <p:txBody>
-          <a:bodyPr wrap="square" rtlCol="0" anchor="ctr"/>
-          <a:lstStyle/>
-          <a:p>
-            <a:pPr algn="l" indent="0" marL="0">
-              <a:buNone/>
-            </a:pPr>
-            <a:r>
-              <a:rPr lang="en-US" sz="1300" b="1" dirty="0">
+          <p:cNvPr id="49" name="Shape 46"/>
+          <p:cNvSpPr/>
+          <p:nvPr/>
+        </p:nvSpPr>
+        <p:spPr>
+          <a:xfrm>
+            <a:off x="8924544" y="3369564"/>
+            <a:ext cx="91440" cy="201168"/>
+          </a:xfrm>
+          <a:prstGeom prst="rect">
+            <a:avLst/>
+          </a:prstGeom>
+          <a:solidFill>
+            <a:srgbClr val="10CFC9"/>
+          </a:solidFill>
+          <a:ln/>
+        </p:spPr>
+      </p:sp>
+      <p:sp>
+        <p:nvSpPr>
+          <p:cNvPr id="50" name="Shape 47"/>
+          <p:cNvSpPr/>
+          <p:nvPr/>
+        </p:nvSpPr>
+        <p:spPr>
+          <a:xfrm>
+            <a:off x="9061704" y="3259836"/>
+            <a:ext cx="91440" cy="310896"/>
+          </a:xfrm>
+          <a:prstGeom prst="rect">
+            <a:avLst/>
+          </a:prstGeom>
+          <a:solidFill>
+            <a:srgbClr val="10CFC9"/>
+          </a:solidFill>
+          <a:ln/>
+        </p:spPr>
+      </p:sp>
+      <p:sp>
+        <p:nvSpPr>
+          <p:cNvPr id="51" name="Shape 48"/>
+          <p:cNvSpPr/>
+          <p:nvPr/>
+        </p:nvSpPr>
+        <p:spPr>
+          <a:xfrm>
+            <a:off x="9198864" y="3150108"/>
+            <a:ext cx="91440" cy="420624"/>
+          </a:xfrm>
+          <a:prstGeom prst="rect">
+            <a:avLst/>
+          </a:prstGeom>
+          <a:solidFill>
+            <a:srgbClr val="10CFC9"/>
+          </a:solidFill>
+          <a:ln/>
+        </p:spPr>
+      </p:sp>
+      <p:sp>
+        <p:nvSpPr>
+          <p:cNvPr id="52" name="Text 49"/>
+          <p:cNvSpPr/>
+          <p:nvPr/>
+        </p:nvSpPr>
+        <p:spPr>
+          <a:xfrm>
+            <a:off x="9528048" y="2999232"/>
+            <a:ext cx="1965960" cy="310896"/>
+          </a:xfrm>
+          <a:prstGeom prst="rect">
+            <a:avLst/>
+          </a:prstGeom>
+          <a:noFill/>
+          <a:ln/>
+        </p:spPr>
+        <p:txBody>
+          <a:bodyPr wrap="square" rtlCol="0" anchor="ctr"/>
+          <a:lstStyle/>
+          <a:p>
+            <a:pPr indent="0" marL="0">
+              <a:buNone/>
+            </a:pPr>
+            <a:r>
+              <a:rPr lang="en-US" sz="1200" b="1" dirty="0">
                 <a:solidFill>
                   <a:srgbClr val="2D3543"/>
                 </a:solidFill>
@@ -3090,22 +3382,22 @@
                 <a:ea typeface="Inter" pitchFamily="34" charset="-122"/>
                 <a:cs typeface="Inter" pitchFamily="34" charset="-120"/>
               </a:rPr>
-              <a:t>Grafana</a:t>
-            </a:r>
-            <a:endParaRPr lang="en-US" sz="1300" dirty="0"/>
-          </a:p>
-        </p:txBody>
-      </p:sp>
-      <p:sp>
-        <p:nvSpPr>
-          <p:cNvPr id="39" name="Text 37"/>
-          <p:cNvSpPr/>
-          <p:nvPr/>
-        </p:nvSpPr>
-        <p:spPr>
-          <a:xfrm>
-            <a:off x="8796528" y="4069080"/>
-            <a:ext cx="2889504" cy="320040"/>
+              <a:t>Loki + Grafana</a:t>
+            </a:r>
+            <a:endParaRPr lang="en-US" sz="1200" dirty="0"/>
+          </a:p>
+        </p:txBody>
+      </p:sp>
+      <p:sp>
+        <p:nvSpPr>
+          <p:cNvPr id="53" name="Text 50"/>
+          <p:cNvSpPr/>
+          <p:nvPr/>
+        </p:nvSpPr>
+        <p:spPr>
+          <a:xfrm>
+            <a:off x="9528048" y="3291840"/>
+            <a:ext cx="1965960" cy="411480"/>
           </a:xfrm>
           <a:prstGeom prst="rect">
             <a:avLst/>
@@ -3117,38 +3409,65 @@
           <a:bodyPr wrap="square" rtlCol="0" anchor="t"/>
           <a:lstStyle/>
           <a:p>
-            <a:pPr algn="l" indent="0" marL="0">
-              <a:buNone/>
-            </a:pPr>
-            <a:r>
-              <a:rPr lang="en-US" sz="1000" dirty="0">
-                <a:solidFill>
-                  <a:srgbClr val="2D3543"/>
-                </a:solidFill>
-                <a:latin typeface="Inter" pitchFamily="34" charset="0"/>
-                <a:ea typeface="Inter" pitchFamily="34" charset="-122"/>
-                <a:cs typeface="Inter" pitchFamily="34" charset="-120"/>
-              </a:rPr>
-              <a:t>Pre-provisioned dashboards &amp; datasources</a:t>
-            </a:r>
-            <a:endParaRPr lang="en-US" sz="1000" dirty="0"/>
-          </a:p>
-        </p:txBody>
-      </p:sp>
-      <p:sp>
-        <p:nvSpPr>
-          <p:cNvPr id="40" name="Shape 38"/>
-          <p:cNvSpPr/>
-          <p:nvPr/>
-        </p:nvSpPr>
-        <p:spPr>
-          <a:xfrm>
-            <a:off x="8686800" y="4572000"/>
-            <a:ext cx="3108960" cy="777240"/>
+            <a:pPr indent="0" marL="0">
+              <a:buNone/>
+            </a:pPr>
+            <a:r>
+              <a:rPr lang="en-US" sz="900" dirty="0">
+                <a:solidFill>
+                  <a:srgbClr val="A9B3B6"/>
+                </a:solidFill>
+                <a:latin typeface="Inter" pitchFamily="34" charset="0"/>
+                <a:ea typeface="Inter" pitchFamily="34" charset="-122"/>
+                <a:cs typeface="Inter" pitchFamily="34" charset="-120"/>
+              </a:rPr>
+              <a:t>logs + 2 dashboards</a:t>
+            </a:r>
+            <a:endParaRPr lang="en-US" sz="900" dirty="0"/>
+          </a:p>
+        </p:txBody>
+      </p:sp>
+      <p:sp>
+        <p:nvSpPr>
+          <p:cNvPr id="54" name="Shape 51"/>
+          <p:cNvSpPr/>
+          <p:nvPr/>
+        </p:nvSpPr>
+        <p:spPr>
+          <a:xfrm>
+            <a:off x="8686800" y="4032504"/>
+            <a:ext cx="2880360" cy="868680"/>
           </a:xfrm>
           <a:prstGeom prst="roundRect">
             <a:avLst>
-              <a:gd name="adj" fmla="val 7059"/>
+              <a:gd name="adj" fmla="val 7368"/>
+            </a:avLst>
+          </a:prstGeom>
+          <a:solidFill>
+            <a:srgbClr val="FFFFFF"/>
+          </a:solidFill>
+          <a:ln w="15875">
+            <a:solidFill>
+              <a:srgbClr val="009845"/>
+            </a:solidFill>
+            <a:prstDash val="solid"/>
+          </a:ln>
+        </p:spPr>
+      </p:sp>
+      <p:sp>
+        <p:nvSpPr>
+          <p:cNvPr id="55" name="Shape 52"/>
+          <p:cNvSpPr/>
+          <p:nvPr/>
+        </p:nvSpPr>
+        <p:spPr>
+          <a:xfrm>
+            <a:off x="8686800" y="4032504"/>
+            <a:ext cx="109728" cy="868680"/>
+          </a:xfrm>
+          <a:prstGeom prst="roundRect">
+            <a:avLst>
+              <a:gd name="adj" fmla="val 58333"/>
             </a:avLst>
           </a:prstGeom>
           <a:solidFill>
@@ -3159,32 +3478,92 @@
       </p:sp>
       <p:sp>
         <p:nvSpPr>
-          <p:cNvPr id="41" name="Text 39"/>
-          <p:cNvSpPr/>
-          <p:nvPr/>
-        </p:nvSpPr>
-        <p:spPr>
-          <a:xfrm>
-            <a:off x="8796528" y="4663440"/>
-            <a:ext cx="2889504" cy="292608"/>
-          </a:xfrm>
-          <a:prstGeom prst="rect">
-            <a:avLst/>
-          </a:prstGeom>
-          <a:noFill/>
-          <a:ln/>
-        </p:spPr>
-        <p:txBody>
-          <a:bodyPr wrap="square" rtlCol="0" anchor="ctr"/>
-          <a:lstStyle/>
-          <a:p>
-            <a:pPr algn="l" indent="0" marL="0">
-              <a:buNone/>
-            </a:pPr>
-            <a:r>
-              <a:rPr lang="en-US" sz="1300" b="1" dirty="0">
-                <a:solidFill>
-                  <a:srgbClr val="FFFFFF"/>
+          <p:cNvPr id="56" name="Shape 53"/>
+          <p:cNvSpPr/>
+          <p:nvPr/>
+        </p:nvSpPr>
+        <p:spPr>
+          <a:xfrm>
+            <a:off x="8924544" y="4494276"/>
+            <a:ext cx="91440" cy="201168"/>
+          </a:xfrm>
+          <a:prstGeom prst="rect">
+            <a:avLst/>
+          </a:prstGeom>
+          <a:solidFill>
+            <a:srgbClr val="009845"/>
+          </a:solidFill>
+          <a:ln/>
+        </p:spPr>
+      </p:sp>
+      <p:sp>
+        <p:nvSpPr>
+          <p:cNvPr id="57" name="Shape 54"/>
+          <p:cNvSpPr/>
+          <p:nvPr/>
+        </p:nvSpPr>
+        <p:spPr>
+          <a:xfrm>
+            <a:off x="9061704" y="4384548"/>
+            <a:ext cx="91440" cy="310896"/>
+          </a:xfrm>
+          <a:prstGeom prst="rect">
+            <a:avLst/>
+          </a:prstGeom>
+          <a:solidFill>
+            <a:srgbClr val="009845"/>
+          </a:solidFill>
+          <a:ln/>
+        </p:spPr>
+      </p:sp>
+      <p:sp>
+        <p:nvSpPr>
+          <p:cNvPr id="58" name="Shape 55"/>
+          <p:cNvSpPr/>
+          <p:nvPr/>
+        </p:nvSpPr>
+        <p:spPr>
+          <a:xfrm>
+            <a:off x="9198864" y="4274820"/>
+            <a:ext cx="91440" cy="420624"/>
+          </a:xfrm>
+          <a:prstGeom prst="rect">
+            <a:avLst/>
+          </a:prstGeom>
+          <a:solidFill>
+            <a:srgbClr val="009845"/>
+          </a:solidFill>
+          <a:ln/>
+        </p:spPr>
+      </p:sp>
+      <p:sp>
+        <p:nvSpPr>
+          <p:cNvPr id="59" name="Text 56"/>
+          <p:cNvSpPr/>
+          <p:nvPr/>
+        </p:nvSpPr>
+        <p:spPr>
+          <a:xfrm>
+            <a:off x="9528048" y="4123944"/>
+            <a:ext cx="1965960" cy="310896"/>
+          </a:xfrm>
+          <a:prstGeom prst="rect">
+            <a:avLst/>
+          </a:prstGeom>
+          <a:noFill/>
+          <a:ln/>
+        </p:spPr>
+        <p:txBody>
+          <a:bodyPr wrap="square" rtlCol="0" anchor="ctr"/>
+          <a:lstStyle/>
+          <a:p>
+            <a:pPr indent="0" marL="0">
+              <a:buNone/>
+            </a:pPr>
+            <a:r>
+              <a:rPr lang="en-US" sz="1200" b="1" dirty="0">
+                <a:solidFill>
+                  <a:srgbClr val="2D3543"/>
                 </a:solidFill>
                 <a:latin typeface="Inter" pitchFamily="34" charset="0"/>
                 <a:ea typeface="Inter" pitchFamily="34" charset="-122"/>
@@ -3192,20 +3571,20 @@
               </a:rPr>
               <a:t>Qlik Sense Cloud app</a:t>
             </a:r>
-            <a:endParaRPr lang="en-US" sz="1300" dirty="0"/>
-          </a:p>
-        </p:txBody>
-      </p:sp>
-      <p:sp>
-        <p:nvSpPr>
-          <p:cNvPr id="42" name="Text 40"/>
-          <p:cNvSpPr/>
-          <p:nvPr/>
-        </p:nvSpPr>
-        <p:spPr>
-          <a:xfrm>
-            <a:off x="8796528" y="4983480"/>
-            <a:ext cx="2889504" cy="320040"/>
+            <a:endParaRPr lang="en-US" sz="1200" dirty="0"/>
+          </a:p>
+        </p:txBody>
+      </p:sp>
+      <p:sp>
+        <p:nvSpPr>
+          <p:cNvPr id="60" name="Text 57"/>
+          <p:cNvSpPr/>
+          <p:nvPr/>
+        </p:nvSpPr>
+        <p:spPr>
+          <a:xfrm>
+            <a:off x="9528048" y="4416552"/>
+            <a:ext cx="1965960" cy="411480"/>
           </a:xfrm>
           <a:prstGeom prst="rect">
             <a:avLst/>
@@ -3217,40 +3596,40 @@
           <a:bodyPr wrap="square" rtlCol="0" anchor="t"/>
           <a:lstStyle/>
           <a:p>
-            <a:pPr algn="l" indent="0" marL="0">
-              <a:buNone/>
-            </a:pPr>
-            <a:r>
-              <a:rPr lang="en-US" sz="1000" dirty="0">
-                <a:solidFill>
-                  <a:srgbClr val="FFFFFF"/>
-                </a:solidFill>
-                <a:latin typeface="Inter" pitchFamily="34" charset="0"/>
-                <a:ea typeface="Inter" pitchFamily="34" charset="-122"/>
-                <a:cs typeface="Inter" pitchFamily="34" charset="-120"/>
-              </a:rPr>
-              <a:t>Long-form QVD trend/correlation/BI</a:t>
-            </a:r>
-            <a:endParaRPr lang="en-US" sz="1000" dirty="0"/>
-          </a:p>
-        </p:txBody>
-      </p:sp>
-      <p:sp>
-        <p:nvSpPr>
-          <p:cNvPr id="43" name="Shape 41"/>
-          <p:cNvSpPr/>
-          <p:nvPr/>
-        </p:nvSpPr>
-        <p:spPr>
-          <a:xfrm>
-            <a:off x="4297680" y="2212848"/>
-            <a:ext cx="274320" cy="0"/>
+            <a:pPr indent="0" marL="0">
+              <a:buNone/>
+            </a:pPr>
+            <a:r>
+              <a:rPr lang="en-US" sz="900" dirty="0">
+                <a:solidFill>
+                  <a:srgbClr val="A9B3B6"/>
+                </a:solidFill>
+                <a:latin typeface="Inter" pitchFamily="34" charset="0"/>
+                <a:ea typeface="Inter" pitchFamily="34" charset="-122"/>
+                <a:cs typeface="Inter" pitchFamily="34" charset="-120"/>
+              </a:rPr>
+              <a:t>QVD-driven trend / BI</a:t>
+            </a:r>
+            <a:endParaRPr lang="en-US" sz="900" dirty="0"/>
+          </a:p>
+        </p:txBody>
+      </p:sp>
+      <p:sp>
+        <p:nvSpPr>
+          <p:cNvPr id="61" name="Shape 58"/>
+          <p:cNvSpPr/>
+          <p:nvPr/>
+        </p:nvSpPr>
+        <p:spPr>
+          <a:xfrm>
+            <a:off x="3703320" y="2217420"/>
+            <a:ext cx="548640" cy="0"/>
           </a:xfrm>
           <a:prstGeom prst="line">
             <a:avLst/>
           </a:prstGeom>
           <a:noFill/>
-          <a:ln w="19050">
+          <a:ln w="22225">
             <a:solidFill>
               <a:srgbClr val="93579C"/>
             </a:solidFill>
@@ -3261,44 +3640,20 @@
       </p:sp>
       <p:sp>
         <p:nvSpPr>
-          <p:cNvPr id="44" name="Shape 42"/>
-          <p:cNvSpPr/>
-          <p:nvPr/>
-        </p:nvSpPr>
-        <p:spPr>
-          <a:xfrm>
-            <a:off x="4297680" y="2212848"/>
-            <a:ext cx="274320" cy="914400"/>
+          <p:cNvPr id="62" name="Shape 59"/>
+          <p:cNvSpPr/>
+          <p:nvPr/>
+        </p:nvSpPr>
+        <p:spPr>
+          <a:xfrm>
+            <a:off x="3703320" y="3342132"/>
+            <a:ext cx="548640" cy="1124712"/>
           </a:xfrm>
           <a:prstGeom prst="line">
             <a:avLst/>
           </a:prstGeom>
           <a:noFill/>
-          <a:ln w="19050">
-            <a:solidFill>
-              <a:srgbClr val="93579C"/>
-            </a:solidFill>
-            <a:prstDash val="solid"/>
-            <a:tailEnd type="triangle"/>
-          </a:ln>
-        </p:spPr>
-      </p:sp>
-      <p:sp>
-        <p:nvSpPr>
-          <p:cNvPr id="45" name="Shape 43"/>
-          <p:cNvSpPr/>
-          <p:nvPr/>
-        </p:nvSpPr>
-        <p:spPr>
-          <a:xfrm>
-            <a:off x="4297680" y="3127248"/>
-            <a:ext cx="274320" cy="1828800"/>
-          </a:xfrm>
-          <a:prstGeom prst="line">
-            <a:avLst/>
-          </a:prstGeom>
-          <a:noFill/>
-          <a:ln w="19050">
+          <a:ln w="22225">
             <a:solidFill>
               <a:srgbClr val="009845"/>
             </a:solidFill>
@@ -3309,20 +3664,20 @@
       </p:sp>
       <p:sp>
         <p:nvSpPr>
-          <p:cNvPr id="46" name="Shape 44"/>
-          <p:cNvSpPr/>
-          <p:nvPr/>
-        </p:nvSpPr>
-        <p:spPr>
-          <a:xfrm>
-            <a:off x="4297680" y="4041648"/>
-            <a:ext cx="274320" cy="0"/>
+          <p:cNvPr id="63" name="Shape 60"/>
+          <p:cNvSpPr/>
+          <p:nvPr/>
+        </p:nvSpPr>
+        <p:spPr>
+          <a:xfrm>
+            <a:off x="3703320" y="4466844"/>
+            <a:ext cx="548640" cy="0"/>
           </a:xfrm>
           <a:prstGeom prst="line">
             <a:avLst/>
           </a:prstGeom>
           <a:noFill/>
-          <a:ln w="19050">
+          <a:ln w="22225">
             <a:solidFill>
               <a:srgbClr val="006580"/>
             </a:solidFill>
@@ -3333,116 +3688,20 @@
       </p:sp>
       <p:sp>
         <p:nvSpPr>
-          <p:cNvPr id="47" name="Shape 45"/>
-          <p:cNvSpPr/>
-          <p:nvPr/>
-        </p:nvSpPr>
-        <p:spPr>
-          <a:xfrm>
-            <a:off x="8229600" y="2212848"/>
+          <p:cNvPr id="64" name="Shape 61"/>
+          <p:cNvSpPr/>
+          <p:nvPr/>
+        </p:nvSpPr>
+        <p:spPr>
+          <a:xfrm>
+            <a:off x="8229600" y="2217420"/>
             <a:ext cx="457200" cy="0"/>
           </a:xfrm>
           <a:prstGeom prst="line">
             <a:avLst/>
           </a:prstGeom>
           <a:noFill/>
-          <a:ln w="19050">
-            <a:solidFill>
-              <a:srgbClr val="A9B3B6"/>
-            </a:solidFill>
-            <a:prstDash val="solid"/>
-            <a:tailEnd type="triangle"/>
-          </a:ln>
-        </p:spPr>
-      </p:sp>
-      <p:sp>
-        <p:nvSpPr>
-          <p:cNvPr id="48" name="Shape 46"/>
-          <p:cNvSpPr/>
-          <p:nvPr/>
-        </p:nvSpPr>
-        <p:spPr>
-          <a:xfrm>
-            <a:off x="8229600" y="3127248"/>
-            <a:ext cx="457200" cy="-914400"/>
-          </a:xfrm>
-          <a:prstGeom prst="line">
-            <a:avLst/>
-          </a:prstGeom>
-          <a:noFill/>
-          <a:ln w="19050">
-            <a:solidFill>
-              <a:srgbClr val="A9B3B6"/>
-            </a:solidFill>
-            <a:prstDash val="solid"/>
-            <a:tailEnd type="triangle"/>
-          </a:ln>
-        </p:spPr>
-      </p:sp>
-      <p:sp>
-        <p:nvSpPr>
-          <p:cNvPr id="49" name="Shape 47"/>
-          <p:cNvSpPr/>
-          <p:nvPr/>
-        </p:nvSpPr>
-        <p:spPr>
-          <a:xfrm>
-            <a:off x="8229600" y="4041648"/>
-            <a:ext cx="457200" cy="-1828800"/>
-          </a:xfrm>
-          <a:prstGeom prst="line">
-            <a:avLst/>
-          </a:prstGeom>
-          <a:noFill/>
-          <a:ln w="19050">
-            <a:solidFill>
-              <a:srgbClr val="A9B3B6"/>
-            </a:solidFill>
-            <a:prstDash val="solid"/>
-            <a:tailEnd type="triangle"/>
-          </a:ln>
-        </p:spPr>
-      </p:sp>
-      <p:sp>
-        <p:nvSpPr>
-          <p:cNvPr id="50" name="Shape 48"/>
-          <p:cNvSpPr/>
-          <p:nvPr/>
-        </p:nvSpPr>
-        <p:spPr>
-          <a:xfrm>
-            <a:off x="8229600" y="4956048"/>
-            <a:ext cx="457200" cy="-2743200"/>
-          </a:xfrm>
-          <a:prstGeom prst="line">
-            <a:avLst/>
-          </a:prstGeom>
-          <a:noFill/>
-          <a:ln w="19050">
-            <a:solidFill>
-              <a:srgbClr val="A9B3B6"/>
-            </a:solidFill>
-            <a:prstDash val="solid"/>
-            <a:tailEnd type="triangle"/>
-          </a:ln>
-        </p:spPr>
-      </p:sp>
-      <p:sp>
-        <p:nvSpPr>
-          <p:cNvPr id="51" name="Shape 49"/>
-          <p:cNvSpPr/>
-          <p:nvPr/>
-        </p:nvSpPr>
-        <p:spPr>
-          <a:xfrm>
-            <a:off x="8229600" y="2212848"/>
-            <a:ext cx="457200" cy="914400"/>
-          </a:xfrm>
-          <a:prstGeom prst="line">
-            <a:avLst/>
-          </a:prstGeom>
-          <a:noFill/>
-          <a:ln w="19050">
+          <a:ln w="22225">
             <a:solidFill>
               <a:srgbClr val="19416C"/>
             </a:solidFill>
@@ -3453,20 +3712,20 @@
       </p:sp>
       <p:sp>
         <p:nvSpPr>
-          <p:cNvPr id="52" name="Shape 50"/>
-          <p:cNvSpPr/>
-          <p:nvPr/>
-        </p:nvSpPr>
-        <p:spPr>
-          <a:xfrm>
-            <a:off x="10241280" y="2606040"/>
-            <a:ext cx="0" cy="1051560"/>
+          <p:cNvPr id="65" name="Shape 62"/>
+          <p:cNvSpPr/>
+          <p:nvPr/>
+        </p:nvSpPr>
+        <p:spPr>
+          <a:xfrm>
+            <a:off x="8229600" y="3342132"/>
+            <a:ext cx="457200" cy="-1124712"/>
           </a:xfrm>
           <a:prstGeom prst="line">
             <a:avLst/>
           </a:prstGeom>
           <a:noFill/>
-          <a:ln w="19050">
+          <a:ln w="22225">
             <a:solidFill>
               <a:srgbClr val="19416C"/>
             </a:solidFill>
@@ -3477,20 +3736,20 @@
       </p:sp>
       <p:sp>
         <p:nvSpPr>
-          <p:cNvPr id="53" name="Shape 51"/>
-          <p:cNvSpPr/>
-          <p:nvPr/>
-        </p:nvSpPr>
-        <p:spPr>
-          <a:xfrm>
-            <a:off x="10241280" y="3520440"/>
-            <a:ext cx="0" cy="137160"/>
+          <p:cNvPr id="66" name="Shape 63"/>
+          <p:cNvSpPr/>
+          <p:nvPr/>
+        </p:nvSpPr>
+        <p:spPr>
+          <a:xfrm>
+            <a:off x="8229600" y="4466844"/>
+            <a:ext cx="457200" cy="-2249424"/>
           </a:xfrm>
           <a:prstGeom prst="line">
             <a:avLst/>
           </a:prstGeom>
           <a:noFill/>
-          <a:ln w="19050">
+          <a:ln w="22225">
             <a:solidFill>
               <a:srgbClr val="19416C"/>
             </a:solidFill>
@@ -3501,20 +3760,44 @@
       </p:sp>
       <p:sp>
         <p:nvSpPr>
-          <p:cNvPr id="54" name="Shape 52"/>
-          <p:cNvSpPr/>
-          <p:nvPr/>
-        </p:nvSpPr>
-        <p:spPr>
-          <a:xfrm>
-            <a:off x="10241280" y="2606040"/>
-            <a:ext cx="0" cy="1965960"/>
+          <p:cNvPr id="67" name="Shape 64"/>
+          <p:cNvSpPr/>
+          <p:nvPr/>
+        </p:nvSpPr>
+        <p:spPr>
+          <a:xfrm>
+            <a:off x="10122408" y="2628900"/>
+            <a:ext cx="0" cy="713232"/>
           </a:xfrm>
           <a:prstGeom prst="line">
             <a:avLst/>
           </a:prstGeom>
           <a:noFill/>
-          <a:ln w="19050">
+          <a:ln w="22225">
+            <a:solidFill>
+              <a:srgbClr val="19416C"/>
+            </a:solidFill>
+            <a:prstDash val="solid"/>
+            <a:tailEnd type="triangle"/>
+          </a:ln>
+        </p:spPr>
+      </p:sp>
+      <p:sp>
+        <p:nvSpPr>
+          <p:cNvPr id="68" name="Shape 65"/>
+          <p:cNvSpPr/>
+          <p:nvPr/>
+        </p:nvSpPr>
+        <p:spPr>
+          <a:xfrm>
+            <a:off x="10122408" y="3753612"/>
+            <a:ext cx="0" cy="713232"/>
+          </a:xfrm>
+          <a:prstGeom prst="line">
+            <a:avLst/>
+          </a:prstGeom>
+          <a:noFill/>
+          <a:ln w="22225">
             <a:solidFill>
               <a:srgbClr val="009845"/>
             </a:solidFill>
@@ -3525,108 +3808,62 @@
       </p:sp>
       <p:sp>
         <p:nvSpPr>
-          <p:cNvPr id="55" name="Shape 53"/>
-          <p:cNvSpPr/>
-          <p:nvPr/>
-        </p:nvSpPr>
-        <p:spPr>
-          <a:xfrm>
-            <a:off x="4572000" y="5486400"/>
-            <a:ext cx="7406640" cy="777240"/>
-          </a:xfrm>
-          <a:prstGeom prst="roundRect">
-            <a:avLst>
-              <a:gd name="adj" fmla="val 7059"/>
-            </a:avLst>
+          <p:cNvPr id="69" name="Text 66"/>
+          <p:cNvSpPr/>
+          <p:nvPr/>
+        </p:nvSpPr>
+        <p:spPr>
+          <a:xfrm>
+            <a:off x="457200" y="6053328"/>
+            <a:ext cx="11247120" cy="457200"/>
+          </a:xfrm>
+          <a:prstGeom prst="rect">
+            <a:avLst/>
+          </a:prstGeom>
+          <a:noFill/>
+          <a:ln/>
+        </p:spPr>
+        <p:txBody>
+          <a:bodyPr wrap="square" rtlCol="0" anchor="ctr"/>
+          <a:lstStyle/>
+          <a:p>
+            <a:pPr indent="0" marL="0">
+              <a:buNone/>
+            </a:pPr>
+            <a:r>
+              <a:rPr lang="en-US" sz="1000" i="1" dirty="0">
+                <a:solidFill>
+                  <a:srgbClr val="2D3543"/>
+                </a:solidFill>
+                <a:latin typeface="Inter" pitchFamily="34" charset="0"/>
+                <a:ea typeface="Inter" pitchFamily="34" charset="-122"/>
+                <a:cs typeface="Inter" pitchFamily="34" charset="-120"/>
+              </a:rPr>
+              <a:t>QVD bridge: Prometheus PromQL → long-form (timestamp, metric, labels, value) rows → QVD via pyqvd → Qlik Cloud Data Files API → analyst sheets.</a:t>
+            </a:r>
+            <a:endParaRPr lang="en-US" sz="1000" dirty="0"/>
+          </a:p>
+        </p:txBody>
+      </p:sp>
+      <p:sp>
+        <p:nvSpPr>
+          <p:cNvPr id="70" name="Shape 67"/>
+          <p:cNvSpPr/>
+          <p:nvPr/>
+        </p:nvSpPr>
+        <p:spPr>
+          <a:xfrm>
+            <a:off x="0" y="6629400"/>
+            <a:ext cx="12191695" cy="228600"/>
+          </a:xfrm>
+          <a:prstGeom prst="rect">
+            <a:avLst/>
           </a:prstGeom>
           <a:solidFill>
-            <a:srgbClr val="FFFFFF"/>
+            <a:srgbClr val="009845"/>
           </a:solidFill>
-          <a:ln w="19050">
-            <a:solidFill>
-              <a:srgbClr val="009845"/>
-            </a:solidFill>
-            <a:prstDash val="solid"/>
-          </a:ln>
-        </p:spPr>
-      </p:sp>
-      <p:sp>
-        <p:nvSpPr>
-          <p:cNvPr id="56" name="Text 54"/>
-          <p:cNvSpPr/>
-          <p:nvPr/>
-        </p:nvSpPr>
-        <p:spPr>
-          <a:xfrm>
-            <a:off x="4709160" y="5577840"/>
-            <a:ext cx="3657600" cy="292608"/>
-          </a:xfrm>
-          <a:prstGeom prst="rect">
-            <a:avLst/>
-          </a:prstGeom>
-          <a:noFill/>
-          <a:ln/>
-        </p:spPr>
-        <p:txBody>
-          <a:bodyPr wrap="square" rtlCol="0" anchor="ctr"/>
-          <a:lstStyle/>
-          <a:p>
-            <a:pPr indent="0" marL="0">
-              <a:buNone/>
-            </a:pPr>
-            <a:r>
-              <a:rPr lang="en-US" sz="1300" b="1" dirty="0">
-                <a:solidFill>
-                  <a:srgbClr val="009845"/>
-                </a:solidFill>
-                <a:latin typeface="Inter" pitchFamily="34" charset="0"/>
-                <a:ea typeface="Inter" pitchFamily="34" charset="-122"/>
-                <a:cs typeface="Inter" pitchFamily="34" charset="-120"/>
-              </a:rPr>
-              <a:t>Qlik QVD exporter (Py)</a:t>
-            </a:r>
-            <a:endParaRPr lang="en-US" sz="1300" dirty="0"/>
-          </a:p>
-        </p:txBody>
-      </p:sp>
-      <p:sp>
-        <p:nvSpPr>
-          <p:cNvPr id="57" name="Text 55"/>
-          <p:cNvSpPr/>
-          <p:nvPr/>
-        </p:nvSpPr>
-        <p:spPr>
-          <a:xfrm>
-            <a:off x="4709160" y="5870448"/>
-            <a:ext cx="7178040" cy="365760"/>
-          </a:xfrm>
-          <a:prstGeom prst="rect">
-            <a:avLst/>
-          </a:prstGeom>
-          <a:noFill/>
-          <a:ln/>
-        </p:spPr>
-        <p:txBody>
-          <a:bodyPr wrap="square" rtlCol="0" anchor="ctr"/>
-          <a:lstStyle/>
-          <a:p>
-            <a:pPr indent="0" marL="0">
-              <a:buNone/>
-            </a:pPr>
-            <a:r>
-              <a:rPr lang="en-US" sz="1000" dirty="0">
-                <a:solidFill>
-                  <a:srgbClr val="2D3543"/>
-                </a:solidFill>
-                <a:latin typeface="Inter" pitchFamily="34" charset="0"/>
-                <a:ea typeface="Inter" pitchFamily="34" charset="-122"/>
-                <a:cs typeface="Inter" pitchFamily="34" charset="-120"/>
-              </a:rPr>
-              <a:t>Prometheus PromQL → long-form (ts, metric, labels, value) → QVD via pyqvd → Qlik Cloud Data Files API → analyst-owned trend/correlation sheets.</a:t>
-            </a:r>
-            <a:endParaRPr lang="en-US" sz="1000" dirty="0"/>
-          </a:p>
-        </p:txBody>
+          <a:ln/>
+        </p:spPr>
       </p:sp>
     </p:spTree>
   </p:cSld>

--- a/Talend-TMC-MCP-Architecture.pptx
+++ b/Talend-TMC-MCP-Architecture.pptx
@@ -1902,8 +1902,8 @@
         </p:blipFill>
         <p:spPr>
           <a:xfrm>
-            <a:off x="10561320" y="292608"/>
-            <a:ext cx="1188720" cy="658368"/>
+            <a:off x="10515600" y="292608"/>
+            <a:ext cx="1234440" cy="685800"/>
           </a:xfrm>
           <a:prstGeom prst="rect">
             <a:avLst/>
@@ -1919,7 +1919,7 @@
         <p:spPr>
           <a:xfrm>
             <a:off x="457200" y="274320"/>
-            <a:ext cx="9875520" cy="502920"/>
+            <a:ext cx="9692640" cy="502920"/>
           </a:xfrm>
           <a:prstGeom prst="rect">
             <a:avLst/>
@@ -1958,7 +1958,7 @@
         <p:spPr>
           <a:xfrm>
             <a:off x="457200" y="777240"/>
-            <a:ext cx="9875520" cy="320040"/>
+            <a:ext cx="9692640" cy="320040"/>
           </a:xfrm>
           <a:prstGeom prst="rect">
             <a:avLst/>
@@ -1997,7 +1997,7 @@
         <p:spPr>
           <a:xfrm>
             <a:off x="457200" y="1325880"/>
-            <a:ext cx="3383280" cy="4617720"/>
+            <a:ext cx="3383280" cy="4572000"/>
           </a:xfrm>
           <a:prstGeom prst="roundRect">
             <a:avLst>
@@ -2063,7 +2063,7 @@
         <p:spPr>
           <a:xfrm>
             <a:off x="4114800" y="1325880"/>
-            <a:ext cx="4160520" cy="4617720"/>
+            <a:ext cx="4160520" cy="4572000"/>
           </a:xfrm>
           <a:prstGeom prst="roundRect">
             <a:avLst>
@@ -2129,7 +2129,7 @@
         <p:spPr>
           <a:xfrm>
             <a:off x="8549640" y="1325880"/>
-            <a:ext cx="3154680" cy="4617720"/>
+            <a:ext cx="3154680" cy="4572000"/>
           </a:xfrm>
           <a:prstGeom prst="roundRect">
             <a:avLst>
@@ -2222,11 +2222,11 @@
         <p:spPr>
           <a:xfrm>
             <a:off x="594360" y="1783080"/>
-            <a:ext cx="109728" cy="868680"/>
+            <a:ext cx="91440" cy="868680"/>
           </a:xfrm>
           <a:prstGeom prst="roundRect">
             <a:avLst>
-              <a:gd name="adj" fmla="val 58333"/>
+              <a:gd name="adj" fmla="val 70000"/>
             </a:avLst>
           </a:prstGeom>
           <a:solidFill>
@@ -2235,36 +2235,40 @@
           <a:ln/>
         </p:spPr>
       </p:sp>
-      <p:sp>
-        <p:nvSpPr>
-          <p:cNvPr id="13" name="Shape 10"/>
-          <p:cNvSpPr/>
-          <p:nvPr/>
-        </p:nvSpPr>
-        <p:spPr>
-          <a:xfrm>
-            <a:off x="832104" y="1988820"/>
-            <a:ext cx="548640" cy="411480"/>
-          </a:xfrm>
-          <a:prstGeom prst="cloud">
-            <a:avLst/>
-          </a:prstGeom>
-          <a:solidFill>
-            <a:srgbClr val="93579C"/>
-          </a:solidFill>
-          <a:ln/>
-        </p:spPr>
-      </p:sp>
-      <p:sp>
-        <p:nvSpPr>
-          <p:cNvPr id="14" name="Text 11"/>
-          <p:cNvSpPr/>
-          <p:nvPr/>
-        </p:nvSpPr>
-        <p:spPr>
-          <a:xfrm>
-            <a:off x="1435608" y="1874520"/>
-            <a:ext cx="2194560" cy="310896"/>
+      <p:pic>
+        <p:nvPicPr>
+          <p:cNvPr id="13" name="Image 1" descr="deploy/assets/icons/talend-cloud.png">    </p:cNvPr>
+          <p:cNvPicPr>
+            <a:picLocks noChangeAspect="1"/>
+          </p:cNvPicPr>
+          <p:nvPr/>
+        </p:nvPicPr>
+        <p:blipFill>
+          <a:blip r:embed="rId3"/>
+          <a:stretch>
+            <a:fillRect/>
+          </a:stretch>
+        </p:blipFill>
+        <p:spPr>
+          <a:xfrm>
+            <a:off x="813816" y="1933956"/>
+            <a:ext cx="566928" cy="566928"/>
+          </a:xfrm>
+          <a:prstGeom prst="rect">
+            <a:avLst/>
+          </a:prstGeom>
+        </p:spPr>
+      </p:pic>
+      <p:sp>
+        <p:nvSpPr>
+          <p:cNvPr id="14" name="Text 10"/>
+          <p:cNvSpPr/>
+          <p:nvPr/>
+        </p:nvSpPr>
+        <p:spPr>
+          <a:xfrm>
+            <a:off x="1508760" y="1892808"/>
+            <a:ext cx="2103120" cy="310896"/>
           </a:xfrm>
           <a:prstGeom prst="rect">
             <a:avLst/>
@@ -2296,14 +2300,14 @@
       </p:sp>
       <p:sp>
         <p:nvSpPr>
-          <p:cNvPr id="15" name="Text 12"/>
-          <p:cNvSpPr/>
-          <p:nvPr/>
-        </p:nvSpPr>
-        <p:spPr>
-          <a:xfrm>
-            <a:off x="1435608" y="2167128"/>
-            <a:ext cx="2194560" cy="411480"/>
+          <p:cNvPr id="15" name="Text 11"/>
+          <p:cNvSpPr/>
+          <p:nvPr/>
+        </p:nvSpPr>
+        <p:spPr>
+          <a:xfrm>
+            <a:off x="1508760" y="2185416"/>
+            <a:ext cx="2103120" cy="393192"/>
           </a:xfrm>
           <a:prstGeom prst="rect">
             <a:avLst/>
@@ -2335,13 +2339,13 @@
       </p:sp>
       <p:sp>
         <p:nvSpPr>
-          <p:cNvPr id="16" name="Shape 13"/>
-          <p:cNvSpPr/>
-          <p:nvPr/>
-        </p:nvSpPr>
-        <p:spPr>
-          <a:xfrm>
-            <a:off x="594360" y="2907792"/>
+          <p:cNvPr id="16" name="Shape 12"/>
+          <p:cNvSpPr/>
+          <p:nvPr/>
+        </p:nvSpPr>
+        <p:spPr>
+          <a:xfrm>
+            <a:off x="594360" y="2926080"/>
             <a:ext cx="3108960" cy="868680"/>
           </a:xfrm>
           <a:prstGeom prst="roundRect">
@@ -2362,18 +2366,18 @@
       </p:sp>
       <p:sp>
         <p:nvSpPr>
-          <p:cNvPr id="17" name="Shape 14"/>
-          <p:cNvSpPr/>
-          <p:nvPr/>
-        </p:nvSpPr>
-        <p:spPr>
-          <a:xfrm>
-            <a:off x="594360" y="2907792"/>
-            <a:ext cx="109728" cy="868680"/>
+          <p:cNvPr id="17" name="Shape 13"/>
+          <p:cNvSpPr/>
+          <p:nvPr/>
+        </p:nvSpPr>
+        <p:spPr>
+          <a:xfrm>
+            <a:off x="594360" y="2926080"/>
+            <a:ext cx="91440" cy="868680"/>
           </a:xfrm>
           <a:prstGeom prst="roundRect">
             <a:avLst>
-              <a:gd name="adj" fmla="val 58333"/>
+              <a:gd name="adj" fmla="val 70000"/>
             </a:avLst>
           </a:prstGeom>
           <a:solidFill>
@@ -2382,36 +2386,40 @@
           <a:ln/>
         </p:spPr>
       </p:sp>
-      <p:sp>
-        <p:nvSpPr>
-          <p:cNvPr id="18" name="Shape 15"/>
-          <p:cNvSpPr/>
-          <p:nvPr/>
-        </p:nvSpPr>
-        <p:spPr>
-          <a:xfrm>
-            <a:off x="832104" y="3113532"/>
-            <a:ext cx="548640" cy="411480"/>
-          </a:xfrm>
-          <a:prstGeom prst="cloud">
-            <a:avLst/>
-          </a:prstGeom>
-          <a:solidFill>
-            <a:srgbClr val="009845"/>
-          </a:solidFill>
-          <a:ln/>
-        </p:spPr>
-      </p:sp>
-      <p:sp>
-        <p:nvSpPr>
-          <p:cNvPr id="19" name="Text 16"/>
-          <p:cNvSpPr/>
-          <p:nvPr/>
-        </p:nvSpPr>
-        <p:spPr>
-          <a:xfrm>
-            <a:off x="1435608" y="2999232"/>
-            <a:ext cx="2194560" cy="310896"/>
+      <p:pic>
+        <p:nvPicPr>
+          <p:cNvPr id="18" name="Image 2" descr="deploy/assets/icons/qlik-cloud.png">    </p:cNvPr>
+          <p:cNvPicPr>
+            <a:picLocks noChangeAspect="1"/>
+          </p:cNvPicPr>
+          <p:nvPr/>
+        </p:nvPicPr>
+        <p:blipFill>
+          <a:blip r:embed="rId4"/>
+          <a:stretch>
+            <a:fillRect/>
+          </a:stretch>
+        </p:blipFill>
+        <p:spPr>
+          <a:xfrm>
+            <a:off x="813816" y="3076956"/>
+            <a:ext cx="566928" cy="566928"/>
+          </a:xfrm>
+          <a:prstGeom prst="rect">
+            <a:avLst/>
+          </a:prstGeom>
+        </p:spPr>
+      </p:pic>
+      <p:sp>
+        <p:nvSpPr>
+          <p:cNvPr id="19" name="Text 14"/>
+          <p:cNvSpPr/>
+          <p:nvPr/>
+        </p:nvSpPr>
+        <p:spPr>
+          <a:xfrm>
+            <a:off x="1508760" y="3035808"/>
+            <a:ext cx="2103120" cy="310896"/>
           </a:xfrm>
           <a:prstGeom prst="rect">
             <a:avLst/>
@@ -2443,14 +2451,14 @@
       </p:sp>
       <p:sp>
         <p:nvSpPr>
-          <p:cNvPr id="20" name="Text 17"/>
-          <p:cNvSpPr/>
-          <p:nvPr/>
-        </p:nvSpPr>
-        <p:spPr>
-          <a:xfrm>
-            <a:off x="1435608" y="3291840"/>
-            <a:ext cx="2194560" cy="411480"/>
+          <p:cNvPr id="20" name="Text 15"/>
+          <p:cNvSpPr/>
+          <p:nvPr/>
+        </p:nvSpPr>
+        <p:spPr>
+          <a:xfrm>
+            <a:off x="1508760" y="3328416"/>
+            <a:ext cx="2103120" cy="393192"/>
           </a:xfrm>
           <a:prstGeom prst="rect">
             <a:avLst/>
@@ -2482,13 +2490,13 @@
       </p:sp>
       <p:sp>
         <p:nvSpPr>
-          <p:cNvPr id="21" name="Shape 18"/>
-          <p:cNvSpPr/>
-          <p:nvPr/>
-        </p:nvSpPr>
-        <p:spPr>
-          <a:xfrm>
-            <a:off x="594360" y="4032504"/>
+          <p:cNvPr id="21" name="Shape 16"/>
+          <p:cNvSpPr/>
+          <p:nvPr/>
+        </p:nvSpPr>
+        <p:spPr>
+          <a:xfrm>
+            <a:off x="594360" y="4069080"/>
             <a:ext cx="3108960" cy="868680"/>
           </a:xfrm>
           <a:prstGeom prst="roundRect">
@@ -2509,18 +2517,18 @@
       </p:sp>
       <p:sp>
         <p:nvSpPr>
-          <p:cNvPr id="22" name="Shape 19"/>
-          <p:cNvSpPr/>
-          <p:nvPr/>
-        </p:nvSpPr>
-        <p:spPr>
-          <a:xfrm>
-            <a:off x="594360" y="4032504"/>
-            <a:ext cx="109728" cy="868680"/>
+          <p:cNvPr id="22" name="Shape 17"/>
+          <p:cNvSpPr/>
+          <p:nvPr/>
+        </p:nvSpPr>
+        <p:spPr>
+          <a:xfrm>
+            <a:off x="594360" y="4069080"/>
+            <a:ext cx="91440" cy="868680"/>
           </a:xfrm>
           <a:prstGeom prst="roundRect">
             <a:avLst>
-              <a:gd name="adj" fmla="val 58333"/>
+              <a:gd name="adj" fmla="val 70000"/>
             </a:avLst>
           </a:prstGeom>
           <a:solidFill>
@@ -2529,61 +2537,40 @@
           <a:ln/>
         </p:spPr>
       </p:sp>
-      <p:sp>
-        <p:nvSpPr>
-          <p:cNvPr id="23" name="Shape 20"/>
-          <p:cNvSpPr/>
-          <p:nvPr/>
-        </p:nvSpPr>
-        <p:spPr>
-          <a:xfrm>
-            <a:off x="905256" y="4238244"/>
-            <a:ext cx="310896" cy="402336"/>
-          </a:xfrm>
-          <a:prstGeom prst="rect">
-            <a:avLst/>
-          </a:prstGeom>
-          <a:solidFill>
-            <a:srgbClr val="FFFFFF"/>
-          </a:solidFill>
-          <a:ln w="19050">
-            <a:solidFill>
-              <a:srgbClr val="006580"/>
-            </a:solidFill>
-            <a:prstDash val="solid"/>
-          </a:ln>
-        </p:spPr>
-      </p:sp>
-      <p:sp>
-        <p:nvSpPr>
-          <p:cNvPr id="24" name="Shape 21"/>
-          <p:cNvSpPr/>
-          <p:nvPr/>
-        </p:nvSpPr>
-        <p:spPr>
-          <a:xfrm>
-            <a:off x="832104" y="4293108"/>
-            <a:ext cx="310896" cy="402336"/>
-          </a:xfrm>
-          <a:prstGeom prst="rect">
-            <a:avLst/>
-          </a:prstGeom>
-          <a:solidFill>
-            <a:srgbClr val="006580"/>
-          </a:solidFill>
-          <a:ln/>
-        </p:spPr>
-      </p:sp>
-      <p:sp>
-        <p:nvSpPr>
-          <p:cNvPr id="25" name="Text 22"/>
-          <p:cNvSpPr/>
-          <p:nvPr/>
-        </p:nvSpPr>
-        <p:spPr>
-          <a:xfrm>
-            <a:off x="1435608" y="4123944"/>
-            <a:ext cx="2194560" cy="310896"/>
+      <p:pic>
+        <p:nvPicPr>
+          <p:cNvPr id="23" name="Image 3" descr="deploy/assets/icons/remote-engine.png">    </p:cNvPr>
+          <p:cNvPicPr>
+            <a:picLocks noChangeAspect="1"/>
+          </p:cNvPicPr>
+          <p:nvPr/>
+        </p:nvPicPr>
+        <p:blipFill>
+          <a:blip r:embed="rId5"/>
+          <a:stretch>
+            <a:fillRect/>
+          </a:stretch>
+        </p:blipFill>
+        <p:spPr>
+          <a:xfrm>
+            <a:off x="813816" y="4219956"/>
+            <a:ext cx="566928" cy="566928"/>
+          </a:xfrm>
+          <a:prstGeom prst="rect">
+            <a:avLst/>
+          </a:prstGeom>
+        </p:spPr>
+      </p:pic>
+      <p:sp>
+        <p:nvSpPr>
+          <p:cNvPr id="24" name="Text 18"/>
+          <p:cNvSpPr/>
+          <p:nvPr/>
+        </p:nvSpPr>
+        <p:spPr>
+          <a:xfrm>
+            <a:off x="1508760" y="4178808"/>
+            <a:ext cx="2103120" cy="310896"/>
           </a:xfrm>
           <a:prstGeom prst="rect">
             <a:avLst/>
@@ -2615,14 +2602,14 @@
       </p:sp>
       <p:sp>
         <p:nvSpPr>
-          <p:cNvPr id="26" name="Text 23"/>
-          <p:cNvSpPr/>
-          <p:nvPr/>
-        </p:nvSpPr>
-        <p:spPr>
-          <a:xfrm>
-            <a:off x="1435608" y="4416552"/>
-            <a:ext cx="2194560" cy="411480"/>
+          <p:cNvPr id="25" name="Text 19"/>
+          <p:cNvSpPr/>
+          <p:nvPr/>
+        </p:nvSpPr>
+        <p:spPr>
+          <a:xfrm>
+            <a:off x="1508760" y="4471416"/>
+            <a:ext cx="2103120" cy="393192"/>
           </a:xfrm>
           <a:prstGeom prst="rect">
             <a:avLst/>
@@ -2654,7 +2641,7 @@
       </p:sp>
       <p:sp>
         <p:nvSpPr>
-          <p:cNvPr id="27" name="Shape 24"/>
+          <p:cNvPr id="26" name="Shape 20"/>
           <p:cNvSpPr/>
           <p:nvPr/>
         </p:nvSpPr>
@@ -2681,18 +2668,18 @@
       </p:sp>
       <p:sp>
         <p:nvSpPr>
-          <p:cNvPr id="28" name="Shape 25"/>
+          <p:cNvPr id="27" name="Shape 21"/>
           <p:cNvSpPr/>
           <p:nvPr/>
         </p:nvSpPr>
         <p:spPr>
           <a:xfrm>
             <a:off x="4251960" y="1783080"/>
-            <a:ext cx="109728" cy="868680"/>
+            <a:ext cx="91440" cy="868680"/>
           </a:xfrm>
           <a:prstGeom prst="roundRect">
             <a:avLst>
-              <a:gd name="adj" fmla="val 58333"/>
+              <a:gd name="adj" fmla="val 70000"/>
             </a:avLst>
           </a:prstGeom>
           <a:solidFill>
@@ -2701,36 +2688,40 @@
           <a:ln/>
         </p:spPr>
       </p:sp>
-      <p:sp>
-        <p:nvSpPr>
-          <p:cNvPr id="29" name="Shape 26"/>
-          <p:cNvSpPr/>
-          <p:nvPr/>
-        </p:nvSpPr>
-        <p:spPr>
-          <a:xfrm>
-            <a:off x="4489704" y="1988820"/>
-            <a:ext cx="457200" cy="457200"/>
-          </a:xfrm>
-          <a:prstGeom prst="gear6">
-            <a:avLst/>
-          </a:prstGeom>
-          <a:solidFill>
-            <a:srgbClr val="19416C"/>
-          </a:solidFill>
-          <a:ln/>
-        </p:spPr>
-      </p:sp>
-      <p:sp>
-        <p:nvSpPr>
-          <p:cNvPr id="30" name="Text 27"/>
-          <p:cNvSpPr/>
-          <p:nvPr/>
-        </p:nvSpPr>
-        <p:spPr>
-          <a:xfrm>
-            <a:off x="5093208" y="1874520"/>
-            <a:ext cx="2971800" cy="310896"/>
+      <p:pic>
+        <p:nvPicPr>
+          <p:cNvPr id="28" name="Image 4" descr="deploy/assets/icons/mcp.png">    </p:cNvPr>
+          <p:cNvPicPr>
+            <a:picLocks noChangeAspect="1"/>
+          </p:cNvPicPr>
+          <p:nvPr/>
+        </p:nvPicPr>
+        <p:blipFill>
+          <a:blip r:embed="rId6"/>
+          <a:stretch>
+            <a:fillRect/>
+          </a:stretch>
+        </p:blipFill>
+        <p:spPr>
+          <a:xfrm>
+            <a:off x="4471416" y="1933956"/>
+            <a:ext cx="566928" cy="566928"/>
+          </a:xfrm>
+          <a:prstGeom prst="rect">
+            <a:avLst/>
+          </a:prstGeom>
+        </p:spPr>
+      </p:pic>
+      <p:sp>
+        <p:nvSpPr>
+          <p:cNvPr id="29" name="Text 22"/>
+          <p:cNvSpPr/>
+          <p:nvPr/>
+        </p:nvSpPr>
+        <p:spPr>
+          <a:xfrm>
+            <a:off x="5166360" y="1892808"/>
+            <a:ext cx="2880360" cy="310896"/>
           </a:xfrm>
           <a:prstGeom prst="rect">
             <a:avLst/>
@@ -2762,14 +2753,14 @@
       </p:sp>
       <p:sp>
         <p:nvSpPr>
-          <p:cNvPr id="31" name="Text 28"/>
-          <p:cNvSpPr/>
-          <p:nvPr/>
-        </p:nvSpPr>
-        <p:spPr>
-          <a:xfrm>
-            <a:off x="5093208" y="2167128"/>
-            <a:ext cx="2971800" cy="411480"/>
+          <p:cNvPr id="30" name="Text 23"/>
+          <p:cNvSpPr/>
+          <p:nvPr/>
+        </p:nvSpPr>
+        <p:spPr>
+          <a:xfrm>
+            <a:off x="5166360" y="2185416"/>
+            <a:ext cx="2880360" cy="393192"/>
           </a:xfrm>
           <a:prstGeom prst="rect">
             <a:avLst/>
@@ -2801,13 +2792,13 @@
       </p:sp>
       <p:sp>
         <p:nvSpPr>
-          <p:cNvPr id="32" name="Shape 29"/>
-          <p:cNvSpPr/>
-          <p:nvPr/>
-        </p:nvSpPr>
-        <p:spPr>
-          <a:xfrm>
-            <a:off x="4251960" y="2907792"/>
+          <p:cNvPr id="31" name="Shape 24"/>
+          <p:cNvSpPr/>
+          <p:nvPr/>
+        </p:nvSpPr>
+        <p:spPr>
+          <a:xfrm>
+            <a:off x="4251960" y="2926080"/>
             <a:ext cx="3886200" cy="868680"/>
           </a:xfrm>
           <a:prstGeom prst="roundRect">
@@ -2828,18 +2819,18 @@
       </p:sp>
       <p:sp>
         <p:nvSpPr>
-          <p:cNvPr id="33" name="Shape 30"/>
-          <p:cNvSpPr/>
-          <p:nvPr/>
-        </p:nvSpPr>
-        <p:spPr>
-          <a:xfrm>
-            <a:off x="4251960" y="2907792"/>
-            <a:ext cx="109728" cy="868680"/>
+          <p:cNvPr id="32" name="Shape 25"/>
+          <p:cNvSpPr/>
+          <p:nvPr/>
+        </p:nvSpPr>
+        <p:spPr>
+          <a:xfrm>
+            <a:off x="4251960" y="2926080"/>
+            <a:ext cx="91440" cy="868680"/>
           </a:xfrm>
           <a:prstGeom prst="roundRect">
             <a:avLst>
-              <a:gd name="adj" fmla="val 58333"/>
+              <a:gd name="adj" fmla="val 70000"/>
             </a:avLst>
           </a:prstGeom>
           <a:solidFill>
@@ -2848,36 +2839,40 @@
           <a:ln/>
         </p:spPr>
       </p:sp>
-      <p:sp>
-        <p:nvSpPr>
-          <p:cNvPr id="34" name="Shape 31"/>
-          <p:cNvSpPr/>
-          <p:nvPr/>
-        </p:nvSpPr>
-        <p:spPr>
-          <a:xfrm>
-            <a:off x="4489704" y="3113532"/>
-            <a:ext cx="457200" cy="457200"/>
-          </a:xfrm>
-          <a:prstGeom prst="gear6">
-            <a:avLst/>
-          </a:prstGeom>
-          <a:solidFill>
-            <a:srgbClr val="19416C"/>
-          </a:solidFill>
-          <a:ln/>
-        </p:spPr>
-      </p:sp>
-      <p:sp>
-        <p:nvSpPr>
-          <p:cNvPr id="35" name="Text 32"/>
-          <p:cNvSpPr/>
-          <p:nvPr/>
-        </p:nvSpPr>
-        <p:spPr>
-          <a:xfrm>
-            <a:off x="5093208" y="2999232"/>
-            <a:ext cx="2971800" cy="310896"/>
+      <p:pic>
+        <p:nvPicPr>
+          <p:cNvPr id="33" name="Image 5" descr="deploy/assets/icons/exporters.png">    </p:cNvPr>
+          <p:cNvPicPr>
+            <a:picLocks noChangeAspect="1"/>
+          </p:cNvPicPr>
+          <p:nvPr/>
+        </p:nvPicPr>
+        <p:blipFill>
+          <a:blip r:embed="rId7"/>
+          <a:stretch>
+            <a:fillRect/>
+          </a:stretch>
+        </p:blipFill>
+        <p:spPr>
+          <a:xfrm>
+            <a:off x="4471416" y="3076956"/>
+            <a:ext cx="566928" cy="566928"/>
+          </a:xfrm>
+          <a:prstGeom prst="rect">
+            <a:avLst/>
+          </a:prstGeom>
+        </p:spPr>
+      </p:pic>
+      <p:sp>
+        <p:nvSpPr>
+          <p:cNvPr id="34" name="Text 26"/>
+          <p:cNvSpPr/>
+          <p:nvPr/>
+        </p:nvSpPr>
+        <p:spPr>
+          <a:xfrm>
+            <a:off x="5166360" y="3035808"/>
+            <a:ext cx="2880360" cy="310896"/>
           </a:xfrm>
           <a:prstGeom prst="rect">
             <a:avLst/>
@@ -2909,14 +2904,14 @@
       </p:sp>
       <p:sp>
         <p:nvSpPr>
-          <p:cNvPr id="36" name="Text 33"/>
-          <p:cNvSpPr/>
-          <p:nvPr/>
-        </p:nvSpPr>
-        <p:spPr>
-          <a:xfrm>
-            <a:off x="5093208" y="3291840"/>
-            <a:ext cx="2971800" cy="411480"/>
+          <p:cNvPr id="35" name="Text 27"/>
+          <p:cNvSpPr/>
+          <p:nvPr/>
+        </p:nvSpPr>
+        <p:spPr>
+          <a:xfrm>
+            <a:off x="5166360" y="3328416"/>
+            <a:ext cx="2880360" cy="393192"/>
           </a:xfrm>
           <a:prstGeom prst="rect">
             <a:avLst/>
@@ -2948,13 +2943,13 @@
       </p:sp>
       <p:sp>
         <p:nvSpPr>
-          <p:cNvPr id="37" name="Shape 34"/>
-          <p:cNvSpPr/>
-          <p:nvPr/>
-        </p:nvSpPr>
-        <p:spPr>
-          <a:xfrm>
-            <a:off x="4251960" y="4032504"/>
+          <p:cNvPr id="36" name="Shape 28"/>
+          <p:cNvSpPr/>
+          <p:nvPr/>
+        </p:nvSpPr>
+        <p:spPr>
+          <a:xfrm>
+            <a:off x="4251960" y="4069080"/>
             <a:ext cx="3886200" cy="868680"/>
           </a:xfrm>
           <a:prstGeom prst="roundRect">
@@ -2975,18 +2970,18 @@
       </p:sp>
       <p:sp>
         <p:nvSpPr>
-          <p:cNvPr id="38" name="Shape 35"/>
-          <p:cNvSpPr/>
-          <p:nvPr/>
-        </p:nvSpPr>
-        <p:spPr>
-          <a:xfrm>
-            <a:off x="4251960" y="4032504"/>
-            <a:ext cx="109728" cy="868680"/>
+          <p:cNvPr id="37" name="Shape 29"/>
+          <p:cNvSpPr/>
+          <p:nvPr/>
+        </p:nvSpPr>
+        <p:spPr>
+          <a:xfrm>
+            <a:off x="4251960" y="4069080"/>
+            <a:ext cx="91440" cy="868680"/>
           </a:xfrm>
           <a:prstGeom prst="roundRect">
             <a:avLst>
-              <a:gd name="adj" fmla="val 58333"/>
+              <a:gd name="adj" fmla="val 70000"/>
             </a:avLst>
           </a:prstGeom>
           <a:solidFill>
@@ -2995,36 +2990,40 @@
           <a:ln/>
         </p:spPr>
       </p:sp>
-      <p:sp>
-        <p:nvSpPr>
-          <p:cNvPr id="39" name="Shape 36"/>
-          <p:cNvSpPr/>
-          <p:nvPr/>
-        </p:nvSpPr>
-        <p:spPr>
-          <a:xfrm>
-            <a:off x="4489704" y="4238244"/>
-            <a:ext cx="457200" cy="457200"/>
-          </a:xfrm>
-          <a:prstGeom prst="gear6">
-            <a:avLst/>
-          </a:prstGeom>
-          <a:solidFill>
-            <a:srgbClr val="009845"/>
-          </a:solidFill>
-          <a:ln/>
-        </p:spPr>
-      </p:sp>
-      <p:sp>
-        <p:nvSpPr>
-          <p:cNvPr id="40" name="Text 37"/>
-          <p:cNvSpPr/>
-          <p:nvPr/>
-        </p:nvSpPr>
-        <p:spPr>
-          <a:xfrm>
-            <a:off x="5093208" y="4123944"/>
-            <a:ext cx="2971800" cy="310896"/>
+      <p:pic>
+        <p:nvPicPr>
+          <p:cNvPr id="38" name="Image 6" descr="deploy/assets/icons/extractor.png">    </p:cNvPr>
+          <p:cNvPicPr>
+            <a:picLocks noChangeAspect="1"/>
+          </p:cNvPicPr>
+          <p:nvPr/>
+        </p:nvPicPr>
+        <p:blipFill>
+          <a:blip r:embed="rId8"/>
+          <a:stretch>
+            <a:fillRect/>
+          </a:stretch>
+        </p:blipFill>
+        <p:spPr>
+          <a:xfrm>
+            <a:off x="4471416" y="4219956"/>
+            <a:ext cx="566928" cy="566928"/>
+          </a:xfrm>
+          <a:prstGeom prst="rect">
+            <a:avLst/>
+          </a:prstGeom>
+        </p:spPr>
+      </p:pic>
+      <p:sp>
+        <p:nvSpPr>
+          <p:cNvPr id="39" name="Text 30"/>
+          <p:cNvSpPr/>
+          <p:nvPr/>
+        </p:nvSpPr>
+        <p:spPr>
+          <a:xfrm>
+            <a:off x="5166360" y="4178808"/>
+            <a:ext cx="2880360" cy="310896"/>
           </a:xfrm>
           <a:prstGeom prst="rect">
             <a:avLst/>
@@ -3056,14 +3055,14 @@
       </p:sp>
       <p:sp>
         <p:nvSpPr>
-          <p:cNvPr id="41" name="Text 38"/>
-          <p:cNvSpPr/>
-          <p:nvPr/>
-        </p:nvSpPr>
-        <p:spPr>
-          <a:xfrm>
-            <a:off x="5093208" y="4416552"/>
-            <a:ext cx="2971800" cy="411480"/>
+          <p:cNvPr id="40" name="Text 31"/>
+          <p:cNvSpPr/>
+          <p:nvPr/>
+        </p:nvSpPr>
+        <p:spPr>
+          <a:xfrm>
+            <a:off x="5166360" y="4471416"/>
+            <a:ext cx="2880360" cy="393192"/>
           </a:xfrm>
           <a:prstGeom prst="rect">
             <a:avLst/>
@@ -3095,7 +3094,7 @@
       </p:sp>
       <p:sp>
         <p:nvSpPr>
-          <p:cNvPr id="42" name="Shape 39"/>
+          <p:cNvPr id="41" name="Shape 32"/>
           <p:cNvSpPr/>
           <p:nvPr/>
         </p:nvSpPr>
@@ -3122,18 +3121,18 @@
       </p:sp>
       <p:sp>
         <p:nvSpPr>
-          <p:cNvPr id="43" name="Shape 40"/>
+          <p:cNvPr id="42" name="Shape 33"/>
           <p:cNvSpPr/>
           <p:nvPr/>
         </p:nvSpPr>
         <p:spPr>
           <a:xfrm>
             <a:off x="8686800" y="1783080"/>
-            <a:ext cx="109728" cy="868680"/>
+            <a:ext cx="91440" cy="868680"/>
           </a:xfrm>
           <a:prstGeom prst="roundRect">
             <a:avLst>
-              <a:gd name="adj" fmla="val 58333"/>
+              <a:gd name="adj" fmla="val 70000"/>
             </a:avLst>
           </a:prstGeom>
           <a:solidFill>
@@ -3142,36 +3141,40 @@
           <a:ln/>
         </p:spPr>
       </p:sp>
-      <p:sp>
-        <p:nvSpPr>
-          <p:cNvPr id="44" name="Shape 41"/>
-          <p:cNvSpPr/>
-          <p:nvPr/>
-        </p:nvSpPr>
-        <p:spPr>
-          <a:xfrm>
-            <a:off x="8924544" y="1988820"/>
-            <a:ext cx="384048" cy="457200"/>
-          </a:xfrm>
-          <a:prstGeom prst="cylinder">
-            <a:avLst/>
-          </a:prstGeom>
-          <a:solidFill>
-            <a:srgbClr val="2D3543"/>
-          </a:solidFill>
-          <a:ln/>
-        </p:spPr>
-      </p:sp>
-      <p:sp>
-        <p:nvSpPr>
-          <p:cNvPr id="45" name="Text 42"/>
-          <p:cNvSpPr/>
-          <p:nvPr/>
-        </p:nvSpPr>
-        <p:spPr>
-          <a:xfrm>
-            <a:off x="9528048" y="1874520"/>
-            <a:ext cx="1965960" cy="310896"/>
+      <p:pic>
+        <p:nvPicPr>
+          <p:cNvPr id="43" name="Image 7" descr="deploy/assets/icons/prometheus.png">    </p:cNvPr>
+          <p:cNvPicPr>
+            <a:picLocks noChangeAspect="1"/>
+          </p:cNvPicPr>
+          <p:nvPr/>
+        </p:nvPicPr>
+        <p:blipFill>
+          <a:blip r:embed="rId9"/>
+          <a:stretch>
+            <a:fillRect/>
+          </a:stretch>
+        </p:blipFill>
+        <p:spPr>
+          <a:xfrm>
+            <a:off x="8906256" y="1933956"/>
+            <a:ext cx="566928" cy="566928"/>
+          </a:xfrm>
+          <a:prstGeom prst="rect">
+            <a:avLst/>
+          </a:prstGeom>
+        </p:spPr>
+      </p:pic>
+      <p:sp>
+        <p:nvSpPr>
+          <p:cNvPr id="44" name="Text 34"/>
+          <p:cNvSpPr/>
+          <p:nvPr/>
+        </p:nvSpPr>
+        <p:spPr>
+          <a:xfrm>
+            <a:off x="9601200" y="1892808"/>
+            <a:ext cx="1874520" cy="310896"/>
           </a:xfrm>
           <a:prstGeom prst="rect">
             <a:avLst/>
@@ -3203,14 +3206,14 @@
       </p:sp>
       <p:sp>
         <p:nvSpPr>
-          <p:cNvPr id="46" name="Text 43"/>
-          <p:cNvSpPr/>
-          <p:nvPr/>
-        </p:nvSpPr>
-        <p:spPr>
-          <a:xfrm>
-            <a:off x="9528048" y="2167128"/>
-            <a:ext cx="1965960" cy="411480"/>
+          <p:cNvPr id="45" name="Text 35"/>
+          <p:cNvSpPr/>
+          <p:nvPr/>
+        </p:nvSpPr>
+        <p:spPr>
+          <a:xfrm>
+            <a:off x="9601200" y="2185416"/>
+            <a:ext cx="1874520" cy="393192"/>
           </a:xfrm>
           <a:prstGeom prst="rect">
             <a:avLst/>
@@ -3242,13 +3245,13 @@
       </p:sp>
       <p:sp>
         <p:nvSpPr>
-          <p:cNvPr id="47" name="Shape 44"/>
-          <p:cNvSpPr/>
-          <p:nvPr/>
-        </p:nvSpPr>
-        <p:spPr>
-          <a:xfrm>
-            <a:off x="8686800" y="2907792"/>
+          <p:cNvPr id="46" name="Shape 36"/>
+          <p:cNvSpPr/>
+          <p:nvPr/>
+        </p:nvSpPr>
+        <p:spPr>
+          <a:xfrm>
+            <a:off x="8686800" y="2926080"/>
             <a:ext cx="2880360" cy="868680"/>
           </a:xfrm>
           <a:prstGeom prst="roundRect">
@@ -3269,18 +3272,18 @@
       </p:sp>
       <p:sp>
         <p:nvSpPr>
-          <p:cNvPr id="48" name="Shape 45"/>
-          <p:cNvSpPr/>
-          <p:nvPr/>
-        </p:nvSpPr>
-        <p:spPr>
-          <a:xfrm>
-            <a:off x="8686800" y="2907792"/>
-            <a:ext cx="109728" cy="868680"/>
+          <p:cNvPr id="47" name="Shape 37"/>
+          <p:cNvSpPr/>
+          <p:nvPr/>
+        </p:nvSpPr>
+        <p:spPr>
+          <a:xfrm>
+            <a:off x="8686800" y="2926080"/>
+            <a:ext cx="91440" cy="868680"/>
           </a:xfrm>
           <a:prstGeom prst="roundRect">
             <a:avLst>
-              <a:gd name="adj" fmla="val 58333"/>
+              <a:gd name="adj" fmla="val 70000"/>
             </a:avLst>
           </a:prstGeom>
           <a:solidFill>
@@ -3289,76 +3292,40 @@
           <a:ln/>
         </p:spPr>
       </p:sp>
-      <p:sp>
-        <p:nvSpPr>
-          <p:cNvPr id="49" name="Shape 46"/>
-          <p:cNvSpPr/>
-          <p:nvPr/>
-        </p:nvSpPr>
-        <p:spPr>
-          <a:xfrm>
-            <a:off x="8924544" y="3369564"/>
-            <a:ext cx="91440" cy="201168"/>
-          </a:xfrm>
-          <a:prstGeom prst="rect">
-            <a:avLst/>
-          </a:prstGeom>
-          <a:solidFill>
-            <a:srgbClr val="10CFC9"/>
-          </a:solidFill>
-          <a:ln/>
-        </p:spPr>
-      </p:sp>
-      <p:sp>
-        <p:nvSpPr>
-          <p:cNvPr id="50" name="Shape 47"/>
-          <p:cNvSpPr/>
-          <p:nvPr/>
-        </p:nvSpPr>
-        <p:spPr>
-          <a:xfrm>
-            <a:off x="9061704" y="3259836"/>
-            <a:ext cx="91440" cy="310896"/>
-          </a:xfrm>
-          <a:prstGeom prst="rect">
-            <a:avLst/>
-          </a:prstGeom>
-          <a:solidFill>
-            <a:srgbClr val="10CFC9"/>
-          </a:solidFill>
-          <a:ln/>
-        </p:spPr>
-      </p:sp>
-      <p:sp>
-        <p:nvSpPr>
-          <p:cNvPr id="51" name="Shape 48"/>
-          <p:cNvSpPr/>
-          <p:nvPr/>
-        </p:nvSpPr>
-        <p:spPr>
-          <a:xfrm>
-            <a:off x="9198864" y="3150108"/>
-            <a:ext cx="91440" cy="420624"/>
-          </a:xfrm>
-          <a:prstGeom prst="rect">
-            <a:avLst/>
-          </a:prstGeom>
-          <a:solidFill>
-            <a:srgbClr val="10CFC9"/>
-          </a:solidFill>
-          <a:ln/>
-        </p:spPr>
-      </p:sp>
-      <p:sp>
-        <p:nvSpPr>
-          <p:cNvPr id="52" name="Text 49"/>
-          <p:cNvSpPr/>
-          <p:nvPr/>
-        </p:nvSpPr>
-        <p:spPr>
-          <a:xfrm>
-            <a:off x="9528048" y="2999232"/>
-            <a:ext cx="1965960" cy="310896"/>
+      <p:pic>
+        <p:nvPicPr>
+          <p:cNvPr id="48" name="Image 8" descr="deploy/assets/icons/grafana.png">    </p:cNvPr>
+          <p:cNvPicPr>
+            <a:picLocks noChangeAspect="1"/>
+          </p:cNvPicPr>
+          <p:nvPr/>
+        </p:nvPicPr>
+        <p:blipFill>
+          <a:blip r:embed="rId10"/>
+          <a:stretch>
+            <a:fillRect/>
+          </a:stretch>
+        </p:blipFill>
+        <p:spPr>
+          <a:xfrm>
+            <a:off x="8906256" y="3076956"/>
+            <a:ext cx="566928" cy="566928"/>
+          </a:xfrm>
+          <a:prstGeom prst="rect">
+            <a:avLst/>
+          </a:prstGeom>
+        </p:spPr>
+      </p:pic>
+      <p:sp>
+        <p:nvSpPr>
+          <p:cNvPr id="49" name="Text 38"/>
+          <p:cNvSpPr/>
+          <p:nvPr/>
+        </p:nvSpPr>
+        <p:spPr>
+          <a:xfrm>
+            <a:off x="9601200" y="3035808"/>
+            <a:ext cx="1874520" cy="310896"/>
           </a:xfrm>
           <a:prstGeom prst="rect">
             <a:avLst/>
@@ -3390,14 +3357,14 @@
       </p:sp>
       <p:sp>
         <p:nvSpPr>
-          <p:cNvPr id="53" name="Text 50"/>
-          <p:cNvSpPr/>
-          <p:nvPr/>
-        </p:nvSpPr>
-        <p:spPr>
-          <a:xfrm>
-            <a:off x="9528048" y="3291840"/>
-            <a:ext cx="1965960" cy="411480"/>
+          <p:cNvPr id="50" name="Text 39"/>
+          <p:cNvSpPr/>
+          <p:nvPr/>
+        </p:nvSpPr>
+        <p:spPr>
+          <a:xfrm>
+            <a:off x="9601200" y="3328416"/>
+            <a:ext cx="1874520" cy="393192"/>
           </a:xfrm>
           <a:prstGeom prst="rect">
             <a:avLst/>
@@ -3429,13 +3396,13 @@
       </p:sp>
       <p:sp>
         <p:nvSpPr>
-          <p:cNvPr id="54" name="Shape 51"/>
-          <p:cNvSpPr/>
-          <p:nvPr/>
-        </p:nvSpPr>
-        <p:spPr>
-          <a:xfrm>
-            <a:off x="8686800" y="4032504"/>
+          <p:cNvPr id="51" name="Shape 40"/>
+          <p:cNvSpPr/>
+          <p:nvPr/>
+        </p:nvSpPr>
+        <p:spPr>
+          <a:xfrm>
+            <a:off x="8686800" y="4069080"/>
             <a:ext cx="2880360" cy="868680"/>
           </a:xfrm>
           <a:prstGeom prst="roundRect">
@@ -3456,18 +3423,18 @@
       </p:sp>
       <p:sp>
         <p:nvSpPr>
-          <p:cNvPr id="55" name="Shape 52"/>
-          <p:cNvSpPr/>
-          <p:nvPr/>
-        </p:nvSpPr>
-        <p:spPr>
-          <a:xfrm>
-            <a:off x="8686800" y="4032504"/>
-            <a:ext cx="109728" cy="868680"/>
+          <p:cNvPr id="52" name="Shape 41"/>
+          <p:cNvSpPr/>
+          <p:nvPr/>
+        </p:nvSpPr>
+        <p:spPr>
+          <a:xfrm>
+            <a:off x="8686800" y="4069080"/>
+            <a:ext cx="91440" cy="868680"/>
           </a:xfrm>
           <a:prstGeom prst="roundRect">
             <a:avLst>
-              <a:gd name="adj" fmla="val 58333"/>
+              <a:gd name="adj" fmla="val 70000"/>
             </a:avLst>
           </a:prstGeom>
           <a:solidFill>
@@ -3476,76 +3443,40 @@
           <a:ln/>
         </p:spPr>
       </p:sp>
-      <p:sp>
-        <p:nvSpPr>
-          <p:cNvPr id="56" name="Shape 53"/>
-          <p:cNvSpPr/>
-          <p:nvPr/>
-        </p:nvSpPr>
-        <p:spPr>
-          <a:xfrm>
-            <a:off x="8924544" y="4494276"/>
-            <a:ext cx="91440" cy="201168"/>
-          </a:xfrm>
-          <a:prstGeom prst="rect">
-            <a:avLst/>
-          </a:prstGeom>
-          <a:solidFill>
-            <a:srgbClr val="009845"/>
-          </a:solidFill>
-          <a:ln/>
-        </p:spPr>
-      </p:sp>
-      <p:sp>
-        <p:nvSpPr>
-          <p:cNvPr id="57" name="Shape 54"/>
-          <p:cNvSpPr/>
-          <p:nvPr/>
-        </p:nvSpPr>
-        <p:spPr>
-          <a:xfrm>
-            <a:off x="9061704" y="4384548"/>
-            <a:ext cx="91440" cy="310896"/>
-          </a:xfrm>
-          <a:prstGeom prst="rect">
-            <a:avLst/>
-          </a:prstGeom>
-          <a:solidFill>
-            <a:srgbClr val="009845"/>
-          </a:solidFill>
-          <a:ln/>
-        </p:spPr>
-      </p:sp>
-      <p:sp>
-        <p:nvSpPr>
-          <p:cNvPr id="58" name="Shape 55"/>
-          <p:cNvSpPr/>
-          <p:nvPr/>
-        </p:nvSpPr>
-        <p:spPr>
-          <a:xfrm>
-            <a:off x="9198864" y="4274820"/>
-            <a:ext cx="91440" cy="420624"/>
-          </a:xfrm>
-          <a:prstGeom prst="rect">
-            <a:avLst/>
-          </a:prstGeom>
-          <a:solidFill>
-            <a:srgbClr val="009845"/>
-          </a:solidFill>
-          <a:ln/>
-        </p:spPr>
-      </p:sp>
-      <p:sp>
-        <p:nvSpPr>
-          <p:cNvPr id="59" name="Text 56"/>
-          <p:cNvSpPr/>
-          <p:nvPr/>
-        </p:nvSpPr>
-        <p:spPr>
-          <a:xfrm>
-            <a:off x="9528048" y="4123944"/>
-            <a:ext cx="1965960" cy="310896"/>
+      <p:pic>
+        <p:nvPicPr>
+          <p:cNvPr id="53" name="Image 9" descr="deploy/assets/icons/qlik-app.png">    </p:cNvPr>
+          <p:cNvPicPr>
+            <a:picLocks noChangeAspect="1"/>
+          </p:cNvPicPr>
+          <p:nvPr/>
+        </p:nvPicPr>
+        <p:blipFill>
+          <a:blip r:embed="rId11"/>
+          <a:stretch>
+            <a:fillRect/>
+          </a:stretch>
+        </p:blipFill>
+        <p:spPr>
+          <a:xfrm>
+            <a:off x="8906256" y="4219956"/>
+            <a:ext cx="566928" cy="566928"/>
+          </a:xfrm>
+          <a:prstGeom prst="rect">
+            <a:avLst/>
+          </a:prstGeom>
+        </p:spPr>
+      </p:pic>
+      <p:sp>
+        <p:nvSpPr>
+          <p:cNvPr id="54" name="Text 42"/>
+          <p:cNvSpPr/>
+          <p:nvPr/>
+        </p:nvSpPr>
+        <p:spPr>
+          <a:xfrm>
+            <a:off x="9601200" y="4178808"/>
+            <a:ext cx="1874520" cy="310896"/>
           </a:xfrm>
           <a:prstGeom prst="rect">
             <a:avLst/>
@@ -3577,14 +3508,14 @@
       </p:sp>
       <p:sp>
         <p:nvSpPr>
-          <p:cNvPr id="60" name="Text 57"/>
-          <p:cNvSpPr/>
-          <p:nvPr/>
-        </p:nvSpPr>
-        <p:spPr>
-          <a:xfrm>
-            <a:off x="9528048" y="4416552"/>
-            <a:ext cx="1965960" cy="411480"/>
+          <p:cNvPr id="55" name="Text 43"/>
+          <p:cNvSpPr/>
+          <p:nvPr/>
+        </p:nvSpPr>
+        <p:spPr>
+          <a:xfrm>
+            <a:off x="9601200" y="4471416"/>
+            <a:ext cx="1874520" cy="393192"/>
           </a:xfrm>
           <a:prstGeom prst="rect">
             <a:avLst/>
@@ -3616,7 +3547,7 @@
       </p:sp>
       <p:sp>
         <p:nvSpPr>
-          <p:cNvPr id="61" name="Shape 58"/>
+          <p:cNvPr id="56" name="Shape 44"/>
           <p:cNvSpPr/>
           <p:nvPr/>
         </p:nvSpPr>
@@ -3640,14 +3571,14 @@
       </p:sp>
       <p:sp>
         <p:nvSpPr>
-          <p:cNvPr id="62" name="Shape 59"/>
-          <p:cNvSpPr/>
-          <p:nvPr/>
-        </p:nvSpPr>
-        <p:spPr>
-          <a:xfrm>
-            <a:off x="3703320" y="3342132"/>
-            <a:ext cx="548640" cy="1124712"/>
+          <p:cNvPr id="57" name="Shape 45"/>
+          <p:cNvSpPr/>
+          <p:nvPr/>
+        </p:nvSpPr>
+        <p:spPr>
+          <a:xfrm>
+            <a:off x="3703320" y="3360420"/>
+            <a:ext cx="548640" cy="1143000"/>
           </a:xfrm>
           <a:prstGeom prst="line">
             <a:avLst/>
@@ -3664,13 +3595,13 @@
       </p:sp>
       <p:sp>
         <p:nvSpPr>
-          <p:cNvPr id="63" name="Shape 60"/>
-          <p:cNvSpPr/>
-          <p:nvPr/>
-        </p:nvSpPr>
-        <p:spPr>
-          <a:xfrm>
-            <a:off x="3703320" y="4466844"/>
+          <p:cNvPr id="58" name="Shape 46"/>
+          <p:cNvSpPr/>
+          <p:nvPr/>
+        </p:nvSpPr>
+        <p:spPr>
+          <a:xfrm>
+            <a:off x="3703320" y="4503420"/>
             <a:ext cx="548640" cy="0"/>
           </a:xfrm>
           <a:prstGeom prst="line">
@@ -3688,14 +3619,14 @@
       </p:sp>
       <p:sp>
         <p:nvSpPr>
-          <p:cNvPr id="64" name="Shape 61"/>
-          <p:cNvSpPr/>
-          <p:nvPr/>
-        </p:nvSpPr>
-        <p:spPr>
-          <a:xfrm>
-            <a:off x="8229600" y="2217420"/>
-            <a:ext cx="457200" cy="0"/>
+          <p:cNvPr id="59" name="Shape 47"/>
+          <p:cNvSpPr/>
+          <p:nvPr/>
+        </p:nvSpPr>
+        <p:spPr>
+          <a:xfrm>
+            <a:off x="8138160" y="2217420"/>
+            <a:ext cx="548640" cy="0"/>
           </a:xfrm>
           <a:prstGeom prst="line">
             <a:avLst/>
@@ -3712,14 +3643,14 @@
       </p:sp>
       <p:sp>
         <p:nvSpPr>
-          <p:cNvPr id="65" name="Shape 62"/>
-          <p:cNvSpPr/>
-          <p:nvPr/>
-        </p:nvSpPr>
-        <p:spPr>
-          <a:xfrm>
-            <a:off x="8229600" y="3342132"/>
-            <a:ext cx="457200" cy="-1124712"/>
+          <p:cNvPr id="60" name="Shape 48"/>
+          <p:cNvSpPr/>
+          <p:nvPr/>
+        </p:nvSpPr>
+        <p:spPr>
+          <a:xfrm>
+            <a:off x="8138160" y="3360420"/>
+            <a:ext cx="548640" cy="-1143000"/>
           </a:xfrm>
           <a:prstGeom prst="line">
             <a:avLst/>
@@ -3736,14 +3667,14 @@
       </p:sp>
       <p:sp>
         <p:nvSpPr>
-          <p:cNvPr id="66" name="Shape 63"/>
-          <p:cNvSpPr/>
-          <p:nvPr/>
-        </p:nvSpPr>
-        <p:spPr>
-          <a:xfrm>
-            <a:off x="8229600" y="4466844"/>
-            <a:ext cx="457200" cy="-2249424"/>
+          <p:cNvPr id="61" name="Shape 49"/>
+          <p:cNvSpPr/>
+          <p:nvPr/>
+        </p:nvSpPr>
+        <p:spPr>
+          <a:xfrm>
+            <a:off x="8138160" y="4503420"/>
+            <a:ext cx="548640" cy="-2286000"/>
           </a:xfrm>
           <a:prstGeom prst="line">
             <a:avLst/>
@@ -3760,14 +3691,14 @@
       </p:sp>
       <p:sp>
         <p:nvSpPr>
-          <p:cNvPr id="67" name="Shape 64"/>
+          <p:cNvPr id="62" name="Shape 50"/>
           <p:cNvSpPr/>
           <p:nvPr/>
         </p:nvSpPr>
         <p:spPr>
           <a:xfrm>
             <a:off x="10122408" y="2628900"/>
-            <a:ext cx="0" cy="713232"/>
+            <a:ext cx="0" cy="731520"/>
           </a:xfrm>
           <a:prstGeom prst="line">
             <a:avLst/>
@@ -3784,14 +3715,14 @@
       </p:sp>
       <p:sp>
         <p:nvSpPr>
-          <p:cNvPr id="68" name="Shape 65"/>
-          <p:cNvSpPr/>
-          <p:nvPr/>
-        </p:nvSpPr>
-        <p:spPr>
-          <a:xfrm>
-            <a:off x="10122408" y="3753612"/>
-            <a:ext cx="0" cy="713232"/>
+          <p:cNvPr id="63" name="Shape 51"/>
+          <p:cNvSpPr/>
+          <p:nvPr/>
+        </p:nvSpPr>
+        <p:spPr>
+          <a:xfrm>
+            <a:off x="10122408" y="3771900"/>
+            <a:ext cx="0" cy="731520"/>
           </a:xfrm>
           <a:prstGeom prst="line">
             <a:avLst/>
@@ -3806,16 +3737,40 @@
           </a:ln>
         </p:spPr>
       </p:sp>
-      <p:sp>
-        <p:nvSpPr>
-          <p:cNvPr id="69" name="Text 66"/>
-          <p:cNvSpPr/>
-          <p:nvPr/>
-        </p:nvSpPr>
-        <p:spPr>
-          <a:xfrm>
-            <a:off x="457200" y="6053328"/>
-            <a:ext cx="11247120" cy="457200"/>
+      <p:pic>
+        <p:nvPicPr>
+          <p:cNvPr id="64" name="Image 10" descr="deploy/assets/icons/qvd.png">    </p:cNvPr>
+          <p:cNvPicPr>
+            <a:picLocks noChangeAspect="1"/>
+          </p:cNvPicPr>
+          <p:nvPr/>
+        </p:nvPicPr>
+        <p:blipFill>
+          <a:blip r:embed="rId12"/>
+          <a:stretch>
+            <a:fillRect/>
+          </a:stretch>
+        </p:blipFill>
+        <p:spPr>
+          <a:xfrm>
+            <a:off x="457200" y="6016752"/>
+            <a:ext cx="384048" cy="384048"/>
+          </a:xfrm>
+          <a:prstGeom prst="rect">
+            <a:avLst/>
+          </a:prstGeom>
+        </p:spPr>
+      </p:pic>
+      <p:sp>
+        <p:nvSpPr>
+          <p:cNvPr id="65" name="Text 52"/>
+          <p:cNvSpPr/>
+          <p:nvPr/>
+        </p:nvSpPr>
+        <p:spPr>
+          <a:xfrm>
+            <a:off x="914400" y="6035040"/>
+            <a:ext cx="10789920" cy="411480"/>
           </a:xfrm>
           <a:prstGeom prst="rect">
             <a:avLst/>
@@ -3847,14 +3802,14 @@
       </p:sp>
       <p:sp>
         <p:nvSpPr>
-          <p:cNvPr id="70" name="Shape 67"/>
-          <p:cNvSpPr/>
-          <p:nvPr/>
-        </p:nvSpPr>
-        <p:spPr>
-          <a:xfrm>
-            <a:off x="0" y="6629400"/>
-            <a:ext cx="12191695" cy="228600"/>
+          <p:cNvPr id="66" name="Shape 53"/>
+          <p:cNvSpPr/>
+          <p:nvPr/>
+        </p:nvSpPr>
+        <p:spPr>
+          <a:xfrm>
+            <a:off x="0" y="6583680"/>
+            <a:ext cx="12191695" cy="274320"/>
           </a:xfrm>
           <a:prstGeom prst="rect">
             <a:avLst/>
